--- a/Презентация_Уктамов_Мухаммаджон.pptx
+++ b/Презентация_Уктамов_Мухаммаджон.pptx
@@ -2,7 +2,7 @@
 <file path=ppt/presentation.xml><?xml version="1.0" encoding="utf-8"?>
 <p:presentation xmlns:a="http://schemas.openxmlformats.org/drawingml/2006/main" xmlns:r="http://schemas.openxmlformats.org/officeDocument/2006/relationships" xmlns:p="http://schemas.openxmlformats.org/presentationml/2006/main" saveSubsetFonts="1">
   <p:sldMasterIdLst>
-    <p:sldMasterId id="2147483648" r:id="rIdM1"/>
+    <p:sldMasterId id="2147483648" r:id="rIdM"/>
   </p:sldMasterIdLst>
   <p:sldIdLst>
     <p:sldId id="257" r:id="rId1"/>
@@ -54,6 +54,14 @@
 <file path=ppt/slideMasters/slideMaster1.xml><?xml version="1.0" encoding="utf-8"?>
 <p:sldMaster xmlns:a="http://schemas.openxmlformats.org/drawingml/2006/main" xmlns:r="http://schemas.openxmlformats.org/officeDocument/2006/relationships" xmlns:p="http://schemas.openxmlformats.org/presentationml/2006/main">
   <p:cSld>
+    <p:bg>
+      <p:bgPr>
+        <a:solidFill>
+          <a:srgbClr val="FFFFFF"/>
+        </a:solidFill>
+        <a:effectLst/>
+      </p:bgPr>
+    </p:bg>
     <p:spTree>
       <p:nvGrpSpPr>
         <p:cNvPr id="1" name=""/>
@@ -89,7 +97,7 @@
 </file>
 
 <file path=ppt/slides/slide1.xml><?xml version="1.0" encoding="utf-8"?>
-<p:sld xmlns:a="http://schemas.openxmlformats.org/drawingml/2006/main" xmlns:p="http://schemas.openxmlformats.org/presentationml/2006/main" xmlns:r="http://schemas.openxmlformats.org/officeDocument/2006/relationships">
+<p:sld xmlns:a="http://schemas.openxmlformats.org/drawingml/2006/main" xmlns:p="http://schemas.openxmlformats.org/presentationml/2006/main" xmlns:r="http://schemas.openxmlformats.org/officeDocument/2006/relationships" show="1">
   <p:cSld>
     <p:spTree>
       <p:nvGrpSpPr>
@@ -100,37 +108,39 @@
       <p:grpSpPr>
         <a:xfrm>
           <a:off x="0" y="0"/>
-          <a:ext cx="0" cy="0"/>
+          <a:ext cx="12192000" cy="6858000"/>
           <a:chOff x="0" y="0"/>
-          <a:chExt cx="0" cy="0"/>
+          <a:chExt cx="12192000" cy="6858000"/>
         </a:xfrm>
       </p:grpSpPr>
       <p:sp>
         <p:nvSpPr>
-          <p:cNvPr id="10" name="BgGrad"/>
-          <p:cNvSpPr txBox="1">
-            <a:spLocks noGrp="1"/>
-          </p:cNvSpPr>
-          <p:nvPr/>
-        </p:nvSpPr>
-        <p:spPr>
+          <p:cNvPr id="2" name="sp2"/>
+          <p:cNvSpPr txBox="1"/>
+          <p:nvPr/>
+        </p:nvSpPr>
+        <p:spPr bwMode="auto">
           <a:xfrm>
             <a:off x="0" y="0"/>
-            <a:ext cx="12193200" cy="6858000"/>
-          </a:xfrm>
-          <a:prstGeom prst="rect">
-            <a:avLst/>
-          </a:prstGeom>
-          <a:gradFill>
+            <a:ext cx="12192000" cy="6858000"/>
+          </a:xfrm>
+          <a:prstGeom prst="rect">
+            <a:avLst/>
+          </a:prstGeom>
+          <a:gradFill rotWithShape="1">
             <a:gsLst>
               <a:gs pos="0">
-                <a:srgbClr val="0D1B2A"/>
+                <a:solidFill>
+                  <a:srgbClr val="0D1B2A"/>
+                </a:solidFill>
               </a:gs>
               <a:gs pos="100000">
-                <a:srgbClr val="1A3A5C"/>
+                <a:solidFill>
+                  <a:srgbClr val="1A3A5C"/>
+                </a:solidFill>
               </a:gs>
             </a:gsLst>
-            <a:lin ang="16200000" scaled="0"/>
+            <a:lin ang="0" scaled="0"/>
           </a:gradFill>
           <a:ln>
             <a:noFill/>
@@ -144,15 +154,13 @@
       </p:sp>
       <p:sp>
         <p:nvSpPr>
-          <p:cNvPr id="11" name="Circle"/>
-          <p:cNvSpPr txBox="1">
-            <a:spLocks noGrp="1"/>
-          </p:cNvSpPr>
-          <p:nvPr/>
-        </p:nvSpPr>
-        <p:spPr>
-          <a:xfrm>
-            <a:off x="6660000" y="-1440000"/>
+          <p:cNvPr id="3" name="sp3"/>
+          <p:cNvSpPr txBox="1"/>
+          <p:nvPr/>
+        </p:nvSpPr>
+        <p:spPr bwMode="auto">
+          <a:xfrm>
+            <a:off x="7200000" y="-1440000"/>
             <a:ext cx="7920000" cy="7920000"/>
           </a:xfrm>
           <a:prstGeom prst="ellipse">
@@ -160,7 +168,7 @@
           </a:prstGeom>
           <a:solidFill>
             <a:srgbClr val="1565C0">
-              <a:alpha val="15000"/>
+              <a:alpha val="18000"/>
             </a:srgbClr>
           </a:solidFill>
           <a:ln>
@@ -175,23 +183,21 @@
       </p:sp>
       <p:sp>
         <p:nvSpPr>
-          <p:cNvPr id="12" name="Circle2"/>
-          <p:cNvSpPr txBox="1">
-            <a:spLocks noGrp="1"/>
-          </p:cNvSpPr>
-          <p:nvPr/>
-        </p:nvSpPr>
-        <p:spPr>
-          <a:xfrm>
-            <a:off x="7200000" y="2880000"/>
-            <a:ext cx="5040000" cy="5040000"/>
+          <p:cNvPr id="4" name="sp4"/>
+          <p:cNvSpPr txBox="1"/>
+          <p:nvPr/>
+        </p:nvSpPr>
+        <p:spPr bwMode="auto">
+          <a:xfrm>
+            <a:off x="7920000" y="3240000"/>
+            <a:ext cx="4680000" cy="4680000"/>
           </a:xfrm>
           <a:prstGeom prst="ellipse">
             <a:avLst/>
           </a:prstGeom>
           <a:solidFill>
             <a:srgbClr val="00B4D8">
-              <a:alpha val="12000"/>
+              <a:alpha val="14000"/>
             </a:srgbClr>
           </a:solidFill>
           <a:ln>
@@ -206,27 +212,29 @@
       </p:sp>
       <p:sp>
         <p:nvSpPr>
-          <p:cNvPr id="13" name="Bar"/>
-          <p:cNvSpPr txBox="1">
-            <a:spLocks noGrp="1"/>
-          </p:cNvSpPr>
-          <p:nvPr/>
-        </p:nvSpPr>
-        <p:spPr>
+          <p:cNvPr id="5" name="sp5"/>
+          <p:cNvSpPr txBox="1"/>
+          <p:nvPr/>
+        </p:nvSpPr>
+        <p:spPr bwMode="auto">
           <a:xfrm>
             <a:off x="0" y="0"/>
-            <a:ext cx="180000" cy="6858000"/>
-          </a:xfrm>
-          <a:prstGeom prst="rect">
-            <a:avLst/>
-          </a:prstGeom>
-          <a:gradFill>
+            <a:ext cx="216000" cy="6858000"/>
+          </a:xfrm>
+          <a:prstGeom prst="rect">
+            <a:avLst/>
+          </a:prstGeom>
+          <a:gradFill rotWithShape="1">
             <a:gsLst>
               <a:gs pos="0">
-                <a:srgbClr val="00B4D8"/>
+                <a:solidFill>
+                  <a:srgbClr val="00B4D8"/>
+                </a:solidFill>
               </a:gs>
               <a:gs pos="100000">
-                <a:srgbClr val="1565C0"/>
+                <a:solidFill>
+                  <a:srgbClr val="1565C0"/>
+                </a:solidFill>
               </a:gs>
             </a:gsLst>
             <a:lin ang="5400000" scaled="0"/>
@@ -243,16 +251,52 @@
       </p:sp>
       <p:sp>
         <p:nvSpPr>
-          <p:cNvPr id="14" name="Line14"/>
-          <p:cNvSpPr txBox="1">
-            <a:spLocks noGrp="1"/>
-          </p:cNvSpPr>
-          <p:nvPr/>
-        </p:nvSpPr>
-        <p:spPr>
-          <a:xfrm>
-            <a:off x="288000" y="4500000"/>
-            <a:ext cx="7632000" cy="7200"/>
+          <p:cNvPr id="6" name="sp6"/>
+          <p:cNvSpPr txBox="1"/>
+          <p:nvPr/>
+        </p:nvSpPr>
+        <p:spPr bwMode="auto">
+          <a:xfrm>
+            <a:off x="324000" y="3960000"/>
+            <a:ext cx="5760000" cy="251999"/>
+          </a:xfrm>
+          <a:prstGeom prst="rect">
+            <a:avLst/>
+          </a:prstGeom>
+          <a:noFill/>
+          <a:ln>
+            <a:noFill/>
+          </a:ln>
+        </p:spPr>
+        <p:txBody>
+          <a:bodyPr wrap="square" anchor="t">
+            <a:normAutofit/>
+          </a:bodyPr>
+          <a:lstStyle/>
+          <a:p>
+            <a:pPr algn="l"/>
+            <a:r>
+              <a:rPr lang="ru-RU" altLang="en-US" sz="900" b="1" i="0" dirty="0" smtClean="0">
+                <a:solidFill>
+                  <a:srgbClr val="00B4D8"/>
+                </a:solidFill>
+                <a:latin typeface="Calibri"/>
+              </a:rPr>
+              <a:t>ВЫПУСКНАЯ КВАЛИФИКАЦИОННАЯ РАБОТА</a:t>
+            </a:r>
+          </a:p>
+        </p:txBody>
+      </p:sp>
+      <p:sp>
+        <p:nvSpPr>
+          <p:cNvPr id="7" name="sp7"/>
+          <p:cNvSpPr txBox="1"/>
+          <p:nvPr/>
+        </p:nvSpPr>
+        <p:spPr bwMode="auto">
+          <a:xfrm>
+            <a:off x="324000" y="4266000"/>
+            <a:ext cx="7200000" cy="36000"/>
           </a:xfrm>
           <a:prstGeom prst="rect">
             <a:avLst/>
@@ -272,118 +316,68 @@
       </p:sp>
       <p:sp>
         <p:nvSpPr>
-          <p:cNvPr id="15" name="Label"/>
-          <p:cNvSpPr txBox="1">
-            <a:spLocks noGrp="1"/>
-          </p:cNvSpPr>
-          <p:nvPr/>
-        </p:nvSpPr>
-        <p:spPr>
-          <a:xfrm>
-            <a:off x="324000" y="4104000"/>
-            <a:ext cx="4320000" cy="216000"/>
-          </a:xfrm>
-          <a:prstGeom prst="rect">
-            <a:avLst/>
-          </a:prstGeom>
-          <a:noFill/>
-          <a:ln>
-            <a:noFill/>
-          </a:ln>
-        </p:spPr>
-        <p:txBody>
-          <a:bodyPr wrap="square" anchor="ctr">
-            <a:normAutofit/>
-          </a:bodyPr>
-          <a:lstStyle/>
+          <p:cNvPr id="8" name="sp8"/>
+          <p:cNvSpPr txBox="1"/>
+          <p:nvPr/>
+        </p:nvSpPr>
+        <p:spPr bwMode="auto">
+          <a:xfrm>
+            <a:off x="324000" y="900000"/>
+            <a:ext cx="7200000" cy="3240000"/>
+          </a:xfrm>
+          <a:prstGeom prst="rect">
+            <a:avLst/>
+          </a:prstGeom>
+          <a:noFill/>
+          <a:ln>
+            <a:noFill/>
+          </a:ln>
+        </p:spPr>
+        <p:txBody>
+          <a:bodyPr wrap="square" anchor="t">
+            <a:normAutofit/>
+          </a:bodyPr>
+          <a:lstStyle/>
+          <a:p>
+            <a:pPr algn="l"/>
+            <a:r>
+              <a:rPr lang="ru-RU" altLang="en-US" sz="3000" b="1" i="0" dirty="0" smtClean="0">
+                <a:solidFill>
+                  <a:srgbClr val="FFFFFF"/>
+                </a:solidFill>
+                <a:latin typeface="Calibri"/>
+              </a:rPr>
+              <a:t>Цифровизация экономики</a:t>
+            </a:r>
+          </a:p>
           <a:p>
             <a:pPr algn="l">
               <a:spcBef>
-                <a:spcPts val="0"/>
+                <a:spcPts val="400"/>
               </a:spcBef>
             </a:pPr>
             <a:r>
-              <a:rPr lang="ru-RU" sz="900" b="1" i="0" dirty="0" smtClean="0">
-                <a:solidFill>
-                  <a:srgbClr val="00B4D8"/>
-                </a:solidFill>
-                <a:latin typeface="+mj-lt"/>
-              </a:rPr>
-              <a:t>ДИПЛОМНАЯ РАБОТА</a:t>
-            </a:r>
-          </a:p>
-        </p:txBody>
-      </p:sp>
-      <p:sp>
-        <p:nvSpPr>
-          <p:cNvPr id="16" name="Title"/>
-          <p:cNvSpPr txBox="1">
-            <a:spLocks noGrp="1"/>
-          </p:cNvSpPr>
-          <p:nvPr/>
-        </p:nvSpPr>
-        <p:spPr>
-          <a:xfrm>
-            <a:off x="324000" y="1080000"/>
-            <a:ext cx="7560000" cy="3240000"/>
-          </a:xfrm>
-          <a:prstGeom prst="rect">
-            <a:avLst/>
-          </a:prstGeom>
-          <a:noFill/>
-          <a:ln>
-            <a:noFill/>
-          </a:ln>
-        </p:spPr>
-        <p:txBody>
-          <a:bodyPr wrap="square" anchor="t">
-            <a:normAutofit/>
-          </a:bodyPr>
-          <a:lstStyle/>
+              <a:rPr lang="ru-RU" altLang="en-US" sz="2500" b="1" i="0" dirty="0" smtClean="0">
+                <a:solidFill>
+                  <a:srgbClr val="FFFFFF"/>
+                </a:solidFill>
+                <a:latin typeface="Calibri"/>
+              </a:rPr>
+              <a:t>и устойчивость стран</a:t>
+            </a:r>
+          </a:p>
           <a:p>
             <a:pPr algn="l">
               <a:spcBef>
-                <a:spcPts val="0"/>
+                <a:spcPts val="400"/>
               </a:spcBef>
             </a:pPr>
             <a:r>
-              <a:rPr lang="ru-RU" sz="3000" b="1" i="0" dirty="0" smtClean="0">
+              <a:rPr lang="ru-RU" altLang="en-US" sz="2500" b="1" i="0" dirty="0" smtClean="0">
                 <a:solidFill>
                   <a:srgbClr val="FFFFFF"/>
                 </a:solidFill>
-                <a:latin typeface="+mj-lt"/>
-              </a:rPr>
-              <a:t>Цифровизация экономики</a:t>
-            </a:r>
-          </a:p>
-          <a:p>
-            <a:pPr algn="l">
-              <a:spcBef>
-                <a:spcPts val="0"/>
-              </a:spcBef>
-            </a:pPr>
-            <a:r>
-              <a:rPr lang="ru-RU" sz="2600" b="1" i="0" dirty="0" smtClean="0">
-                <a:solidFill>
-                  <a:srgbClr val="FFFFFF"/>
-                </a:solidFill>
-                <a:latin typeface="+mj-lt"/>
-              </a:rPr>
-              <a:t>и устойчивость стран</a:t>
-            </a:r>
-          </a:p>
-          <a:p>
-            <a:pPr algn="l">
-              <a:spcBef>
-                <a:spcPts val="0"/>
-              </a:spcBef>
-            </a:pPr>
-            <a:r>
-              <a:rPr lang="ru-RU" sz="2600" b="1" i="0" dirty="0" smtClean="0">
-                <a:solidFill>
-                  <a:srgbClr val="FFFFFF"/>
-                </a:solidFill>
-                <a:latin typeface="+mj-lt"/>
+                <a:latin typeface="Calibri"/>
               </a:rPr>
               <a:t>к глобальным кризисам</a:t>
             </a:r>
@@ -392,15 +386,13 @@
       </p:sp>
       <p:sp>
         <p:nvSpPr>
-          <p:cNvPr id="17" name="Sub"/>
-          <p:cNvSpPr txBox="1">
-            <a:spLocks noGrp="1"/>
-          </p:cNvSpPr>
-          <p:nvPr/>
-        </p:nvSpPr>
-        <p:spPr>
-          <a:xfrm>
-            <a:off x="324000" y="4608000"/>
+          <p:cNvPr id="9" name="sp9"/>
+          <p:cNvSpPr txBox="1"/>
+          <p:nvPr/>
+        </p:nvSpPr>
+        <p:spPr bwMode="auto">
+          <a:xfrm>
+            <a:off x="324000" y="4356000"/>
             <a:ext cx="7920000" cy="1980000"/>
           </a:xfrm>
           <a:prstGeom prst="rect">
@@ -417,33 +409,25 @@
           </a:bodyPr>
           <a:lstStyle/>
           <a:p>
-            <a:pPr algn="l">
-              <a:spcBef>
-                <a:spcPts val="0"/>
-              </a:spcBef>
-            </a:pPr>
-            <a:r>
-              <a:rPr lang="ru-RU" sz="1300" b="0" i="0" dirty="0" smtClean="0">
+            <a:pPr algn="l"/>
+            <a:r>
+              <a:rPr lang="ru-RU" altLang="en-US" sz="1300" b="0" i="0" dirty="0" smtClean="0">
                 <a:solidFill>
                   <a:srgbClr val="90E0EF"/>
                 </a:solidFill>
-                <a:latin typeface="+mj-lt"/>
+                <a:latin typeface="Calibri"/>
               </a:rPr>
               <a:t>Выпускная квалификационная работа</a:t>
             </a:r>
           </a:p>
           <a:p>
-            <a:pPr algn="l">
-              <a:spcBef>
-                <a:spcPts val="0"/>
-              </a:spcBef>
-            </a:pPr>
-            <a:r>
-              <a:rPr lang="ru-RU" sz="1300" b="0" i="0" dirty="0" smtClean="0">
+            <a:pPr algn="l"/>
+            <a:r>
+              <a:rPr lang="ru-RU" altLang="en-US" sz="1300" b="0" i="0" dirty="0" smtClean="0">
                 <a:solidFill>
                   <a:srgbClr val="90E0EF"/>
                 </a:solidFill>
-                <a:latin typeface="+mj-lt"/>
+                <a:latin typeface="Calibri"/>
               </a:rPr>
               <a:t>Уктамов Мухаммаджон</a:t>
             </a:r>
@@ -457,33 +441,25 @@
             <a:endParaRPr lang="ru-RU" dirty="0"/>
           </a:p>
           <a:p>
-            <a:pPr algn="l">
-              <a:spcBef>
-                <a:spcPts val="0"/>
-              </a:spcBef>
-            </a:pPr>
-            <a:r>
-              <a:rPr lang="ru-RU" sz="1300" b="0" i="0" dirty="0" smtClean="0">
+            <a:pPr algn="l"/>
+            <a:r>
+              <a:rPr lang="ru-RU" altLang="en-US" sz="1300" b="0" i="0" dirty="0" smtClean="0">
                 <a:solidFill>
                   <a:srgbClr val="90E0EF"/>
                 </a:solidFill>
-                <a:latin typeface="+mj-lt"/>
+                <a:latin typeface="Calibri"/>
               </a:rPr>
               <a:t>Направление: Экономика</a:t>
             </a:r>
           </a:p>
           <a:p>
-            <a:pPr algn="l">
-              <a:spcBef>
-                <a:spcPts val="0"/>
-              </a:spcBef>
-            </a:pPr>
-            <a:r>
-              <a:rPr lang="ru-RU" sz="1300" b="0" i="0" dirty="0" smtClean="0">
+            <a:pPr algn="l"/>
+            <a:r>
+              <a:rPr lang="ru-RU" altLang="en-US" sz="1300" b="0" i="0" dirty="0" smtClean="0">
                 <a:solidFill>
                   <a:srgbClr val="90E0EF"/>
                 </a:solidFill>
-                <a:latin typeface="+mj-lt"/>
+                <a:latin typeface="Calibri"/>
               </a:rPr>
               <a:t>Год защиты: 2025</a:t>
             </a:r>
@@ -492,23 +468,21 @@
       </p:sp>
       <p:sp>
         <p:nvSpPr>
-          <p:cNvPr id="18" name="Footer"/>
-          <p:cNvSpPr txBox="1">
-            <a:spLocks noGrp="1"/>
-          </p:cNvSpPr>
-          <p:nvPr/>
-        </p:nvSpPr>
-        <p:spPr>
-          <a:xfrm>
-            <a:off x="0" y="6462000"/>
-            <a:ext cx="12193200" cy="396000"/>
+          <p:cNvPr id="10" name="sp10"/>
+          <p:cNvSpPr txBox="1"/>
+          <p:nvPr/>
+        </p:nvSpPr>
+        <p:spPr bwMode="auto">
+          <a:xfrm>
+            <a:off x="0" y="6444001"/>
+            <a:ext cx="12192000" cy="413999"/>
           </a:xfrm>
           <a:prstGeom prst="rect">
             <a:avLst/>
           </a:prstGeom>
           <a:solidFill>
             <a:srgbClr val="1565C0">
-              <a:alpha val="80000"/>
+              <a:alpha val="90000"/>
             </a:srgbClr>
           </a:solidFill>
           <a:ln>
@@ -523,42 +497,36 @@
       </p:sp>
       <p:sp>
         <p:nvSpPr>
-          <p:cNvPr id="19" name="SlideNum"/>
-          <p:cNvSpPr txBox="1">
-            <a:spLocks noGrp="1"/>
-          </p:cNvSpPr>
-          <p:nvPr/>
-        </p:nvSpPr>
-        <p:spPr>
-          <a:xfrm>
-            <a:off x="10933200" y="6624000"/>
-            <a:ext cx="1152000" cy="180000"/>
-          </a:xfrm>
-          <a:prstGeom prst="rect">
-            <a:avLst/>
-          </a:prstGeom>
-          <a:noFill/>
-          <a:ln>
-            <a:noFill/>
-          </a:ln>
-        </p:spPr>
-        <p:txBody>
-          <a:bodyPr wrap="square" anchor="ctr">
-            <a:normAutofit/>
-          </a:bodyPr>
-          <a:lstStyle/>
-          <a:p>
-            <a:pPr algn="r">
-              <a:spcBef>
-                <a:spcPts val="0"/>
-              </a:spcBef>
-            </a:pPr>
-            <a:r>
-              <a:rPr lang="ru-RU" sz="900" b="0" i="0" dirty="0" smtClean="0">
-                <a:solidFill>
-                  <a:srgbClr val="90E0EF"/>
-                </a:solidFill>
-                <a:latin typeface="+mj-lt"/>
+          <p:cNvPr id="11" name="sp11"/>
+          <p:cNvSpPr txBox="1"/>
+          <p:nvPr/>
+        </p:nvSpPr>
+        <p:spPr bwMode="auto">
+          <a:xfrm>
+            <a:off x="10932000" y="6606001"/>
+            <a:ext cx="1152000" cy="198000"/>
+          </a:xfrm>
+          <a:prstGeom prst="rect">
+            <a:avLst/>
+          </a:prstGeom>
+          <a:noFill/>
+          <a:ln>
+            <a:noFill/>
+          </a:ln>
+        </p:spPr>
+        <p:txBody>
+          <a:bodyPr wrap="square" anchor="t">
+            <a:normAutofit/>
+          </a:bodyPr>
+          <a:lstStyle/>
+          <a:p>
+            <a:pPr algn="r"/>
+            <a:r>
+              <a:rPr lang="ru-RU" altLang="en-US" sz="900" b="0" i="0" dirty="0" smtClean="0">
+                <a:solidFill>
+                  <a:srgbClr val="546E7A"/>
+                </a:solidFill>
+                <a:latin typeface="Calibri"/>
               </a:rPr>
               <a:t>1 / 15</a:t>
             </a:r>
@@ -574,7 +542,7 @@
 </file>
 
 <file path=ppt/slides/slide10.xml><?xml version="1.0" encoding="utf-8"?>
-<p:sld xmlns:a="http://schemas.openxmlformats.org/drawingml/2006/main" xmlns:p="http://schemas.openxmlformats.org/presentationml/2006/main" xmlns:r="http://schemas.openxmlformats.org/officeDocument/2006/relationships">
+<p:sld xmlns:a="http://schemas.openxmlformats.org/drawingml/2006/main" xmlns:p="http://schemas.openxmlformats.org/presentationml/2006/main" xmlns:r="http://schemas.openxmlformats.org/officeDocument/2006/relationships" show="1">
   <p:cSld>
     <p:spTree>
       <p:nvGrpSpPr>
@@ -585,34 +553,36 @@
       <p:grpSpPr>
         <a:xfrm>
           <a:off x="0" y="0"/>
-          <a:ext cx="0" cy="0"/>
+          <a:ext cx="12192000" cy="6858000"/>
           <a:chOff x="0" y="0"/>
-          <a:chExt cx="0" cy="0"/>
+          <a:chExt cx="12192000" cy="6858000"/>
         </a:xfrm>
       </p:grpSpPr>
       <p:sp>
         <p:nvSpPr>
-          <p:cNvPr id="10" name="Bg"/>
-          <p:cNvSpPr txBox="1">
-            <a:spLocks noGrp="1"/>
-          </p:cNvSpPr>
-          <p:nvPr/>
-        </p:nvSpPr>
-        <p:spPr>
+          <p:cNvPr id="2" name="sp2"/>
+          <p:cNvSpPr txBox="1"/>
+          <p:nvPr/>
+        </p:nvSpPr>
+        <p:spPr bwMode="auto">
           <a:xfrm>
             <a:off x="0" y="0"/>
-            <a:ext cx="12193200" cy="6858000"/>
-          </a:xfrm>
-          <a:prstGeom prst="rect">
-            <a:avLst/>
-          </a:prstGeom>
-          <a:gradFill>
+            <a:ext cx="12192000" cy="6858000"/>
+          </a:xfrm>
+          <a:prstGeom prst="rect">
+            <a:avLst/>
+          </a:prstGeom>
+          <a:gradFill rotWithShape="1">
             <a:gsLst>
               <a:gs pos="0">
-                <a:srgbClr val="0D1B2A"/>
+                <a:solidFill>
+                  <a:srgbClr val="0D1B2A"/>
+                </a:solidFill>
               </a:gs>
               <a:gs pos="100000">
-                <a:srgbClr val="1A3A5C"/>
+                <a:solidFill>
+                  <a:srgbClr val="1A3A5C"/>
+                </a:solidFill>
               </a:gs>
             </a:gsLst>
             <a:lin ang="0" scaled="0"/>
@@ -629,27 +599,29 @@
       </p:sp>
       <p:sp>
         <p:nvSpPr>
-          <p:cNvPr id="11" name="Accent"/>
-          <p:cNvSpPr txBox="1">
-            <a:spLocks noGrp="1"/>
-          </p:cNvSpPr>
-          <p:nvPr/>
-        </p:nvSpPr>
-        <p:spPr>
+          <p:cNvPr id="3" name="sp3"/>
+          <p:cNvSpPr txBox="1"/>
+          <p:nvPr/>
+        </p:nvSpPr>
+        <p:spPr bwMode="auto">
           <a:xfrm>
             <a:off x="0" y="0"/>
-            <a:ext cx="251999" cy="6858000"/>
-          </a:xfrm>
-          <a:prstGeom prst="rect">
-            <a:avLst/>
-          </a:prstGeom>
-          <a:gradFill>
+            <a:ext cx="288000" cy="6858000"/>
+          </a:xfrm>
+          <a:prstGeom prst="rect">
+            <a:avLst/>
+          </a:prstGeom>
+          <a:gradFill rotWithShape="1">
             <a:gsLst>
               <a:gs pos="0">
-                <a:srgbClr val="00B4D8"/>
+                <a:solidFill>
+                  <a:srgbClr val="00B4D8"/>
+                </a:solidFill>
               </a:gs>
               <a:gs pos="100000">
-                <a:srgbClr val="1565C0"/>
+                <a:solidFill>
+                  <a:srgbClr val="1565C0"/>
+                </a:solidFill>
               </a:gs>
             </a:gsLst>
             <a:lin ang="5400000" scaled="0"/>
@@ -666,16 +638,14 @@
       </p:sp>
       <p:sp>
         <p:nvSpPr>
-          <p:cNvPr id="12" name="Chapter"/>
-          <p:cNvSpPr txBox="1">
-            <a:spLocks noGrp="1"/>
-          </p:cNvSpPr>
-          <p:nvPr/>
-        </p:nvSpPr>
-        <p:spPr>
+          <p:cNvPr id="4" name="sp4"/>
+          <p:cNvSpPr txBox="1"/>
+          <p:nvPr/>
+        </p:nvSpPr>
+        <p:spPr bwMode="auto">
           <a:xfrm>
             <a:off x="432000" y="540000"/>
-            <a:ext cx="11581199" cy="1800000"/>
+            <a:ext cx="11580000" cy="1800000"/>
           </a:xfrm>
           <a:prstGeom prst="rect">
             <a:avLst/>
@@ -691,17 +661,13 @@
           </a:bodyPr>
           <a:lstStyle/>
           <a:p>
-            <a:pPr algn="ctr">
-              <a:spcBef>
-                <a:spcPts val="0"/>
-              </a:spcBef>
-            </a:pPr>
-            <a:r>
-              <a:rPr lang="ru-RU" sz="5600" b="1" i="0" dirty="0" smtClean="0">
+            <a:pPr algn="ctr"/>
+            <a:r>
+              <a:rPr lang="ru-RU" altLang="en-US" sz="5200" b="1" i="0" dirty="0" smtClean="0">
                 <a:solidFill>
                   <a:srgbClr val="00B4D8"/>
                 </a:solidFill>
-                <a:latin typeface="+mj-lt"/>
+                <a:latin typeface="Calibri"/>
               </a:rPr>
               <a:t>Глава III</a:t>
             </a:r>
@@ -710,16 +676,14 @@
       </p:sp>
       <p:sp>
         <p:nvSpPr>
-          <p:cNvPr id="13" name="Line13"/>
-          <p:cNvSpPr txBox="1">
-            <a:spLocks noGrp="1"/>
-          </p:cNvSpPr>
-          <p:nvPr/>
-        </p:nvSpPr>
-        <p:spPr>
-          <a:xfrm>
-            <a:off x="1080000" y="2592000"/>
-            <a:ext cx="10033200" cy="7200"/>
+          <p:cNvPr id="5" name="sp5"/>
+          <p:cNvSpPr txBox="1"/>
+          <p:nvPr/>
+        </p:nvSpPr>
+        <p:spPr bwMode="auto">
+          <a:xfrm>
+            <a:off x="1080000" y="2520000"/>
+            <a:ext cx="10032000" cy="36000"/>
           </a:xfrm>
           <a:prstGeom prst="rect">
             <a:avLst/>
@@ -739,16 +703,14 @@
       </p:sp>
       <p:sp>
         <p:nvSpPr>
-          <p:cNvPr id="14" name="Sub"/>
-          <p:cNvSpPr txBox="1">
-            <a:spLocks noGrp="1"/>
-          </p:cNvSpPr>
-          <p:nvPr/>
-        </p:nvSpPr>
-        <p:spPr>
-          <a:xfrm>
-            <a:off x="432000" y="2736000"/>
-            <a:ext cx="11581199" cy="3060000"/>
+          <p:cNvPr id="6" name="sp6"/>
+          <p:cNvSpPr txBox="1"/>
+          <p:nvPr/>
+        </p:nvSpPr>
+        <p:spPr bwMode="auto">
+          <a:xfrm>
+            <a:off x="432000" y="2664000"/>
+            <a:ext cx="11580000" cy="3978000"/>
           </a:xfrm>
           <a:prstGeom prst="rect">
             <a:avLst/>
@@ -764,33 +726,25 @@
           </a:bodyPr>
           <a:lstStyle/>
           <a:p>
-            <a:pPr algn="ctr">
-              <a:spcBef>
-                <a:spcPts val="0"/>
-              </a:spcBef>
-            </a:pPr>
-            <a:r>
-              <a:rPr lang="ru-RU" sz="2000" b="0" i="0" dirty="0" smtClean="0">
+            <a:pPr algn="ctr"/>
+            <a:r>
+              <a:rPr lang="ru-RU" altLang="en-US" sz="2000" b="0" i="0" dirty="0" smtClean="0">
                 <a:solidFill>
                   <a:srgbClr val="FFFFFF"/>
                 </a:solidFill>
-                <a:latin typeface="+mj-lt"/>
+                <a:latin typeface="Calibri"/>
               </a:rPr>
               <a:t>Цифровая трансформация Узбекистана</a:t>
             </a:r>
           </a:p>
           <a:p>
-            <a:pPr algn="ctr">
-              <a:spcBef>
-                <a:spcPts val="0"/>
-              </a:spcBef>
-            </a:pPr>
-            <a:r>
-              <a:rPr lang="ru-RU" sz="2000" b="0" i="0" dirty="0" smtClean="0">
+            <a:pPr algn="ctr"/>
+            <a:r>
+              <a:rPr lang="ru-RU" altLang="en-US" sz="2000" b="0" i="0" dirty="0" smtClean="0">
                 <a:solidFill>
                   <a:srgbClr val="FFFFFF"/>
                 </a:solidFill>
-                <a:latin typeface="+mj-lt"/>
+                <a:latin typeface="Calibri"/>
               </a:rPr>
               <a:t>и практические рекомендации</a:t>
             </a:r>
@@ -799,42 +753,36 @@
       </p:sp>
       <p:sp>
         <p:nvSpPr>
-          <p:cNvPr id="15" name="SlideNum"/>
-          <p:cNvSpPr txBox="1">
-            <a:spLocks noGrp="1"/>
-          </p:cNvSpPr>
-          <p:nvPr/>
-        </p:nvSpPr>
-        <p:spPr>
-          <a:xfrm>
-            <a:off x="10933200" y="6624000"/>
-            <a:ext cx="1152000" cy="180000"/>
-          </a:xfrm>
-          <a:prstGeom prst="rect">
-            <a:avLst/>
-          </a:prstGeom>
-          <a:noFill/>
-          <a:ln>
-            <a:noFill/>
-          </a:ln>
-        </p:spPr>
-        <p:txBody>
-          <a:bodyPr wrap="square" anchor="ctr">
-            <a:normAutofit/>
-          </a:bodyPr>
-          <a:lstStyle/>
-          <a:p>
-            <a:pPr algn="r">
-              <a:spcBef>
-                <a:spcPts val="0"/>
-              </a:spcBef>
-            </a:pPr>
-            <a:r>
-              <a:rPr lang="ru-RU" sz="900" b="0" i="0" dirty="0" smtClean="0">
-                <a:solidFill>
-                  <a:srgbClr val="90E0EF"/>
-                </a:solidFill>
-                <a:latin typeface="+mj-lt"/>
+          <p:cNvPr id="7" name="sp7"/>
+          <p:cNvSpPr txBox="1"/>
+          <p:nvPr/>
+        </p:nvSpPr>
+        <p:spPr bwMode="auto">
+          <a:xfrm>
+            <a:off x="10932000" y="6606001"/>
+            <a:ext cx="1152000" cy="198000"/>
+          </a:xfrm>
+          <a:prstGeom prst="rect">
+            <a:avLst/>
+          </a:prstGeom>
+          <a:noFill/>
+          <a:ln>
+            <a:noFill/>
+          </a:ln>
+        </p:spPr>
+        <p:txBody>
+          <a:bodyPr wrap="square" anchor="t">
+            <a:normAutofit/>
+          </a:bodyPr>
+          <a:lstStyle/>
+          <a:p>
+            <a:pPr algn="r"/>
+            <a:r>
+              <a:rPr lang="ru-RU" altLang="en-US" sz="900" b="0" i="0" dirty="0" smtClean="0">
+                <a:solidFill>
+                  <a:srgbClr val="546E7A"/>
+                </a:solidFill>
+                <a:latin typeface="Calibri"/>
               </a:rPr>
               <a:t>10 / 15</a:t>
             </a:r>
@@ -850,7 +798,7 @@
 </file>
 
 <file path=ppt/slides/slide11.xml><?xml version="1.0" encoding="utf-8"?>
-<p:sld xmlns:a="http://schemas.openxmlformats.org/drawingml/2006/main" xmlns:p="http://schemas.openxmlformats.org/presentationml/2006/main" xmlns:r="http://schemas.openxmlformats.org/officeDocument/2006/relationships">
+<p:sld xmlns:a="http://schemas.openxmlformats.org/drawingml/2006/main" xmlns:p="http://schemas.openxmlformats.org/presentationml/2006/main" xmlns:r="http://schemas.openxmlformats.org/officeDocument/2006/relationships" show="1">
   <p:cSld>
     <p:spTree>
       <p:nvGrpSpPr>
@@ -861,23 +809,21 @@
       <p:grpSpPr>
         <a:xfrm>
           <a:off x="0" y="0"/>
-          <a:ext cx="0" cy="0"/>
+          <a:ext cx="12192000" cy="6858000"/>
           <a:chOff x="0" y="0"/>
-          <a:chExt cx="0" cy="0"/>
+          <a:chExt cx="12192000" cy="6858000"/>
         </a:xfrm>
       </p:grpSpPr>
       <p:sp>
         <p:nvSpPr>
-          <p:cNvPr id="10" name="Bg"/>
-          <p:cNvSpPr txBox="1">
-            <a:spLocks noGrp="1"/>
-          </p:cNvSpPr>
-          <p:nvPr/>
-        </p:nvSpPr>
-        <p:spPr>
+          <p:cNvPr id="2" name="sp2"/>
+          <p:cNvSpPr txBox="1"/>
+          <p:nvPr/>
+        </p:nvSpPr>
+        <p:spPr bwMode="auto">
           <a:xfrm>
             <a:off x="0" y="0"/>
-            <a:ext cx="12193200" cy="6858000"/>
+            <a:ext cx="12192000" cy="6858000"/>
           </a:xfrm>
           <a:prstGeom prst="rect">
             <a:avLst/>
@@ -897,27 +843,29 @@
       </p:sp>
       <p:sp>
         <p:nvSpPr>
-          <p:cNvPr id="11" name="Header"/>
-          <p:cNvSpPr txBox="1">
-            <a:spLocks noGrp="1"/>
-          </p:cNvSpPr>
-          <p:nvPr/>
-        </p:nvSpPr>
-        <p:spPr>
+          <p:cNvPr id="3" name="sp3"/>
+          <p:cNvSpPr txBox="1"/>
+          <p:nvPr/>
+        </p:nvSpPr>
+        <p:spPr bwMode="auto">
           <a:xfrm>
             <a:off x="0" y="0"/>
-            <a:ext cx="12193200" cy="1188000"/>
-          </a:xfrm>
-          <a:prstGeom prst="rect">
-            <a:avLst/>
-          </a:prstGeom>
-          <a:gradFill>
+            <a:ext cx="12192000" cy="1152000"/>
+          </a:xfrm>
+          <a:prstGeom prst="rect">
+            <a:avLst/>
+          </a:prstGeom>
+          <a:gradFill rotWithShape="1">
             <a:gsLst>
               <a:gs pos="0">
-                <a:srgbClr val="0D1B2A"/>
+                <a:solidFill>
+                  <a:srgbClr val="0D1B2A"/>
+                </a:solidFill>
               </a:gs>
               <a:gs pos="100000">
-                <a:srgbClr val="1565C0"/>
+                <a:solidFill>
+                  <a:srgbClr val="1565C0"/>
+                </a:solidFill>
               </a:gs>
             </a:gsLst>
             <a:lin ang="0" scaled="0"/>
@@ -934,16 +882,14 @@
       </p:sp>
       <p:sp>
         <p:nvSpPr>
-          <p:cNvPr id="12" name="Line12"/>
-          <p:cNvSpPr txBox="1">
-            <a:spLocks noGrp="1"/>
-          </p:cNvSpPr>
-          <p:nvPr/>
-        </p:nvSpPr>
-        <p:spPr>
-          <a:xfrm>
-            <a:off x="0" y="1170000"/>
-            <a:ext cx="12193200" cy="7200"/>
+          <p:cNvPr id="4" name="sp4"/>
+          <p:cNvSpPr txBox="1"/>
+          <p:nvPr/>
+        </p:nvSpPr>
+        <p:spPr bwMode="auto">
+          <a:xfrm>
+            <a:off x="0" y="1134000"/>
+            <a:ext cx="12192000" cy="43200"/>
           </a:xfrm>
           <a:prstGeom prst="rect">
             <a:avLst/>
@@ -963,27 +909,29 @@
       </p:sp>
       <p:sp>
         <p:nvSpPr>
-          <p:cNvPr id="13" name="Vbar"/>
-          <p:cNvSpPr txBox="1">
-            <a:spLocks noGrp="1"/>
-          </p:cNvSpPr>
-          <p:nvPr/>
-        </p:nvSpPr>
-        <p:spPr>
-          <a:xfrm>
-            <a:off x="0" y="1188000"/>
-            <a:ext cx="64800" cy="5670000"/>
-          </a:xfrm>
-          <a:prstGeom prst="rect">
-            <a:avLst/>
-          </a:prstGeom>
-          <a:gradFill>
+          <p:cNvPr id="5" name="sp5"/>
+          <p:cNvSpPr txBox="1"/>
+          <p:nvPr/>
+        </p:nvSpPr>
+        <p:spPr bwMode="auto">
+          <a:xfrm>
+            <a:off x="0" y="1152000"/>
+            <a:ext cx="79200" cy="5706000"/>
+          </a:xfrm>
+          <a:prstGeom prst="rect">
+            <a:avLst/>
+          </a:prstGeom>
+          <a:gradFill rotWithShape="1">
             <a:gsLst>
               <a:gs pos="0">
-                <a:srgbClr val="00B4D8"/>
+                <a:solidFill>
+                  <a:srgbClr val="00B4D8"/>
+                </a:solidFill>
               </a:gs>
               <a:gs pos="100000">
-                <a:srgbClr val="F0F4F8"/>
+                <a:solidFill>
+                  <a:srgbClr val="F0F4F8"/>
+                </a:solidFill>
               </a:gs>
             </a:gsLst>
             <a:lin ang="5400000" scaled="0"/>
@@ -1000,16 +948,14 @@
       </p:sp>
       <p:sp>
         <p:nvSpPr>
-          <p:cNvPr id="14" name="Title"/>
-          <p:cNvSpPr txBox="1">
-            <a:spLocks noGrp="1"/>
-          </p:cNvSpPr>
-          <p:nvPr/>
-        </p:nvSpPr>
-        <p:spPr>
-          <a:xfrm>
-            <a:off x="251999" y="72000"/>
-            <a:ext cx="11761199" cy="1080000"/>
+          <p:cNvPr id="6" name="sp6"/>
+          <p:cNvSpPr txBox="1"/>
+          <p:nvPr/>
+        </p:nvSpPr>
+        <p:spPr bwMode="auto">
+          <a:xfrm>
+            <a:off x="251999" y="54000"/>
+            <a:ext cx="11760000" cy="1062000"/>
           </a:xfrm>
           <a:prstGeom prst="rect">
             <a:avLst/>
@@ -1024,202 +970,186 @@
             <a:normAutofit/>
           </a:bodyPr>
           <a:lstStyle/>
+          <a:p>
+            <a:pPr algn="l"/>
+            <a:r>
+              <a:rPr lang="ru-RU" altLang="en-US" sz="2200" b="1" i="0" dirty="0" smtClean="0">
+                <a:solidFill>
+                  <a:srgbClr val="FFFFFF"/>
+                </a:solidFill>
+                <a:latin typeface="Calibri"/>
+              </a:rPr>
+              <a:t>Цифровая трансформация Узбекистана: текущее состояние</a:t>
+            </a:r>
+          </a:p>
+        </p:txBody>
+      </p:sp>
+      <p:sp>
+        <p:nvSpPr>
+          <p:cNvPr id="7" name="sp7"/>
+          <p:cNvSpPr txBox="1"/>
+          <p:nvPr/>
+        </p:nvSpPr>
+        <p:spPr bwMode="auto">
+          <a:xfrm>
+            <a:off x="198000" y="1242000"/>
+            <a:ext cx="11868000" cy="5454000"/>
+          </a:xfrm>
+          <a:prstGeom prst="rect">
+            <a:avLst/>
+          </a:prstGeom>
+          <a:noFill/>
+          <a:ln>
+            <a:noFill/>
+          </a:ln>
+        </p:spPr>
+        <p:txBody>
+          <a:bodyPr wrap="square" anchor="t">
+            <a:normAutofit/>
+          </a:bodyPr>
+          <a:lstStyle/>
+          <a:p>
+            <a:pPr algn="l"/>
+            <a:r>
+              <a:rPr lang="ru-RU" altLang="en-US" sz="1500" b="0" i="0" dirty="0" smtClean="0">
+                <a:solidFill>
+                  <a:srgbClr val="1A237E"/>
+                </a:solidFill>
+                <a:latin typeface="Calibri"/>
+              </a:rPr>
+              <a:t>▶  Стратегия «Цифровой Узбекистан - 2030» (Указ No УП-6079, октябрь 2020 г.)</a:t>
+            </a:r>
+          </a:p>
           <a:p>
             <a:pPr algn="l">
               <a:spcBef>
-                <a:spcPts val="0"/>
+                <a:spcPts val="700"/>
               </a:spcBef>
             </a:pPr>
             <a:r>
-              <a:rPr lang="ru-RU" sz="2100" b="1" i="0" dirty="0" smtClean="0">
-                <a:solidFill>
-                  <a:srgbClr val="FFFFFF"/>
-                </a:solidFill>
-                <a:latin typeface="+mj-lt"/>
-              </a:rPr>
-              <a:t>Цифровая трансформация Узбекистана: текущее состояние</a:t>
-            </a:r>
-          </a:p>
-        </p:txBody>
-      </p:sp>
-      <p:sp>
-        <p:nvSpPr>
-          <p:cNvPr id="15" name="Bullets"/>
-          <p:cNvSpPr txBox="1">
-            <a:spLocks noGrp="1"/>
-          </p:cNvSpPr>
-          <p:nvPr/>
-        </p:nvSpPr>
-        <p:spPr>
-          <a:xfrm>
-            <a:off x="216000" y="1260000"/>
-            <a:ext cx="11833200" cy="5454000"/>
-          </a:xfrm>
-          <a:prstGeom prst="rect">
-            <a:avLst/>
-          </a:prstGeom>
-          <a:noFill/>
-          <a:ln>
-            <a:noFill/>
-          </a:ln>
-        </p:spPr>
-        <p:txBody>
-          <a:bodyPr wrap="square" anchor="t">
-            <a:normAutofit/>
-          </a:bodyPr>
-          <a:lstStyle/>
+              <a:rPr lang="ru-RU" altLang="en-US" sz="1500" b="0" i="0" dirty="0" smtClean="0">
+                <a:solidFill>
+                  <a:srgbClr val="1A237E"/>
+                </a:solidFill>
+                <a:latin typeface="Calibri"/>
+              </a:rPr>
+              <a:t>▶  E-Government индекс ООН 2024: значительный рост позиций страны</a:t>
+            </a:r>
+          </a:p>
           <a:p>
             <a:pPr algn="l">
               <a:spcBef>
-                <a:spcPts val="100"/>
+                <a:spcPts val="700"/>
               </a:spcBef>
             </a:pPr>
             <a:r>
-              <a:rPr lang="ru-RU" sz="1500" b="0" i="0" dirty="0" smtClean="0">
+              <a:rPr lang="ru-RU" altLang="en-US" sz="1500" b="0" i="0" dirty="0" smtClean="0">
                 <a:solidFill>
                   <a:srgbClr val="1A237E"/>
                 </a:solidFill>
-                <a:latin typeface="+mj-lt"/>
-              </a:rPr>
-              <a:t>▶  Стратегия «Цифровой Узбекистан – 2030» (Указ №УП-6079, октябрь 2020)</a:t>
+                <a:latin typeface="Calibri"/>
+              </a:rPr>
+              <a:t>▶  IT Park Узбекистана: более 2 500 компаний-резидентов к концу 2024 г.</a:t>
             </a:r>
           </a:p>
           <a:p>
             <a:pPr algn="l">
               <a:spcBef>
-                <a:spcPts val="600"/>
+                <a:spcPts val="700"/>
               </a:spcBef>
             </a:pPr>
             <a:r>
-              <a:rPr lang="ru-RU" sz="1500" b="0" i="0" dirty="0" smtClean="0">
+              <a:rPr lang="ru-RU" altLang="en-US" sz="1500" b="0" i="0" dirty="0" smtClean="0">
                 <a:solidFill>
                   <a:srgbClr val="1A237E"/>
                 </a:solidFill>
-                <a:latin typeface="+mj-lt"/>
-              </a:rPr>
-              <a:t>▶  E-Government индекс ООН 2024: значительный рост в рейтинге</a:t>
+                <a:latin typeface="Calibri"/>
+              </a:rPr>
+              <a:t>▶  Быстрый рост безналичных платежей, e-commerce и цифровых госсервисов</a:t>
             </a:r>
           </a:p>
           <a:p>
             <a:pPr algn="l">
               <a:spcBef>
-                <a:spcPts val="600"/>
+                <a:spcPts val="500"/>
               </a:spcBef>
             </a:pPr>
             <a:r>
-              <a:rPr lang="ru-RU" sz="1500" b="0" i="0" dirty="0" smtClean="0">
-                <a:solidFill>
-                  <a:srgbClr val="1A237E"/>
-                </a:solidFill>
-                <a:latin typeface="+mj-lt"/>
-              </a:rPr>
-              <a:t>▶  IT Park Узбекистана: 2 500+ компаний-резидентов к концу 2024 г.</a:t>
+              <a:rPr lang="ru-RU" altLang="en-US" sz="1400" b="0" i="0" dirty="0" smtClean="0">
+                <a:solidFill>
+                  <a:srgbClr val="E53935"/>
+                </a:solidFill>
+                <a:latin typeface="Calibri"/>
+              </a:rPr>
+              <a:t>⚠  ⚠ Асимметрия: цифровое государство опережает цифровой бизнес и население</a:t>
             </a:r>
           </a:p>
           <a:p>
             <a:pPr algn="l">
               <a:spcBef>
-                <a:spcPts val="600"/>
+                <a:spcPts val="500"/>
               </a:spcBef>
             </a:pPr>
             <a:r>
-              <a:rPr lang="ru-RU" sz="1500" b="0" i="0" dirty="0" smtClean="0">
-                <a:solidFill>
-                  <a:srgbClr val="1A237E"/>
-                </a:solidFill>
-                <a:latin typeface="+mj-lt"/>
-              </a:rPr>
-              <a:t>▶  Рост ИКТ-экспорта, развитие электронной коммерции и цифровых платежей</a:t>
+              <a:rPr lang="ru-RU" altLang="en-US" sz="1400" b="0" i="0" dirty="0" smtClean="0">
+                <a:solidFill>
+                  <a:srgbClr val="E53935"/>
+                </a:solidFill>
+                <a:latin typeface="Calibri"/>
+              </a:rPr>
+              <a:t>⚠  ⚠ Региональный цифровой разрыв: столица vs. сельские районы</a:t>
             </a:r>
           </a:p>
           <a:p>
             <a:pPr algn="l">
               <a:spcBef>
-                <a:spcPts val="600"/>
+                <a:spcPts val="500"/>
               </a:spcBef>
             </a:pPr>
             <a:r>
-              <a:rPr lang="ru-RU" sz="1400" b="0" i="0" dirty="0" smtClean="0">
+              <a:rPr lang="ru-RU" altLang="en-US" sz="1400" b="0" i="0" dirty="0" smtClean="0">
                 <a:solidFill>
                   <a:srgbClr val="E53935"/>
                 </a:solidFill>
-                <a:latin typeface="+mj-lt"/>
-              </a:rPr>
-              <a:t>⚠  ⚠ Асимметрия: цифровое государство опережает цифровой бизнес и население</a:t>
-            </a:r>
-          </a:p>
-          <a:p>
-            <a:pPr algn="l">
-              <a:spcBef>
-                <a:spcPts val="600"/>
-              </a:spcBef>
-            </a:pPr>
-            <a:r>
-              <a:rPr lang="ru-RU" sz="1400" b="0" i="0" dirty="0" smtClean="0">
-                <a:solidFill>
-                  <a:srgbClr val="E53935"/>
-                </a:solidFill>
-                <a:latin typeface="+mj-lt"/>
-              </a:rPr>
-              <a:t>⚠  ⚠ Региональный цифровой разрыв: городские vs. сельские районы</a:t>
-            </a:r>
-          </a:p>
-          <a:p>
-            <a:pPr algn="l">
-              <a:spcBef>
-                <a:spcPts val="600"/>
-              </a:spcBef>
-            </a:pPr>
-            <a:r>
-              <a:rPr lang="ru-RU" sz="1400" b="0" i="0" dirty="0" smtClean="0">
-                <a:solidFill>
-                  <a:srgbClr val="E53935"/>
-                </a:solidFill>
-                <a:latin typeface="+mj-lt"/>
-              </a:rPr>
-              <a:t>⚠  ⚠ Уровень интернет-проникновения ~80% — необходимо достижение 90%+</a:t>
-            </a:r>
-          </a:p>
-        </p:txBody>
-      </p:sp>
-      <p:sp>
-        <p:nvSpPr>
-          <p:cNvPr id="16" name="SlideNum"/>
-          <p:cNvSpPr txBox="1">
-            <a:spLocks noGrp="1"/>
-          </p:cNvSpPr>
-          <p:nvPr/>
-        </p:nvSpPr>
-        <p:spPr>
-          <a:xfrm>
-            <a:off x="10933200" y="6624000"/>
-            <a:ext cx="1152000" cy="180000"/>
-          </a:xfrm>
-          <a:prstGeom prst="rect">
-            <a:avLst/>
-          </a:prstGeom>
-          <a:noFill/>
-          <a:ln>
-            <a:noFill/>
-          </a:ln>
-        </p:spPr>
-        <p:txBody>
-          <a:bodyPr wrap="square" anchor="ctr">
-            <a:normAutofit/>
-          </a:bodyPr>
-          <a:lstStyle/>
-          <a:p>
-            <a:pPr algn="r">
-              <a:spcBef>
-                <a:spcPts val="0"/>
-              </a:spcBef>
-            </a:pPr>
-            <a:r>
-              <a:rPr lang="ru-RU" sz="900" b="0" i="0" dirty="0" smtClean="0">
-                <a:solidFill>
-                  <a:srgbClr val="90E0EF"/>
-                </a:solidFill>
-                <a:latin typeface="+mj-lt"/>
+                <a:latin typeface="Calibri"/>
+              </a:rPr>
+              <a:t>⚠  ⚠ Интернет-проникновение ~80% — необходим рост до 90%+</a:t>
+            </a:r>
+          </a:p>
+        </p:txBody>
+      </p:sp>
+      <p:sp>
+        <p:nvSpPr>
+          <p:cNvPr id="8" name="sp8"/>
+          <p:cNvSpPr txBox="1"/>
+          <p:nvPr/>
+        </p:nvSpPr>
+        <p:spPr bwMode="auto">
+          <a:xfrm>
+            <a:off x="10932000" y="6606001"/>
+            <a:ext cx="1152000" cy="198000"/>
+          </a:xfrm>
+          <a:prstGeom prst="rect">
+            <a:avLst/>
+          </a:prstGeom>
+          <a:noFill/>
+          <a:ln>
+            <a:noFill/>
+          </a:ln>
+        </p:spPr>
+        <p:txBody>
+          <a:bodyPr wrap="square" anchor="t">
+            <a:normAutofit/>
+          </a:bodyPr>
+          <a:lstStyle/>
+          <a:p>
+            <a:pPr algn="r"/>
+            <a:r>
+              <a:rPr lang="ru-RU" altLang="en-US" sz="900" b="0" i="0" dirty="0" smtClean="0">
+                <a:solidFill>
+                  <a:srgbClr val="546E7A"/>
+                </a:solidFill>
+                <a:latin typeface="Calibri"/>
               </a:rPr>
               <a:t>11 / 15</a:t>
             </a:r>
@@ -1235,7 +1165,7 @@
 </file>
 
 <file path=ppt/slides/slide12.xml><?xml version="1.0" encoding="utf-8"?>
-<p:sld xmlns:a="http://schemas.openxmlformats.org/drawingml/2006/main" xmlns:p="http://schemas.openxmlformats.org/presentationml/2006/main" xmlns:r="http://schemas.openxmlformats.org/officeDocument/2006/relationships">
+<p:sld xmlns:a="http://schemas.openxmlformats.org/drawingml/2006/main" xmlns:p="http://schemas.openxmlformats.org/presentationml/2006/main" xmlns:r="http://schemas.openxmlformats.org/officeDocument/2006/relationships" show="1">
   <p:cSld>
     <p:spTree>
       <p:nvGrpSpPr>
@@ -1246,23 +1176,21 @@
       <p:grpSpPr>
         <a:xfrm>
           <a:off x="0" y="0"/>
-          <a:ext cx="0" cy="0"/>
+          <a:ext cx="12192000" cy="6858000"/>
           <a:chOff x="0" y="0"/>
-          <a:chExt cx="0" cy="0"/>
+          <a:chExt cx="12192000" cy="6858000"/>
         </a:xfrm>
       </p:grpSpPr>
       <p:sp>
         <p:nvSpPr>
-          <p:cNvPr id="10" name="Bg"/>
-          <p:cNvSpPr txBox="1">
-            <a:spLocks noGrp="1"/>
-          </p:cNvSpPr>
-          <p:nvPr/>
-        </p:nvSpPr>
-        <p:spPr>
+          <p:cNvPr id="2" name="sp2"/>
+          <p:cNvSpPr txBox="1"/>
+          <p:nvPr/>
+        </p:nvSpPr>
+        <p:spPr bwMode="auto">
           <a:xfrm>
             <a:off x="0" y="0"/>
-            <a:ext cx="12193200" cy="6858000"/>
+            <a:ext cx="12192000" cy="6858000"/>
           </a:xfrm>
           <a:prstGeom prst="rect">
             <a:avLst/>
@@ -1282,27 +1210,29 @@
       </p:sp>
       <p:sp>
         <p:nvSpPr>
-          <p:cNvPr id="11" name="Header"/>
-          <p:cNvSpPr txBox="1">
-            <a:spLocks noGrp="1"/>
-          </p:cNvSpPr>
-          <p:nvPr/>
-        </p:nvSpPr>
-        <p:spPr>
+          <p:cNvPr id="3" name="sp3"/>
+          <p:cNvSpPr txBox="1"/>
+          <p:nvPr/>
+        </p:nvSpPr>
+        <p:spPr bwMode="auto">
           <a:xfrm>
             <a:off x="0" y="0"/>
-            <a:ext cx="12193200" cy="1188000"/>
-          </a:xfrm>
-          <a:prstGeom prst="rect">
-            <a:avLst/>
-          </a:prstGeom>
-          <a:gradFill>
+            <a:ext cx="12192000" cy="1152000"/>
+          </a:xfrm>
+          <a:prstGeom prst="rect">
+            <a:avLst/>
+          </a:prstGeom>
+          <a:gradFill rotWithShape="1">
             <a:gsLst>
               <a:gs pos="0">
-                <a:srgbClr val="0D1B2A"/>
+                <a:solidFill>
+                  <a:srgbClr val="0D1B2A"/>
+                </a:solidFill>
               </a:gs>
               <a:gs pos="100000">
-                <a:srgbClr val="1565C0"/>
+                <a:solidFill>
+                  <a:srgbClr val="1565C0"/>
+                </a:solidFill>
               </a:gs>
             </a:gsLst>
             <a:lin ang="0" scaled="0"/>
@@ -1319,16 +1249,14 @@
       </p:sp>
       <p:sp>
         <p:nvSpPr>
-          <p:cNvPr id="12" name="Line12"/>
-          <p:cNvSpPr txBox="1">
-            <a:spLocks noGrp="1"/>
-          </p:cNvSpPr>
-          <p:nvPr/>
-        </p:nvSpPr>
-        <p:spPr>
-          <a:xfrm>
-            <a:off x="0" y="1170000"/>
-            <a:ext cx="12193200" cy="7200"/>
+          <p:cNvPr id="4" name="sp4"/>
+          <p:cNvSpPr txBox="1"/>
+          <p:nvPr/>
+        </p:nvSpPr>
+        <p:spPr bwMode="auto">
+          <a:xfrm>
+            <a:off x="0" y="1134000"/>
+            <a:ext cx="12192000" cy="43200"/>
           </a:xfrm>
           <a:prstGeom prst="rect">
             <a:avLst/>
@@ -1348,27 +1276,29 @@
       </p:sp>
       <p:sp>
         <p:nvSpPr>
-          <p:cNvPr id="13" name="Vbar"/>
-          <p:cNvSpPr txBox="1">
-            <a:spLocks noGrp="1"/>
-          </p:cNvSpPr>
-          <p:nvPr/>
-        </p:nvSpPr>
-        <p:spPr>
-          <a:xfrm>
-            <a:off x="0" y="1188000"/>
-            <a:ext cx="64800" cy="5670000"/>
-          </a:xfrm>
-          <a:prstGeom prst="rect">
-            <a:avLst/>
-          </a:prstGeom>
-          <a:gradFill>
+          <p:cNvPr id="5" name="sp5"/>
+          <p:cNvSpPr txBox="1"/>
+          <p:nvPr/>
+        </p:nvSpPr>
+        <p:spPr bwMode="auto">
+          <a:xfrm>
+            <a:off x="0" y="1152000"/>
+            <a:ext cx="79200" cy="5706000"/>
+          </a:xfrm>
+          <a:prstGeom prst="rect">
+            <a:avLst/>
+          </a:prstGeom>
+          <a:gradFill rotWithShape="1">
             <a:gsLst>
               <a:gs pos="0">
-                <a:srgbClr val="00B4D8"/>
+                <a:solidFill>
+                  <a:srgbClr val="00B4D8"/>
+                </a:solidFill>
               </a:gs>
               <a:gs pos="100000">
-                <a:srgbClr val="F0F4F8"/>
+                <a:solidFill>
+                  <a:srgbClr val="F0F4F8"/>
+                </a:solidFill>
               </a:gs>
             </a:gsLst>
             <a:lin ang="5400000" scaled="0"/>
@@ -1385,16 +1315,14 @@
       </p:sp>
       <p:sp>
         <p:nvSpPr>
-          <p:cNvPr id="14" name="Title"/>
-          <p:cNvSpPr txBox="1">
-            <a:spLocks noGrp="1"/>
-          </p:cNvSpPr>
-          <p:nvPr/>
-        </p:nvSpPr>
-        <p:spPr>
-          <a:xfrm>
-            <a:off x="251999" y="72000"/>
-            <a:ext cx="11761199" cy="1080000"/>
+          <p:cNvPr id="6" name="sp6"/>
+          <p:cNvSpPr txBox="1"/>
+          <p:nvPr/>
+        </p:nvSpPr>
+        <p:spPr bwMode="auto">
+          <a:xfrm>
+            <a:off x="251999" y="54000"/>
+            <a:ext cx="11760000" cy="1062000"/>
           </a:xfrm>
           <a:prstGeom prst="rect">
             <a:avLst/>
@@ -1409,170 +1337,154 @@
             <a:normAutofit/>
           </a:bodyPr>
           <a:lstStyle/>
+          <a:p>
+            <a:pPr algn="l"/>
+            <a:r>
+              <a:rPr lang="ru-RU" altLang="en-US" sz="2200" b="1" i="0" dirty="0" smtClean="0">
+                <a:solidFill>
+                  <a:srgbClr val="FFFFFF"/>
+                </a:solidFill>
+                <a:latin typeface="Calibri"/>
+              </a:rPr>
+              <a:t>Практические рекомендации: 5 приоритетов</a:t>
+            </a:r>
+          </a:p>
+        </p:txBody>
+      </p:sp>
+      <p:sp>
+        <p:nvSpPr>
+          <p:cNvPr id="7" name="sp7"/>
+          <p:cNvSpPr txBox="1"/>
+          <p:nvPr/>
+        </p:nvSpPr>
+        <p:spPr bwMode="auto">
+          <a:xfrm>
+            <a:off x="198000" y="1242000"/>
+            <a:ext cx="11868000" cy="5454000"/>
+          </a:xfrm>
+          <a:prstGeom prst="rect">
+            <a:avLst/>
+          </a:prstGeom>
+          <a:noFill/>
+          <a:ln>
+            <a:noFill/>
+          </a:ln>
+        </p:spPr>
+        <p:txBody>
+          <a:bodyPr wrap="square" anchor="t">
+            <a:normAutofit/>
+          </a:bodyPr>
+          <a:lstStyle/>
+          <a:p>
+            <a:pPr algn="l"/>
+            <a:r>
+              <a:rPr lang="ru-RU" altLang="en-US" sz="1500" b="0" i="0" dirty="0" smtClean="0">
+                <a:solidFill>
+                  <a:srgbClr val="1A237E"/>
+                </a:solidFill>
+                <a:latin typeface="Calibri"/>
+              </a:rPr>
+              <a:t>▶  1. Расширить интернет-проникновение до 90%+ -&gt; прирост ВВП: +84-124 USD на чел./год</a:t>
+            </a:r>
+          </a:p>
           <a:p>
             <a:pPr algn="l">
               <a:spcBef>
-                <a:spcPts val="0"/>
+                <a:spcPts val="700"/>
               </a:spcBef>
             </a:pPr>
             <a:r>
-              <a:rPr lang="ru-RU" sz="2100" b="1" i="0" dirty="0" smtClean="0">
-                <a:solidFill>
-                  <a:srgbClr val="FFFFFF"/>
-                </a:solidFill>
-                <a:latin typeface="+mj-lt"/>
-              </a:rPr>
-              <a:t>Практические рекомендации: 5 приоритетов</a:t>
-            </a:r>
-          </a:p>
-        </p:txBody>
-      </p:sp>
-      <p:sp>
-        <p:nvSpPr>
-          <p:cNvPr id="15" name="Bullets"/>
-          <p:cNvSpPr txBox="1">
-            <a:spLocks noGrp="1"/>
-          </p:cNvSpPr>
-          <p:nvPr/>
-        </p:nvSpPr>
-        <p:spPr>
-          <a:xfrm>
-            <a:off x="216000" y="1260000"/>
-            <a:ext cx="11833200" cy="5454000"/>
-          </a:xfrm>
-          <a:prstGeom prst="rect">
-            <a:avLst/>
-          </a:prstGeom>
-          <a:noFill/>
-          <a:ln>
-            <a:noFill/>
-          </a:ln>
-        </p:spPr>
-        <p:txBody>
-          <a:bodyPr wrap="square" anchor="t">
-            <a:normAutofit/>
-          </a:bodyPr>
-          <a:lstStyle/>
+              <a:rPr lang="ru-RU" altLang="en-US" sz="1500" b="0" i="0" dirty="0" smtClean="0">
+                <a:solidFill>
+                  <a:srgbClr val="1A237E"/>
+                </a:solidFill>
+                <a:latin typeface="Calibri"/>
+              </a:rPr>
+              <a:t>▶  2. Устранить асимметрию цифровой зрелости: подтянуть бизнес и цифровые навыки населения</a:t>
+            </a:r>
+          </a:p>
           <a:p>
             <a:pPr algn="l">
               <a:spcBef>
-                <a:spcPts val="100"/>
+                <a:spcPts val="700"/>
               </a:spcBef>
             </a:pPr>
             <a:r>
-              <a:rPr lang="ru-RU" sz="1500" b="0" i="0" dirty="0" smtClean="0">
+              <a:rPr lang="ru-RU" altLang="en-US" sz="1500" b="0" i="0" dirty="0" smtClean="0">
                 <a:solidFill>
                   <a:srgbClr val="1A237E"/>
                 </a:solidFill>
-                <a:latin typeface="+mj-lt"/>
-              </a:rPr>
-              <a:t>▶  1. Расширить интернет-проникновение до 90%+ → прирост ВВП: +84–124 USD на чел. в год</a:t>
+                <a:latin typeface="Calibri"/>
+              </a:rPr>
+              <a:t>▶  3. Развить инфраструктуру фискальной трансмиссии: интеграция MyID с адресными выплатами</a:t>
             </a:r>
           </a:p>
           <a:p>
             <a:pPr algn="l">
               <a:spcBef>
-                <a:spcPts val="600"/>
+                <a:spcPts val="700"/>
               </a:spcBef>
             </a:pPr>
             <a:r>
-              <a:rPr lang="ru-RU" sz="1500" b="0" i="0" dirty="0" smtClean="0">
+              <a:rPr lang="ru-RU" altLang="en-US" sz="1500" b="0" i="0" dirty="0" smtClean="0">
                 <a:solidFill>
                   <a:srgbClr val="1A237E"/>
                 </a:solidFill>
-                <a:latin typeface="+mj-lt"/>
-              </a:rPr>
-              <a:t>▶  2. Устранить асимметрию цифровой зрелости: цифровой бизнес и цифровые навыки населения</a:t>
+                <a:latin typeface="Calibri"/>
+              </a:rPr>
+              <a:t>▶  4. Учитывать тип кризиса: пандемийный шок vs. энергетический/инфляционный шок</a:t>
             </a:r>
           </a:p>
           <a:p>
             <a:pPr algn="l">
               <a:spcBef>
-                <a:spcPts val="600"/>
+                <a:spcPts val="700"/>
               </a:spcBef>
             </a:pPr>
             <a:r>
-              <a:rPr lang="ru-RU" sz="1500" b="0" i="0" dirty="0" smtClean="0">
+              <a:rPr lang="ru-RU" altLang="en-US" sz="1500" b="0" i="0" dirty="0" smtClean="0">
                 <a:solidFill>
                   <a:srgbClr val="1A237E"/>
                 </a:solidFill>
-                <a:latin typeface="+mj-lt"/>
-              </a:rPr>
-              <a:t>▶  3. Инфраструктура фискальной трансмиссии: интеграция MyID с системой соцвыплат</a:t>
-            </a:r>
-          </a:p>
-          <a:p>
-            <a:pPr algn="l">
-              <a:spcBef>
-                <a:spcPts val="600"/>
-              </a:spcBef>
-            </a:pPr>
-            <a:r>
-              <a:rPr lang="ru-RU" sz="1500" b="0" i="0" dirty="0" smtClean="0">
-                <a:solidFill>
-                  <a:srgbClr val="1A237E"/>
-                </a:solidFill>
-                <a:latin typeface="+mj-lt"/>
-              </a:rPr>
-              <a:t>▶  4. Учитывать тип кризиса: пандемийный шок vs. энергетический/инфляционный шок</a:t>
-            </a:r>
-          </a:p>
-          <a:p>
-            <a:pPr algn="l">
-              <a:spcBef>
-                <a:spcPts val="600"/>
-              </a:spcBef>
-            </a:pPr>
-            <a:r>
-              <a:rPr lang="ru-RU" sz="1500" b="0" i="0" dirty="0" smtClean="0">
-                <a:solidFill>
-                  <a:srgbClr val="1A237E"/>
-                </a:solidFill>
-                <a:latin typeface="+mj-lt"/>
-              </a:rPr>
-              <a:t>▶  5. Накапливать качественные данные → достичь статистической значимости кризисных эффектов</a:t>
-            </a:r>
-          </a:p>
-        </p:txBody>
-      </p:sp>
-      <p:sp>
-        <p:nvSpPr>
-          <p:cNvPr id="16" name="SlideNum"/>
-          <p:cNvSpPr txBox="1">
-            <a:spLocks noGrp="1"/>
-          </p:cNvSpPr>
-          <p:nvPr/>
-        </p:nvSpPr>
-        <p:spPr>
-          <a:xfrm>
-            <a:off x="10933200" y="6624000"/>
-            <a:ext cx="1152000" cy="180000"/>
-          </a:xfrm>
-          <a:prstGeom prst="rect">
-            <a:avLst/>
-          </a:prstGeom>
-          <a:noFill/>
-          <a:ln>
-            <a:noFill/>
-          </a:ln>
-        </p:spPr>
-        <p:txBody>
-          <a:bodyPr wrap="square" anchor="ctr">
-            <a:normAutofit/>
-          </a:bodyPr>
-          <a:lstStyle/>
-          <a:p>
-            <a:pPr algn="r">
-              <a:spcBef>
-                <a:spcPts val="0"/>
-              </a:spcBef>
-            </a:pPr>
-            <a:r>
-              <a:rPr lang="ru-RU" sz="900" b="0" i="0" dirty="0" smtClean="0">
-                <a:solidFill>
-                  <a:srgbClr val="90E0EF"/>
-                </a:solidFill>
-                <a:latin typeface="+mj-lt"/>
+                <a:latin typeface="Calibri"/>
+              </a:rPr>
+              <a:t>▶  5. Накапливать данные для достижения статистической значимости кризисных эффектов</a:t>
+            </a:r>
+          </a:p>
+        </p:txBody>
+      </p:sp>
+      <p:sp>
+        <p:nvSpPr>
+          <p:cNvPr id="8" name="sp8"/>
+          <p:cNvSpPr txBox="1"/>
+          <p:nvPr/>
+        </p:nvSpPr>
+        <p:spPr bwMode="auto">
+          <a:xfrm>
+            <a:off x="10932000" y="6606001"/>
+            <a:ext cx="1152000" cy="198000"/>
+          </a:xfrm>
+          <a:prstGeom prst="rect">
+            <a:avLst/>
+          </a:prstGeom>
+          <a:noFill/>
+          <a:ln>
+            <a:noFill/>
+          </a:ln>
+        </p:spPr>
+        <p:txBody>
+          <a:bodyPr wrap="square" anchor="t">
+            <a:normAutofit/>
+          </a:bodyPr>
+          <a:lstStyle/>
+          <a:p>
+            <a:pPr algn="r"/>
+            <a:r>
+              <a:rPr lang="ru-RU" altLang="en-US" sz="900" b="0" i="0" dirty="0" smtClean="0">
+                <a:solidFill>
+                  <a:srgbClr val="546E7A"/>
+                </a:solidFill>
+                <a:latin typeface="Calibri"/>
               </a:rPr>
               <a:t>12 / 15</a:t>
             </a:r>
@@ -1588,7 +1500,7 @@
 </file>
 
 <file path=ppt/slides/slide13.xml><?xml version="1.0" encoding="utf-8"?>
-<p:sld xmlns:a="http://schemas.openxmlformats.org/drawingml/2006/main" xmlns:p="http://schemas.openxmlformats.org/presentationml/2006/main" xmlns:r="http://schemas.openxmlformats.org/officeDocument/2006/relationships">
+<p:sld xmlns:a="http://schemas.openxmlformats.org/drawingml/2006/main" xmlns:p="http://schemas.openxmlformats.org/presentationml/2006/main" xmlns:r="http://schemas.openxmlformats.org/officeDocument/2006/relationships" show="1">
   <p:cSld>
     <p:spTree>
       <p:nvGrpSpPr>
@@ -1599,23 +1511,21 @@
       <p:grpSpPr>
         <a:xfrm>
           <a:off x="0" y="0"/>
-          <a:ext cx="0" cy="0"/>
+          <a:ext cx="12192000" cy="6858000"/>
           <a:chOff x="0" y="0"/>
-          <a:chExt cx="0" cy="0"/>
+          <a:chExt cx="12192000" cy="6858000"/>
         </a:xfrm>
       </p:grpSpPr>
       <p:sp>
         <p:nvSpPr>
-          <p:cNvPr id="10" name="Bg"/>
-          <p:cNvSpPr txBox="1">
-            <a:spLocks noGrp="1"/>
-          </p:cNvSpPr>
-          <p:nvPr/>
-        </p:nvSpPr>
-        <p:spPr>
+          <p:cNvPr id="2" name="sp2"/>
+          <p:cNvSpPr txBox="1"/>
+          <p:nvPr/>
+        </p:nvSpPr>
+        <p:spPr bwMode="auto">
           <a:xfrm>
             <a:off x="0" y="0"/>
-            <a:ext cx="12193200" cy="6858000"/>
+            <a:ext cx="12192000" cy="6858000"/>
           </a:xfrm>
           <a:prstGeom prst="rect">
             <a:avLst/>
@@ -1635,27 +1545,29 @@
       </p:sp>
       <p:sp>
         <p:nvSpPr>
-          <p:cNvPr id="11" name="Header"/>
-          <p:cNvSpPr txBox="1">
-            <a:spLocks noGrp="1"/>
-          </p:cNvSpPr>
-          <p:nvPr/>
-        </p:nvSpPr>
-        <p:spPr>
+          <p:cNvPr id="3" name="sp3"/>
+          <p:cNvSpPr txBox="1"/>
+          <p:nvPr/>
+        </p:nvSpPr>
+        <p:spPr bwMode="auto">
           <a:xfrm>
             <a:off x="0" y="0"/>
-            <a:ext cx="12193200" cy="1188000"/>
-          </a:xfrm>
-          <a:prstGeom prst="rect">
-            <a:avLst/>
-          </a:prstGeom>
-          <a:gradFill>
+            <a:ext cx="12192000" cy="1152000"/>
+          </a:xfrm>
+          <a:prstGeom prst="rect">
+            <a:avLst/>
+          </a:prstGeom>
+          <a:gradFill rotWithShape="1">
             <a:gsLst>
               <a:gs pos="0">
-                <a:srgbClr val="0D1B2A"/>
+                <a:solidFill>
+                  <a:srgbClr val="0D1B2A"/>
+                </a:solidFill>
               </a:gs>
               <a:gs pos="100000">
-                <a:srgbClr val="1565C0"/>
+                <a:solidFill>
+                  <a:srgbClr val="1565C0"/>
+                </a:solidFill>
               </a:gs>
             </a:gsLst>
             <a:lin ang="0" scaled="0"/>
@@ -1672,16 +1584,14 @@
       </p:sp>
       <p:sp>
         <p:nvSpPr>
-          <p:cNvPr id="12" name="Line12"/>
-          <p:cNvSpPr txBox="1">
-            <a:spLocks noGrp="1"/>
-          </p:cNvSpPr>
-          <p:nvPr/>
-        </p:nvSpPr>
-        <p:spPr>
-          <a:xfrm>
-            <a:off x="0" y="1170000"/>
-            <a:ext cx="12193200" cy="7200"/>
+          <p:cNvPr id="4" name="sp4"/>
+          <p:cNvSpPr txBox="1"/>
+          <p:nvPr/>
+        </p:nvSpPr>
+        <p:spPr bwMode="auto">
+          <a:xfrm>
+            <a:off x="0" y="1134000"/>
+            <a:ext cx="12192000" cy="43200"/>
           </a:xfrm>
           <a:prstGeom prst="rect">
             <a:avLst/>
@@ -1701,16 +1611,14 @@
       </p:sp>
       <p:sp>
         <p:nvSpPr>
-          <p:cNvPr id="13" name="Title"/>
-          <p:cNvSpPr txBox="1">
-            <a:spLocks noGrp="1"/>
-          </p:cNvSpPr>
-          <p:nvPr/>
-        </p:nvSpPr>
-        <p:spPr>
-          <a:xfrm>
-            <a:off x="251999" y="72000"/>
-            <a:ext cx="11761199" cy="1080000"/>
+          <p:cNvPr id="5" name="sp5"/>
+          <p:cNvSpPr txBox="1"/>
+          <p:nvPr/>
+        </p:nvSpPr>
+        <p:spPr bwMode="auto">
+          <a:xfrm>
+            <a:off x="251999" y="54000"/>
+            <a:ext cx="11760000" cy="1062000"/>
           </a:xfrm>
           <a:prstGeom prst="rect">
             <a:avLst/>
@@ -1726,38 +1634,34 @@
           </a:bodyPr>
           <a:lstStyle/>
           <a:p>
-            <a:pPr algn="l">
-              <a:spcBef>
-                <a:spcPts val="0"/>
-              </a:spcBef>
-            </a:pPr>
-            <a:r>
-              <a:rPr lang="ru-RU" sz="2100" b="1" i="0" dirty="0" smtClean="0">
+            <a:pPr algn="l"/>
+            <a:r>
+              <a:rPr lang="ru-RU" altLang="en-US" sz="2200" b="1" i="0" dirty="0" smtClean="0">
                 <a:solidFill>
                   <a:srgbClr val="FFFFFF"/>
                 </a:solidFill>
-                <a:latin typeface="+mj-lt"/>
-              </a:rPr>
-              <a:t>Дорожная карта цифровой устойчивости Узбекистана до 2030</a:t>
-            </a:r>
-          </a:p>
-        </p:txBody>
-      </p:sp>
-      <p:sp>
-        <p:nvSpPr>
-          <p:cNvPr id="20" name="Card"/>
-          <p:cNvSpPr txBox="1">
-            <a:spLocks noGrp="1"/>
-          </p:cNvSpPr>
-          <p:nvPr/>
-        </p:nvSpPr>
-        <p:spPr>
-          <a:xfrm>
-            <a:off x="144000" y="1296000"/>
-            <a:ext cx="5436000" cy="5490000"/>
-          </a:xfrm>
-          <a:prstGeom prst="rect">
-            <a:avLst/>
+                <a:latin typeface="Calibri"/>
+              </a:rPr>
+              <a:t>Дорожная карта цифровой устойчивости Узбекистана до 2030 года</a:t>
+            </a:r>
+          </a:p>
+        </p:txBody>
+      </p:sp>
+      <p:sp>
+        <p:nvSpPr>
+          <p:cNvPr id="6" name="sp6"/>
+          <p:cNvSpPr txBox="1"/>
+          <p:nvPr/>
+        </p:nvSpPr>
+        <p:spPr bwMode="auto">
+          <a:xfrm>
+            <a:off x="144000" y="1278000"/>
+            <a:ext cx="5436000" cy="5454000"/>
+          </a:xfrm>
+          <a:prstGeom prst="roundRect">
+            <a:avLst>
+              <a:gd name="adj" fmla="val 8000"/>
+            </a:avLst>
           </a:prstGeom>
           <a:solidFill>
             <a:srgbClr val="FFFFFF"/>
@@ -1776,27 +1680,31 @@
       </p:sp>
       <p:sp>
         <p:nvSpPr>
-          <p:cNvPr id="21" name="CardHdr"/>
-          <p:cNvSpPr txBox="1">
-            <a:spLocks noGrp="1"/>
-          </p:cNvSpPr>
-          <p:nvPr/>
-        </p:nvSpPr>
-        <p:spPr>
-          <a:xfrm>
-            <a:off x="144000" y="1296000"/>
+          <p:cNvPr id="7" name="sp7"/>
+          <p:cNvSpPr txBox="1"/>
+          <p:nvPr/>
+        </p:nvSpPr>
+        <p:spPr bwMode="auto">
+          <a:xfrm>
+            <a:off x="144000" y="1278000"/>
             <a:ext cx="5436000" cy="396000"/>
           </a:xfrm>
-          <a:prstGeom prst="rect">
-            <a:avLst/>
-          </a:prstGeom>
-          <a:gradFill>
+          <a:prstGeom prst="roundRect">
+            <a:avLst>
+              <a:gd name="adj" fmla="val 8000"/>
+            </a:avLst>
+          </a:prstGeom>
+          <a:gradFill rotWithShape="1">
             <a:gsLst>
               <a:gs pos="0">
-                <a:srgbClr val="1565C0"/>
+                <a:solidFill>
+                  <a:srgbClr val="1565C0"/>
+                </a:solidFill>
               </a:gs>
               <a:gs pos="100000">
-                <a:srgbClr val="00B4D8"/>
+                <a:solidFill>
+                  <a:srgbClr val="00B4D8"/>
+                </a:solidFill>
               </a:gs>
             </a:gsLst>
             <a:lin ang="0" scaled="0"/>
@@ -1813,15 +1721,13 @@
       </p:sp>
       <p:sp>
         <p:nvSpPr>
-          <p:cNvPr id="22" name="CardTitle"/>
-          <p:cNvSpPr txBox="1">
-            <a:spLocks noGrp="1"/>
-          </p:cNvSpPr>
-          <p:nvPr/>
-        </p:nvSpPr>
-        <p:spPr>
-          <a:xfrm>
-            <a:off x="144000" y="1296000"/>
+          <p:cNvPr id="8" name="sp8"/>
+          <p:cNvSpPr txBox="1"/>
+          <p:nvPr/>
+        </p:nvSpPr>
+        <p:spPr bwMode="auto">
+          <a:xfrm>
+            <a:off x="144000" y="1278000"/>
             <a:ext cx="5436000" cy="396000"/>
           </a:xfrm>
           <a:prstGeom prst="rect">
@@ -1838,35 +1744,29 @@
           </a:bodyPr>
           <a:lstStyle/>
           <a:p>
-            <a:pPr algn="ctr">
-              <a:spcBef>
-                <a:spcPts val="0"/>
-              </a:spcBef>
-            </a:pPr>
-            <a:r>
-              <a:rPr lang="ru-RU" sz="1400" b="1" i="0" dirty="0" smtClean="0">
+            <a:pPr algn="ctr"/>
+            <a:r>
+              <a:rPr lang="ru-RU" altLang="en-US" sz="1400" b="1" i="0" dirty="0" smtClean="0">
                 <a:solidFill>
                   <a:srgbClr val="FFFFFF"/>
                 </a:solidFill>
-                <a:latin typeface="+mj-lt"/>
-              </a:rPr>
-              <a:t>Этап 1: 2025–2027</a:t>
-            </a:r>
-          </a:p>
-        </p:txBody>
-      </p:sp>
-      <p:sp>
-        <p:nvSpPr>
-          <p:cNvPr id="23" name="CardBullets"/>
-          <p:cNvSpPr txBox="1">
-            <a:spLocks noGrp="1"/>
-          </p:cNvSpPr>
-          <p:nvPr/>
-        </p:nvSpPr>
-        <p:spPr>
-          <a:xfrm>
-            <a:off x="216000" y="1764000"/>
-            <a:ext cx="5292000" cy="4950000"/>
+                <a:latin typeface="Calibri"/>
+              </a:rPr>
+              <a:t>Этап 1: 2025-2027</a:t>
+            </a:r>
+          </a:p>
+        </p:txBody>
+      </p:sp>
+      <p:sp>
+        <p:nvSpPr>
+          <p:cNvPr id="9" name="sp9"/>
+          <p:cNvSpPr txBox="1"/>
+          <p:nvPr/>
+        </p:nvSpPr>
+        <p:spPr bwMode="auto">
+          <a:xfrm>
+            <a:off x="234000" y="1728000"/>
+            <a:ext cx="5256000" cy="4914000"/>
           </a:xfrm>
           <a:prstGeom prst="rect">
             <a:avLst/>
@@ -1888,11 +1788,11 @@
               </a:spcBef>
             </a:pPr>
             <a:r>
-              <a:rPr lang="ru-RU" sz="1300" b="0" i="0" dirty="0" smtClean="0">
+              <a:rPr lang="ru-RU" altLang="en-US" sz="1300" b="0" i="0" dirty="0" smtClean="0">
                 <a:solidFill>
                   <a:srgbClr val="1A237E"/>
                 </a:solidFill>
-                <a:latin typeface="+mj-lt"/>
+                <a:latin typeface="Calibri"/>
               </a:rPr>
               <a:t>▶  Инфраструктура фискальной трансмиссии</a:t>
             </a:r>
@@ -1904,13 +1804,13 @@
               </a:spcBef>
             </a:pPr>
             <a:r>
-              <a:rPr lang="ru-RU" sz="1300" b="0" i="0" dirty="0" smtClean="0">
+              <a:rPr lang="ru-RU" altLang="en-US" sz="1300" b="0" i="0" dirty="0" smtClean="0">
                 <a:solidFill>
                   <a:srgbClr val="1A237E"/>
                 </a:solidFill>
-                <a:latin typeface="+mj-lt"/>
-              </a:rPr>
-              <a:t>▶  Интеграция MyID с адресными выплатами</a:t>
+                <a:latin typeface="Calibri"/>
+              </a:rPr>
+              <a:t>▶  Интеграция MyID с системой адресных выплат</a:t>
             </a:r>
           </a:p>
           <a:p>
@@ -1920,11 +1820,11 @@
               </a:spcBef>
             </a:pPr>
             <a:r>
-              <a:rPr lang="ru-RU" sz="1300" b="0" i="0" dirty="0" smtClean="0">
+              <a:rPr lang="ru-RU" altLang="en-US" sz="1300" b="0" i="0" dirty="0" smtClean="0">
                 <a:solidFill>
                   <a:srgbClr val="1A237E"/>
                 </a:solidFill>
-                <a:latin typeface="+mj-lt"/>
+                <a:latin typeface="Calibri"/>
               </a:rPr>
               <a:t>▶  Расширение широкополосного доступа в регионах</a:t>
             </a:r>
@@ -1936,32 +1836,32 @@
               </a:spcBef>
             </a:pPr>
             <a:r>
-              <a:rPr lang="ru-RU" sz="1300" b="0" i="0" dirty="0" smtClean="0">
+              <a:rPr lang="ru-RU" altLang="en-US" sz="1300" b="0" i="0" dirty="0" smtClean="0">
                 <a:solidFill>
                   <a:srgbClr val="1A237E"/>
                 </a:solidFill>
-                <a:latin typeface="+mj-lt"/>
-              </a:rPr>
-              <a:t>▶  Цифровые навыки: программы для населения и МСП</a:t>
-            </a:r>
-          </a:p>
-        </p:txBody>
-      </p:sp>
-      <p:sp>
-        <p:nvSpPr>
-          <p:cNvPr id="30" name="Card"/>
-          <p:cNvSpPr txBox="1">
-            <a:spLocks noGrp="1"/>
-          </p:cNvSpPr>
-          <p:nvPr/>
-        </p:nvSpPr>
-        <p:spPr>
-          <a:xfrm>
-            <a:off x="6263999" y="1296000"/>
-            <a:ext cx="5436000" cy="5490000"/>
-          </a:xfrm>
-          <a:prstGeom prst="rect">
-            <a:avLst/>
+                <a:latin typeface="Calibri"/>
+              </a:rPr>
+              <a:t>▶  Программы цифровых навыков для населения и МСП</a:t>
+            </a:r>
+          </a:p>
+        </p:txBody>
+      </p:sp>
+      <p:sp>
+        <p:nvSpPr>
+          <p:cNvPr id="10" name="sp10"/>
+          <p:cNvSpPr txBox="1"/>
+          <p:nvPr/>
+        </p:nvSpPr>
+        <p:spPr bwMode="auto">
+          <a:xfrm>
+            <a:off x="6300000" y="1278000"/>
+            <a:ext cx="5436000" cy="5454000"/>
+          </a:xfrm>
+          <a:prstGeom prst="roundRect">
+            <a:avLst>
+              <a:gd name="adj" fmla="val 8000"/>
+            </a:avLst>
           </a:prstGeom>
           <a:solidFill>
             <a:srgbClr val="FFFFFF"/>
@@ -1980,27 +1880,31 @@
       </p:sp>
       <p:sp>
         <p:nvSpPr>
-          <p:cNvPr id="31" name="CardHdr"/>
-          <p:cNvSpPr txBox="1">
-            <a:spLocks noGrp="1"/>
-          </p:cNvSpPr>
-          <p:nvPr/>
-        </p:nvSpPr>
-        <p:spPr>
-          <a:xfrm>
-            <a:off x="6263999" y="1296000"/>
+          <p:cNvPr id="11" name="sp11"/>
+          <p:cNvSpPr txBox="1"/>
+          <p:nvPr/>
+        </p:nvSpPr>
+        <p:spPr bwMode="auto">
+          <a:xfrm>
+            <a:off x="6300000" y="1278000"/>
             <a:ext cx="5436000" cy="396000"/>
           </a:xfrm>
-          <a:prstGeom prst="rect">
-            <a:avLst/>
-          </a:prstGeom>
-          <a:gradFill>
+          <a:prstGeom prst="roundRect">
+            <a:avLst>
+              <a:gd name="adj" fmla="val 8000"/>
+            </a:avLst>
+          </a:prstGeom>
+          <a:gradFill rotWithShape="1">
             <a:gsLst>
               <a:gs pos="0">
-                <a:srgbClr val="00B4D8"/>
+                <a:solidFill>
+                  <a:srgbClr val="00B4D8"/>
+                </a:solidFill>
               </a:gs>
               <a:gs pos="100000">
-                <a:srgbClr val="1565C0"/>
+                <a:solidFill>
+                  <a:srgbClr val="1565C0"/>
+                </a:solidFill>
               </a:gs>
             </a:gsLst>
             <a:lin ang="0" scaled="0"/>
@@ -2017,15 +1921,13 @@
       </p:sp>
       <p:sp>
         <p:nvSpPr>
-          <p:cNvPr id="32" name="CardTitle"/>
-          <p:cNvSpPr txBox="1">
-            <a:spLocks noGrp="1"/>
-          </p:cNvSpPr>
-          <p:nvPr/>
-        </p:nvSpPr>
-        <p:spPr>
-          <a:xfrm>
-            <a:off x="6263999" y="1296000"/>
+          <p:cNvPr id="12" name="sp12"/>
+          <p:cNvSpPr txBox="1"/>
+          <p:nvPr/>
+        </p:nvSpPr>
+        <p:spPr bwMode="auto">
+          <a:xfrm>
+            <a:off x="6300000" y="1278000"/>
             <a:ext cx="5436000" cy="396000"/>
           </a:xfrm>
           <a:prstGeom prst="rect">
@@ -2042,35 +1944,29 @@
           </a:bodyPr>
           <a:lstStyle/>
           <a:p>
-            <a:pPr algn="ctr">
-              <a:spcBef>
-                <a:spcPts val="0"/>
-              </a:spcBef>
-            </a:pPr>
-            <a:r>
-              <a:rPr lang="ru-RU" sz="1400" b="1" i="0" dirty="0" smtClean="0">
+            <a:pPr algn="ctr"/>
+            <a:r>
+              <a:rPr lang="ru-RU" altLang="en-US" sz="1400" b="1" i="0" dirty="0" smtClean="0">
                 <a:solidFill>
                   <a:srgbClr val="FFFFFF"/>
                 </a:solidFill>
-                <a:latin typeface="+mj-lt"/>
-              </a:rPr>
-              <a:t>Этап 2: 2027–2030+</a:t>
-            </a:r>
-          </a:p>
-        </p:txBody>
-      </p:sp>
-      <p:sp>
-        <p:nvSpPr>
-          <p:cNvPr id="33" name="CardBullets"/>
-          <p:cNvSpPr txBox="1">
-            <a:spLocks noGrp="1"/>
-          </p:cNvSpPr>
-          <p:nvPr/>
-        </p:nvSpPr>
-        <p:spPr>
-          <a:xfrm>
-            <a:off x="6335999" y="1764000"/>
-            <a:ext cx="5292000" cy="4950000"/>
+                <a:latin typeface="Calibri"/>
+              </a:rPr>
+              <a:t>Этап 2: 2027-2030+</a:t>
+            </a:r>
+          </a:p>
+        </p:txBody>
+      </p:sp>
+      <p:sp>
+        <p:nvSpPr>
+          <p:cNvPr id="13" name="sp13"/>
+          <p:cNvSpPr txBox="1"/>
+          <p:nvPr/>
+        </p:nvSpPr>
+        <p:spPr bwMode="auto">
+          <a:xfrm>
+            <a:off x="6390000" y="1728000"/>
+            <a:ext cx="5256000" cy="4914000"/>
           </a:xfrm>
           <a:prstGeom prst="rect">
             <a:avLst/>
@@ -2092,13 +1988,13 @@
               </a:spcBef>
             </a:pPr>
             <a:r>
-              <a:rPr lang="ru-RU" sz="1300" b="0" i="0" dirty="0" smtClean="0">
+              <a:rPr lang="ru-RU" altLang="en-US" sz="1300" b="0" i="0" dirty="0" smtClean="0">
                 <a:solidFill>
                   <a:srgbClr val="1A237E"/>
                 </a:solidFill>
-                <a:latin typeface="+mj-lt"/>
-              </a:rPr>
-              <a:t>▶  Устранение разрыва: бизнес-сектор ≈ государственный</a:t>
+                <a:latin typeface="Calibri"/>
+              </a:rPr>
+              <a:t>▶  Устранение разрыва: цифровой бизнес = цифровое государство</a:t>
             </a:r>
           </a:p>
           <a:p>
@@ -2108,13 +2004,13 @@
               </a:spcBef>
             </a:pPr>
             <a:r>
-              <a:rPr lang="ru-RU" sz="1300" b="0" i="0" dirty="0" smtClean="0">
+              <a:rPr lang="ru-RU" altLang="en-US" sz="1300" b="0" i="0" dirty="0" smtClean="0">
                 <a:solidFill>
                   <a:srgbClr val="1A237E"/>
                 </a:solidFill>
-                <a:latin typeface="+mj-lt"/>
-              </a:rPr>
-              <a:t>▶  Достижение «порога» антикризисной зрелости</a:t>
+                <a:latin typeface="Calibri"/>
+              </a:rPr>
+              <a:t>▶  Достижение «порога» антикризисной цифровой зрелости</a:t>
             </a:r>
           </a:p>
           <a:p>
@@ -2124,13 +2020,13 @@
               </a:spcBef>
             </a:pPr>
             <a:r>
-              <a:rPr lang="ru-RU" sz="1300" b="0" i="0" dirty="0" smtClean="0">
+              <a:rPr lang="ru-RU" altLang="en-US" sz="1300" b="0" i="0" dirty="0" smtClean="0">
                 <a:solidFill>
                   <a:srgbClr val="1A237E"/>
                 </a:solidFill>
-                <a:latin typeface="+mj-lt"/>
-              </a:rPr>
-              <a:t>▶  Значимые interaction terms в будущих моделях</a:t>
+                <a:latin typeface="Calibri"/>
+              </a:rPr>
+              <a:t>▶  Значимые кризисные эффекты в будущих эконометрических моделях</a:t>
             </a:r>
           </a:p>
           <a:p>
@@ -2140,55 +2036,49 @@
               </a:spcBef>
             </a:pPr>
             <a:r>
-              <a:rPr lang="ru-RU" sz="1300" b="0" i="0" dirty="0" smtClean="0">
+              <a:rPr lang="ru-RU" altLang="en-US" sz="1300" b="0" i="0" dirty="0" smtClean="0">
                 <a:solidFill>
                   <a:srgbClr val="1A237E"/>
                 </a:solidFill>
-                <a:latin typeface="+mj-lt"/>
-              </a:rPr>
-              <a:t>▶  Адаптация опыта X-Road (Эстония) к масштабу Узбекистана</a:t>
-            </a:r>
-          </a:p>
-        </p:txBody>
-      </p:sp>
-      <p:sp>
-        <p:nvSpPr>
-          <p:cNvPr id="50" name="SlideNum"/>
-          <p:cNvSpPr txBox="1">
-            <a:spLocks noGrp="1"/>
-          </p:cNvSpPr>
-          <p:nvPr/>
-        </p:nvSpPr>
-        <p:spPr>
-          <a:xfrm>
-            <a:off x="10933200" y="6624000"/>
-            <a:ext cx="1152000" cy="180000"/>
-          </a:xfrm>
-          <a:prstGeom prst="rect">
-            <a:avLst/>
-          </a:prstGeom>
-          <a:noFill/>
-          <a:ln>
-            <a:noFill/>
-          </a:ln>
-        </p:spPr>
-        <p:txBody>
-          <a:bodyPr wrap="square" anchor="ctr">
-            <a:normAutofit/>
-          </a:bodyPr>
-          <a:lstStyle/>
-          <a:p>
-            <a:pPr algn="r">
-              <a:spcBef>
-                <a:spcPts val="0"/>
-              </a:spcBef>
-            </a:pPr>
-            <a:r>
-              <a:rPr lang="ru-RU" sz="900" b="0" i="0" dirty="0" smtClean="0">
-                <a:solidFill>
-                  <a:srgbClr val="90E0EF"/>
-                </a:solidFill>
-                <a:latin typeface="+mj-lt"/>
+                <a:latin typeface="Calibri"/>
+              </a:rPr>
+              <a:t>▶  Адаптация элементов X-Road к масштабу Узбекистана</a:t>
+            </a:r>
+          </a:p>
+        </p:txBody>
+      </p:sp>
+      <p:sp>
+        <p:nvSpPr>
+          <p:cNvPr id="14" name="sp14"/>
+          <p:cNvSpPr txBox="1"/>
+          <p:nvPr/>
+        </p:nvSpPr>
+        <p:spPr bwMode="auto">
+          <a:xfrm>
+            <a:off x="10932000" y="6606001"/>
+            <a:ext cx="1152000" cy="198000"/>
+          </a:xfrm>
+          <a:prstGeom prst="rect">
+            <a:avLst/>
+          </a:prstGeom>
+          <a:noFill/>
+          <a:ln>
+            <a:noFill/>
+          </a:ln>
+        </p:spPr>
+        <p:txBody>
+          <a:bodyPr wrap="square" anchor="t">
+            <a:normAutofit/>
+          </a:bodyPr>
+          <a:lstStyle/>
+          <a:p>
+            <a:pPr algn="r"/>
+            <a:r>
+              <a:rPr lang="ru-RU" altLang="en-US" sz="900" b="0" i="0" dirty="0" smtClean="0">
+                <a:solidFill>
+                  <a:srgbClr val="546E7A"/>
+                </a:solidFill>
+                <a:latin typeface="Calibri"/>
               </a:rPr>
               <a:t>13 / 15</a:t>
             </a:r>
@@ -2204,7 +2094,7 @@
 </file>
 
 <file path=ppt/slides/slide14.xml><?xml version="1.0" encoding="utf-8"?>
-<p:sld xmlns:a="http://schemas.openxmlformats.org/drawingml/2006/main" xmlns:p="http://schemas.openxmlformats.org/presentationml/2006/main" xmlns:r="http://schemas.openxmlformats.org/officeDocument/2006/relationships">
+<p:sld xmlns:a="http://schemas.openxmlformats.org/drawingml/2006/main" xmlns:p="http://schemas.openxmlformats.org/presentationml/2006/main" xmlns:r="http://schemas.openxmlformats.org/officeDocument/2006/relationships" show="1">
   <p:cSld>
     <p:spTree>
       <p:nvGrpSpPr>
@@ -2215,23 +2105,21 @@
       <p:grpSpPr>
         <a:xfrm>
           <a:off x="0" y="0"/>
-          <a:ext cx="0" cy="0"/>
+          <a:ext cx="12192000" cy="6858000"/>
           <a:chOff x="0" y="0"/>
-          <a:chExt cx="0" cy="0"/>
+          <a:chExt cx="12192000" cy="6858000"/>
         </a:xfrm>
       </p:grpSpPr>
       <p:sp>
         <p:nvSpPr>
-          <p:cNvPr id="10" name="Bg"/>
-          <p:cNvSpPr txBox="1">
-            <a:spLocks noGrp="1"/>
-          </p:cNvSpPr>
-          <p:nvPr/>
-        </p:nvSpPr>
-        <p:spPr>
+          <p:cNvPr id="2" name="sp2"/>
+          <p:cNvSpPr txBox="1"/>
+          <p:nvPr/>
+        </p:nvSpPr>
+        <p:spPr bwMode="auto">
           <a:xfrm>
             <a:off x="0" y="0"/>
-            <a:ext cx="12193200" cy="6858000"/>
+            <a:ext cx="12192000" cy="6858000"/>
           </a:xfrm>
           <a:prstGeom prst="rect">
             <a:avLst/>
@@ -2251,27 +2139,29 @@
       </p:sp>
       <p:sp>
         <p:nvSpPr>
-          <p:cNvPr id="11" name="Header"/>
-          <p:cNvSpPr txBox="1">
-            <a:spLocks noGrp="1"/>
-          </p:cNvSpPr>
-          <p:nvPr/>
-        </p:nvSpPr>
-        <p:spPr>
+          <p:cNvPr id="3" name="sp3"/>
+          <p:cNvSpPr txBox="1"/>
+          <p:nvPr/>
+        </p:nvSpPr>
+        <p:spPr bwMode="auto">
           <a:xfrm>
             <a:off x="0" y="0"/>
-            <a:ext cx="12193200" cy="1188000"/>
-          </a:xfrm>
-          <a:prstGeom prst="rect">
-            <a:avLst/>
-          </a:prstGeom>
-          <a:gradFill>
+            <a:ext cx="12192000" cy="1152000"/>
+          </a:xfrm>
+          <a:prstGeom prst="rect">
+            <a:avLst/>
+          </a:prstGeom>
+          <a:gradFill rotWithShape="1">
             <a:gsLst>
               <a:gs pos="0">
-                <a:srgbClr val="0D1B2A"/>
+                <a:solidFill>
+                  <a:srgbClr val="0D1B2A"/>
+                </a:solidFill>
               </a:gs>
               <a:gs pos="100000">
-                <a:srgbClr val="1565C0"/>
+                <a:solidFill>
+                  <a:srgbClr val="1565C0"/>
+                </a:solidFill>
               </a:gs>
             </a:gsLst>
             <a:lin ang="0" scaled="0"/>
@@ -2288,16 +2178,14 @@
       </p:sp>
       <p:sp>
         <p:nvSpPr>
-          <p:cNvPr id="12" name="Line12"/>
-          <p:cNvSpPr txBox="1">
-            <a:spLocks noGrp="1"/>
-          </p:cNvSpPr>
-          <p:nvPr/>
-        </p:nvSpPr>
-        <p:spPr>
-          <a:xfrm>
-            <a:off x="0" y="1170000"/>
-            <a:ext cx="12193200" cy="7200"/>
+          <p:cNvPr id="4" name="sp4"/>
+          <p:cNvSpPr txBox="1"/>
+          <p:nvPr/>
+        </p:nvSpPr>
+        <p:spPr bwMode="auto">
+          <a:xfrm>
+            <a:off x="0" y="1134000"/>
+            <a:ext cx="12192000" cy="43200"/>
           </a:xfrm>
           <a:prstGeom prst="rect">
             <a:avLst/>
@@ -2317,16 +2205,14 @@
       </p:sp>
       <p:sp>
         <p:nvSpPr>
-          <p:cNvPr id="13" name="Title"/>
-          <p:cNvSpPr txBox="1">
-            <a:spLocks noGrp="1"/>
-          </p:cNvSpPr>
-          <p:nvPr/>
-        </p:nvSpPr>
-        <p:spPr>
-          <a:xfrm>
-            <a:off x="251999" y="72000"/>
-            <a:ext cx="11761199" cy="1080000"/>
+          <p:cNvPr id="5" name="sp5"/>
+          <p:cNvSpPr txBox="1"/>
+          <p:nvPr/>
+        </p:nvSpPr>
+        <p:spPr bwMode="auto">
+          <a:xfrm>
+            <a:off x="251999" y="54000"/>
+            <a:ext cx="11760000" cy="1062000"/>
           </a:xfrm>
           <a:prstGeom prst="rect">
             <a:avLst/>
@@ -2342,17 +2228,13 @@
           </a:bodyPr>
           <a:lstStyle/>
           <a:p>
-            <a:pPr algn="l">
-              <a:spcBef>
-                <a:spcPts val="0"/>
-              </a:spcBef>
-            </a:pPr>
-            <a:r>
-              <a:rPr lang="ru-RU" sz="2100" b="1" i="0" dirty="0" smtClean="0">
+            <a:pPr algn="l"/>
+            <a:r>
+              <a:rPr lang="ru-RU" altLang="en-US" sz="2200" b="1" i="0" dirty="0" smtClean="0">
                 <a:solidFill>
                   <a:srgbClr val="FFFFFF"/>
                 </a:solidFill>
-                <a:latin typeface="+mj-lt"/>
+                <a:latin typeface="Calibri"/>
               </a:rPr>
               <a:t>Научная новизна и практическая значимость</a:t>
             </a:r>
@@ -2361,19 +2243,19 @@
       </p:sp>
       <p:sp>
         <p:nvSpPr>
-          <p:cNvPr id="20" name="Card"/>
-          <p:cNvSpPr txBox="1">
-            <a:spLocks noGrp="1"/>
-          </p:cNvSpPr>
-          <p:nvPr/>
-        </p:nvSpPr>
-        <p:spPr>
-          <a:xfrm>
-            <a:off x="144000" y="1296000"/>
-            <a:ext cx="5436000" cy="5490000"/>
-          </a:xfrm>
-          <a:prstGeom prst="rect">
-            <a:avLst/>
+          <p:cNvPr id="6" name="sp6"/>
+          <p:cNvSpPr txBox="1"/>
+          <p:nvPr/>
+        </p:nvSpPr>
+        <p:spPr bwMode="auto">
+          <a:xfrm>
+            <a:off x="144000" y="1278000"/>
+            <a:ext cx="5436000" cy="5454000"/>
+          </a:xfrm>
+          <a:prstGeom prst="roundRect">
+            <a:avLst>
+              <a:gd name="adj" fmla="val 8000"/>
+            </a:avLst>
           </a:prstGeom>
           <a:solidFill>
             <a:srgbClr val="FFFFFF"/>
@@ -2392,27 +2274,31 @@
       </p:sp>
       <p:sp>
         <p:nvSpPr>
-          <p:cNvPr id="21" name="CardHdr"/>
-          <p:cNvSpPr txBox="1">
-            <a:spLocks noGrp="1"/>
-          </p:cNvSpPr>
-          <p:nvPr/>
-        </p:nvSpPr>
-        <p:spPr>
-          <a:xfrm>
-            <a:off x="144000" y="1296000"/>
+          <p:cNvPr id="7" name="sp7"/>
+          <p:cNvSpPr txBox="1"/>
+          <p:nvPr/>
+        </p:nvSpPr>
+        <p:spPr bwMode="auto">
+          <a:xfrm>
+            <a:off x="144000" y="1278000"/>
             <a:ext cx="5436000" cy="396000"/>
           </a:xfrm>
-          <a:prstGeom prst="rect">
-            <a:avLst/>
-          </a:prstGeom>
-          <a:gradFill>
+          <a:prstGeom prst="roundRect">
+            <a:avLst>
+              <a:gd name="adj" fmla="val 8000"/>
+            </a:avLst>
+          </a:prstGeom>
+          <a:gradFill rotWithShape="1">
             <a:gsLst>
               <a:gs pos="0">
-                <a:srgbClr val="1565C0"/>
+                <a:solidFill>
+                  <a:srgbClr val="1565C0"/>
+                </a:solidFill>
               </a:gs>
               <a:gs pos="100000">
-                <a:srgbClr val="00B4D8"/>
+                <a:solidFill>
+                  <a:srgbClr val="00B4D8"/>
+                </a:solidFill>
               </a:gs>
             </a:gsLst>
             <a:lin ang="0" scaled="0"/>
@@ -2429,15 +2315,13 @@
       </p:sp>
       <p:sp>
         <p:nvSpPr>
-          <p:cNvPr id="22" name="CardTitle"/>
-          <p:cNvSpPr txBox="1">
-            <a:spLocks noGrp="1"/>
-          </p:cNvSpPr>
-          <p:nvPr/>
-        </p:nvSpPr>
-        <p:spPr>
-          <a:xfrm>
-            <a:off x="144000" y="1296000"/>
+          <p:cNvPr id="8" name="sp8"/>
+          <p:cNvSpPr txBox="1"/>
+          <p:nvPr/>
+        </p:nvSpPr>
+        <p:spPr bwMode="auto">
+          <a:xfrm>
+            <a:off x="144000" y="1278000"/>
             <a:ext cx="5436000" cy="396000"/>
           </a:xfrm>
           <a:prstGeom prst="rect">
@@ -2454,17 +2338,13 @@
           </a:bodyPr>
           <a:lstStyle/>
           <a:p>
-            <a:pPr algn="ctr">
-              <a:spcBef>
-                <a:spcPts val="0"/>
-              </a:spcBef>
-            </a:pPr>
-            <a:r>
-              <a:rPr lang="ru-RU" sz="1400" b="1" i="0" dirty="0" smtClean="0">
+            <a:pPr algn="ctr"/>
+            <a:r>
+              <a:rPr lang="ru-RU" altLang="en-US" sz="1400" b="1" i="0" dirty="0" smtClean="0">
                 <a:solidFill>
                   <a:srgbClr val="FFFFFF"/>
                 </a:solidFill>
-                <a:latin typeface="+mj-lt"/>
+                <a:latin typeface="Calibri"/>
               </a:rPr>
               <a:t>Научная новизна</a:t>
             </a:r>
@@ -2473,16 +2353,14 @@
       </p:sp>
       <p:sp>
         <p:nvSpPr>
-          <p:cNvPr id="23" name="CardBullets"/>
-          <p:cNvSpPr txBox="1">
-            <a:spLocks noGrp="1"/>
-          </p:cNvSpPr>
-          <p:nvPr/>
-        </p:nvSpPr>
-        <p:spPr>
-          <a:xfrm>
-            <a:off x="216000" y="1764000"/>
-            <a:ext cx="5292000" cy="4950000"/>
+          <p:cNvPr id="9" name="sp9"/>
+          <p:cNvSpPr txBox="1"/>
+          <p:nvPr/>
+        </p:nvSpPr>
+        <p:spPr bwMode="auto">
+          <a:xfrm>
+            <a:off x="234000" y="1728000"/>
+            <a:ext cx="5256000" cy="4914000"/>
           </a:xfrm>
           <a:prstGeom prst="rect">
             <a:avLst/>
@@ -2504,11 +2382,11 @@
               </a:spcBef>
             </a:pPr>
             <a:r>
-              <a:rPr lang="ru-RU" sz="1300" b="0" i="0" dirty="0" smtClean="0">
+              <a:rPr lang="ru-RU" altLang="en-US" sz="1300" b="0" i="0" dirty="0" smtClean="0">
                 <a:solidFill>
                   <a:srgbClr val="1A237E"/>
                 </a:solidFill>
-                <a:latin typeface="+mj-lt"/>
+                <a:latin typeface="Calibri"/>
               </a:rPr>
               <a:t>▶  Систематизирована пятиканальная модель влияния цифровизации на устойчивость</a:t>
             </a:r>
@@ -2520,11 +2398,11 @@
               </a:spcBef>
             </a:pPr>
             <a:r>
-              <a:rPr lang="ru-RU" sz="1300" b="0" i="0" dirty="0" smtClean="0">
+              <a:rPr lang="ru-RU" altLang="en-US" sz="1300" b="0" i="0" dirty="0" smtClean="0">
                 <a:solidFill>
                   <a:srgbClr val="1A237E"/>
                 </a:solidFill>
-                <a:latin typeface="+mj-lt"/>
+                <a:latin typeface="Calibri"/>
               </a:rPr>
               <a:t>▶  Эмпирически подтверждена структурная неоднородность эффекта (тест Чоу)</a:t>
             </a:r>
@@ -2536,11 +2414,11 @@
               </a:spcBef>
             </a:pPr>
             <a:r>
-              <a:rPr lang="ru-RU" sz="1300" b="0" i="0" dirty="0" smtClean="0">
+              <a:rPr lang="ru-RU" altLang="en-US" sz="1300" b="0" i="0" dirty="0" smtClean="0">
                 <a:solidFill>
                   <a:srgbClr val="1A237E"/>
                 </a:solidFill>
-                <a:latin typeface="+mj-lt"/>
+                <a:latin typeface="Calibri"/>
               </a:rPr>
               <a:t>▶  Выявлен «порог» цифровой зрелости для значимого антикризисного эффекта</a:t>
             </a:r>
@@ -2549,19 +2427,19 @@
       </p:sp>
       <p:sp>
         <p:nvSpPr>
-          <p:cNvPr id="30" name="Card"/>
-          <p:cNvSpPr txBox="1">
-            <a:spLocks noGrp="1"/>
-          </p:cNvSpPr>
-          <p:nvPr/>
-        </p:nvSpPr>
-        <p:spPr>
-          <a:xfrm>
-            <a:off x="6263999" y="1296000"/>
-            <a:ext cx="5436000" cy="5490000"/>
-          </a:xfrm>
-          <a:prstGeom prst="rect">
-            <a:avLst/>
+          <p:cNvPr id="10" name="sp10"/>
+          <p:cNvSpPr txBox="1"/>
+          <p:nvPr/>
+        </p:nvSpPr>
+        <p:spPr bwMode="auto">
+          <a:xfrm>
+            <a:off x="6300000" y="1278000"/>
+            <a:ext cx="5436000" cy="5454000"/>
+          </a:xfrm>
+          <a:prstGeom prst="roundRect">
+            <a:avLst>
+              <a:gd name="adj" fmla="val 8000"/>
+            </a:avLst>
           </a:prstGeom>
           <a:solidFill>
             <a:srgbClr val="FFFFFF"/>
@@ -2580,27 +2458,31 @@
       </p:sp>
       <p:sp>
         <p:nvSpPr>
-          <p:cNvPr id="31" name="CardHdr"/>
-          <p:cNvSpPr txBox="1">
-            <a:spLocks noGrp="1"/>
-          </p:cNvSpPr>
-          <p:nvPr/>
-        </p:nvSpPr>
-        <p:spPr>
-          <a:xfrm>
-            <a:off x="6263999" y="1296000"/>
+          <p:cNvPr id="11" name="sp11"/>
+          <p:cNvSpPr txBox="1"/>
+          <p:nvPr/>
+        </p:nvSpPr>
+        <p:spPr bwMode="auto">
+          <a:xfrm>
+            <a:off x="6300000" y="1278000"/>
             <a:ext cx="5436000" cy="396000"/>
           </a:xfrm>
-          <a:prstGeom prst="rect">
-            <a:avLst/>
-          </a:prstGeom>
-          <a:gradFill>
+          <a:prstGeom prst="roundRect">
+            <a:avLst>
+              <a:gd name="adj" fmla="val 8000"/>
+            </a:avLst>
+          </a:prstGeom>
+          <a:gradFill rotWithShape="1">
             <a:gsLst>
               <a:gs pos="0">
-                <a:srgbClr val="00B4D8"/>
+                <a:solidFill>
+                  <a:srgbClr val="00B4D8"/>
+                </a:solidFill>
               </a:gs>
               <a:gs pos="100000">
-                <a:srgbClr val="1565C0"/>
+                <a:solidFill>
+                  <a:srgbClr val="1565C0"/>
+                </a:solidFill>
               </a:gs>
             </a:gsLst>
             <a:lin ang="0" scaled="0"/>
@@ -2617,15 +2499,13 @@
       </p:sp>
       <p:sp>
         <p:nvSpPr>
-          <p:cNvPr id="32" name="CardTitle"/>
-          <p:cNvSpPr txBox="1">
-            <a:spLocks noGrp="1"/>
-          </p:cNvSpPr>
-          <p:nvPr/>
-        </p:nvSpPr>
-        <p:spPr>
-          <a:xfrm>
-            <a:off x="6263999" y="1296000"/>
+          <p:cNvPr id="12" name="sp12"/>
+          <p:cNvSpPr txBox="1"/>
+          <p:nvPr/>
+        </p:nvSpPr>
+        <p:spPr bwMode="auto">
+          <a:xfrm>
+            <a:off x="6300000" y="1278000"/>
             <a:ext cx="5436000" cy="396000"/>
           </a:xfrm>
           <a:prstGeom prst="rect">
@@ -2642,17 +2522,13 @@
           </a:bodyPr>
           <a:lstStyle/>
           <a:p>
-            <a:pPr algn="ctr">
-              <a:spcBef>
-                <a:spcPts val="0"/>
-              </a:spcBef>
-            </a:pPr>
-            <a:r>
-              <a:rPr lang="ru-RU" sz="1400" b="1" i="0" dirty="0" smtClean="0">
+            <a:pPr algn="ctr"/>
+            <a:r>
+              <a:rPr lang="ru-RU" altLang="en-US" sz="1400" b="1" i="0" dirty="0" smtClean="0">
                 <a:solidFill>
                   <a:srgbClr val="FFFFFF"/>
                 </a:solidFill>
-                <a:latin typeface="+mj-lt"/>
+                <a:latin typeface="Calibri"/>
               </a:rPr>
               <a:t>Практическая значимость</a:t>
             </a:r>
@@ -2661,16 +2537,14 @@
       </p:sp>
       <p:sp>
         <p:nvSpPr>
-          <p:cNvPr id="33" name="CardBullets"/>
-          <p:cNvSpPr txBox="1">
-            <a:spLocks noGrp="1"/>
-          </p:cNvSpPr>
-          <p:nvPr/>
-        </p:nvSpPr>
-        <p:spPr>
-          <a:xfrm>
-            <a:off x="6335999" y="1764000"/>
-            <a:ext cx="5292000" cy="4950000"/>
+          <p:cNvPr id="13" name="sp13"/>
+          <p:cNvSpPr txBox="1"/>
+          <p:nvPr/>
+        </p:nvSpPr>
+        <p:spPr bwMode="auto">
+          <a:xfrm>
+            <a:off x="6390000" y="1728000"/>
+            <a:ext cx="5256000" cy="4914000"/>
           </a:xfrm>
           <a:prstGeom prst="rect">
             <a:avLst/>
@@ -2692,13 +2566,13 @@
               </a:spcBef>
             </a:pPr>
             <a:r>
-              <a:rPr lang="ru-RU" sz="1300" b="0" i="0" dirty="0" smtClean="0">
+              <a:rPr lang="ru-RU" altLang="en-US" sz="1300" b="0" i="0" dirty="0" smtClean="0">
                 <a:solidFill>
                   <a:srgbClr val="1A237E"/>
                 </a:solidFill>
-                <a:latin typeface="+mj-lt"/>
-              </a:rPr>
-              <a:t>▶  Рекомендации для уточнения Стратегии «Цифровой Узбекистан – 2030»</a:t>
+                <a:latin typeface="Calibri"/>
+              </a:rPr>
+              <a:t>▶  Рекомендации для уточнения Стратегии «Цифровой Узбекистан - 2030»</a:t>
             </a:r>
           </a:p>
           <a:p>
@@ -2708,11 +2582,11 @@
               </a:spcBef>
             </a:pPr>
             <a:r>
-              <a:rPr lang="ru-RU" sz="1300" b="0" i="0" dirty="0" smtClean="0">
+              <a:rPr lang="ru-RU" altLang="en-US" sz="1300" b="0" i="0" dirty="0" smtClean="0">
                 <a:solidFill>
                   <a:srgbClr val="1A237E"/>
                 </a:solidFill>
-                <a:latin typeface="+mj-lt"/>
+                <a:latin typeface="Calibri"/>
               </a:rPr>
               <a:t>▶  Методика адаптации опыта Эстонии, Кореи, Польши к условиям Узбекистана</a:t>
             </a:r>
@@ -2724,11 +2598,11 @@
               </a:spcBef>
             </a:pPr>
             <a:r>
-              <a:rPr lang="ru-RU" sz="1300" b="0" i="0" dirty="0" smtClean="0">
+              <a:rPr lang="ru-RU" altLang="en-US" sz="1300" b="0" i="0" dirty="0" smtClean="0">
                 <a:solidFill>
                   <a:srgbClr val="1A237E"/>
                 </a:solidFill>
-                <a:latin typeface="+mj-lt"/>
+                <a:latin typeface="Calibri"/>
               </a:rPr>
               <a:t>▶  Прогнозные сценарии ВВП на душу населения до 2030 года</a:t>
             </a:r>
@@ -2737,42 +2611,36 @@
       </p:sp>
       <p:sp>
         <p:nvSpPr>
-          <p:cNvPr id="50" name="SlideNum"/>
-          <p:cNvSpPr txBox="1">
-            <a:spLocks noGrp="1"/>
-          </p:cNvSpPr>
-          <p:nvPr/>
-        </p:nvSpPr>
-        <p:spPr>
-          <a:xfrm>
-            <a:off x="10933200" y="6624000"/>
-            <a:ext cx="1152000" cy="180000"/>
-          </a:xfrm>
-          <a:prstGeom prst="rect">
-            <a:avLst/>
-          </a:prstGeom>
-          <a:noFill/>
-          <a:ln>
-            <a:noFill/>
-          </a:ln>
-        </p:spPr>
-        <p:txBody>
-          <a:bodyPr wrap="square" anchor="ctr">
-            <a:normAutofit/>
-          </a:bodyPr>
-          <a:lstStyle/>
-          <a:p>
-            <a:pPr algn="r">
-              <a:spcBef>
-                <a:spcPts val="0"/>
-              </a:spcBef>
-            </a:pPr>
-            <a:r>
-              <a:rPr lang="ru-RU" sz="900" b="0" i="0" dirty="0" smtClean="0">
-                <a:solidFill>
-                  <a:srgbClr val="90E0EF"/>
-                </a:solidFill>
-                <a:latin typeface="+mj-lt"/>
+          <p:cNvPr id="14" name="sp14"/>
+          <p:cNvSpPr txBox="1"/>
+          <p:nvPr/>
+        </p:nvSpPr>
+        <p:spPr bwMode="auto">
+          <a:xfrm>
+            <a:off x="10932000" y="6606001"/>
+            <a:ext cx="1152000" cy="198000"/>
+          </a:xfrm>
+          <a:prstGeom prst="rect">
+            <a:avLst/>
+          </a:prstGeom>
+          <a:noFill/>
+          <a:ln>
+            <a:noFill/>
+          </a:ln>
+        </p:spPr>
+        <p:txBody>
+          <a:bodyPr wrap="square" anchor="t">
+            <a:normAutofit/>
+          </a:bodyPr>
+          <a:lstStyle/>
+          <a:p>
+            <a:pPr algn="r"/>
+            <a:r>
+              <a:rPr lang="ru-RU" altLang="en-US" sz="900" b="0" i="0" dirty="0" smtClean="0">
+                <a:solidFill>
+                  <a:srgbClr val="546E7A"/>
+                </a:solidFill>
+                <a:latin typeface="Calibri"/>
               </a:rPr>
               <a:t>14 / 15</a:t>
             </a:r>
@@ -2788,7 +2656,7 @@
 </file>
 
 <file path=ppt/slides/slide15.xml><?xml version="1.0" encoding="utf-8"?>
-<p:sld xmlns:a="http://schemas.openxmlformats.org/drawingml/2006/main" xmlns:p="http://schemas.openxmlformats.org/presentationml/2006/main" xmlns:r="http://schemas.openxmlformats.org/officeDocument/2006/relationships">
+<p:sld xmlns:a="http://schemas.openxmlformats.org/drawingml/2006/main" xmlns:p="http://schemas.openxmlformats.org/presentationml/2006/main" xmlns:r="http://schemas.openxmlformats.org/officeDocument/2006/relationships" show="1">
   <p:cSld>
     <p:spTree>
       <p:nvGrpSpPr>
@@ -2799,37 +2667,39 @@
       <p:grpSpPr>
         <a:xfrm>
           <a:off x="0" y="0"/>
-          <a:ext cx="0" cy="0"/>
+          <a:ext cx="12192000" cy="6858000"/>
           <a:chOff x="0" y="0"/>
-          <a:chExt cx="0" cy="0"/>
+          <a:chExt cx="12192000" cy="6858000"/>
         </a:xfrm>
       </p:grpSpPr>
       <p:sp>
         <p:nvSpPr>
-          <p:cNvPr id="10" name="BgGrad"/>
-          <p:cNvSpPr txBox="1">
-            <a:spLocks noGrp="1"/>
-          </p:cNvSpPr>
-          <p:nvPr/>
-        </p:nvSpPr>
-        <p:spPr>
+          <p:cNvPr id="2" name="sp2"/>
+          <p:cNvSpPr txBox="1"/>
+          <p:nvPr/>
+        </p:nvSpPr>
+        <p:spPr bwMode="auto">
           <a:xfrm>
             <a:off x="0" y="0"/>
-            <a:ext cx="12193200" cy="6858000"/>
-          </a:xfrm>
-          <a:prstGeom prst="rect">
-            <a:avLst/>
-          </a:prstGeom>
-          <a:gradFill>
+            <a:ext cx="12192000" cy="6858000"/>
+          </a:xfrm>
+          <a:prstGeom prst="rect">
+            <a:avLst/>
+          </a:prstGeom>
+          <a:gradFill rotWithShape="1">
             <a:gsLst>
               <a:gs pos="0">
-                <a:srgbClr val="0D1B2A"/>
+                <a:solidFill>
+                  <a:srgbClr val="0D1B2A"/>
+                </a:solidFill>
               </a:gs>
               <a:gs pos="100000">
-                <a:srgbClr val="1A3A5C"/>
+                <a:solidFill>
+                  <a:srgbClr val="1A3A5C"/>
+                </a:solidFill>
               </a:gs>
             </a:gsLst>
-            <a:lin ang="16200000" scaled="0"/>
+            <a:lin ang="0" scaled="0"/>
           </a:gradFill>
           <a:ln>
             <a:noFill/>
@@ -2843,15 +2713,13 @@
       </p:sp>
       <p:sp>
         <p:nvSpPr>
-          <p:cNvPr id="11" name="Circle"/>
-          <p:cNvSpPr txBox="1">
-            <a:spLocks noGrp="1"/>
-          </p:cNvSpPr>
-          <p:nvPr/>
-        </p:nvSpPr>
-        <p:spPr>
-          <a:xfrm>
-            <a:off x="6660000" y="-1440000"/>
+          <p:cNvPr id="3" name="sp3"/>
+          <p:cNvSpPr txBox="1"/>
+          <p:nvPr/>
+        </p:nvSpPr>
+        <p:spPr bwMode="auto">
+          <a:xfrm>
+            <a:off x="7200000" y="-1440000"/>
             <a:ext cx="7920000" cy="7920000"/>
           </a:xfrm>
           <a:prstGeom prst="ellipse">
@@ -2859,7 +2727,7 @@
           </a:prstGeom>
           <a:solidFill>
             <a:srgbClr val="1565C0">
-              <a:alpha val="15000"/>
+              <a:alpha val="18000"/>
             </a:srgbClr>
           </a:solidFill>
           <a:ln>
@@ -2874,23 +2742,21 @@
       </p:sp>
       <p:sp>
         <p:nvSpPr>
-          <p:cNvPr id="12" name="Circle2"/>
-          <p:cNvSpPr txBox="1">
-            <a:spLocks noGrp="1"/>
-          </p:cNvSpPr>
-          <p:nvPr/>
-        </p:nvSpPr>
-        <p:spPr>
-          <a:xfrm>
-            <a:off x="7200000" y="2880000"/>
-            <a:ext cx="5040000" cy="5040000"/>
+          <p:cNvPr id="4" name="sp4"/>
+          <p:cNvSpPr txBox="1"/>
+          <p:nvPr/>
+        </p:nvSpPr>
+        <p:spPr bwMode="auto">
+          <a:xfrm>
+            <a:off x="7920000" y="3240000"/>
+            <a:ext cx="4680000" cy="4680000"/>
           </a:xfrm>
           <a:prstGeom prst="ellipse">
             <a:avLst/>
           </a:prstGeom>
           <a:solidFill>
             <a:srgbClr val="00B4D8">
-              <a:alpha val="12000"/>
+              <a:alpha val="14000"/>
             </a:srgbClr>
           </a:solidFill>
           <a:ln>
@@ -2905,27 +2771,29 @@
       </p:sp>
       <p:sp>
         <p:nvSpPr>
-          <p:cNvPr id="13" name="Bar"/>
-          <p:cNvSpPr txBox="1">
-            <a:spLocks noGrp="1"/>
-          </p:cNvSpPr>
-          <p:nvPr/>
-        </p:nvSpPr>
-        <p:spPr>
+          <p:cNvPr id="5" name="sp5"/>
+          <p:cNvSpPr txBox="1"/>
+          <p:nvPr/>
+        </p:nvSpPr>
+        <p:spPr bwMode="auto">
           <a:xfrm>
             <a:off x="0" y="0"/>
-            <a:ext cx="180000" cy="6858000"/>
-          </a:xfrm>
-          <a:prstGeom prst="rect">
-            <a:avLst/>
-          </a:prstGeom>
-          <a:gradFill>
+            <a:ext cx="216000" cy="6858000"/>
+          </a:xfrm>
+          <a:prstGeom prst="rect">
+            <a:avLst/>
+          </a:prstGeom>
+          <a:gradFill rotWithShape="1">
             <a:gsLst>
               <a:gs pos="0">
-                <a:srgbClr val="00B4D8"/>
+                <a:solidFill>
+                  <a:srgbClr val="00B4D8"/>
+                </a:solidFill>
               </a:gs>
               <a:gs pos="100000">
-                <a:srgbClr val="1565C0"/>
+                <a:solidFill>
+                  <a:srgbClr val="1565C0"/>
+                </a:solidFill>
               </a:gs>
             </a:gsLst>
             <a:lin ang="5400000" scaled="0"/>
@@ -2942,16 +2810,52 @@
       </p:sp>
       <p:sp>
         <p:nvSpPr>
-          <p:cNvPr id="14" name="Line14"/>
-          <p:cNvSpPr txBox="1">
-            <a:spLocks noGrp="1"/>
-          </p:cNvSpPr>
-          <p:nvPr/>
-        </p:nvSpPr>
-        <p:spPr>
-          <a:xfrm>
-            <a:off x="288000" y="4500000"/>
-            <a:ext cx="7632000" cy="7200"/>
+          <p:cNvPr id="6" name="sp6"/>
+          <p:cNvSpPr txBox="1"/>
+          <p:nvPr/>
+        </p:nvSpPr>
+        <p:spPr bwMode="auto">
+          <a:xfrm>
+            <a:off x="324000" y="3960000"/>
+            <a:ext cx="5760000" cy="251999"/>
+          </a:xfrm>
+          <a:prstGeom prst="rect">
+            <a:avLst/>
+          </a:prstGeom>
+          <a:noFill/>
+          <a:ln>
+            <a:noFill/>
+          </a:ln>
+        </p:spPr>
+        <p:txBody>
+          <a:bodyPr wrap="square" anchor="t">
+            <a:normAutofit/>
+          </a:bodyPr>
+          <a:lstStyle/>
+          <a:p>
+            <a:pPr algn="l"/>
+            <a:r>
+              <a:rPr lang="ru-RU" altLang="en-US" sz="900" b="1" i="0" dirty="0" smtClean="0">
+                <a:solidFill>
+                  <a:srgbClr val="00B4D8"/>
+                </a:solidFill>
+                <a:latin typeface="Calibri"/>
+              </a:rPr>
+              <a:t>ВЫПУСКНАЯ КВАЛИФИКАЦИОННАЯ РАБОТА</a:t>
+            </a:r>
+          </a:p>
+        </p:txBody>
+      </p:sp>
+      <p:sp>
+        <p:nvSpPr>
+          <p:cNvPr id="7" name="sp7"/>
+          <p:cNvSpPr txBox="1"/>
+          <p:nvPr/>
+        </p:nvSpPr>
+        <p:spPr bwMode="auto">
+          <a:xfrm>
+            <a:off x="324000" y="4266000"/>
+            <a:ext cx="7200000" cy="36000"/>
           </a:xfrm>
           <a:prstGeom prst="rect">
             <a:avLst/>
@@ -2971,60 +2875,14 @@
       </p:sp>
       <p:sp>
         <p:nvSpPr>
-          <p:cNvPr id="15" name="Label"/>
-          <p:cNvSpPr txBox="1">
-            <a:spLocks noGrp="1"/>
-          </p:cNvSpPr>
-          <p:nvPr/>
-        </p:nvSpPr>
-        <p:spPr>
-          <a:xfrm>
-            <a:off x="324000" y="4104000"/>
-            <a:ext cx="4320000" cy="216000"/>
-          </a:xfrm>
-          <a:prstGeom prst="rect">
-            <a:avLst/>
-          </a:prstGeom>
-          <a:noFill/>
-          <a:ln>
-            <a:noFill/>
-          </a:ln>
-        </p:spPr>
-        <p:txBody>
-          <a:bodyPr wrap="square" anchor="ctr">
-            <a:normAutofit/>
-          </a:bodyPr>
-          <a:lstStyle/>
-          <a:p>
-            <a:pPr algn="l">
-              <a:spcBef>
-                <a:spcPts val="0"/>
-              </a:spcBef>
-            </a:pPr>
-            <a:r>
-              <a:rPr lang="ru-RU" sz="900" b="1" i="0" dirty="0" smtClean="0">
-                <a:solidFill>
-                  <a:srgbClr val="00B4D8"/>
-                </a:solidFill>
-                <a:latin typeface="+mj-lt"/>
-              </a:rPr>
-              <a:t>ДИПЛОМНАЯ РАБОТА</a:t>
-            </a:r>
-          </a:p>
-        </p:txBody>
-      </p:sp>
-      <p:sp>
-        <p:nvSpPr>
-          <p:cNvPr id="16" name="Title"/>
-          <p:cNvSpPr txBox="1">
-            <a:spLocks noGrp="1"/>
-          </p:cNvSpPr>
-          <p:nvPr/>
-        </p:nvSpPr>
-        <p:spPr>
-          <a:xfrm>
-            <a:off x="324000" y="1080000"/>
-            <a:ext cx="7560000" cy="3240000"/>
+          <p:cNvPr id="8" name="sp8"/>
+          <p:cNvSpPr txBox="1"/>
+          <p:nvPr/>
+        </p:nvSpPr>
+        <p:spPr bwMode="auto">
+          <a:xfrm>
+            <a:off x="324000" y="900000"/>
+            <a:ext cx="7200000" cy="3240000"/>
           </a:xfrm>
           <a:prstGeom prst="rect">
             <a:avLst/>
@@ -3040,17 +2898,13 @@
           </a:bodyPr>
           <a:lstStyle/>
           <a:p>
-            <a:pPr algn="l">
-              <a:spcBef>
-                <a:spcPts val="0"/>
-              </a:spcBef>
-            </a:pPr>
-            <a:r>
-              <a:rPr lang="ru-RU" sz="3000" b="1" i="0" dirty="0" smtClean="0">
+            <a:pPr algn="l"/>
+            <a:r>
+              <a:rPr lang="ru-RU" altLang="en-US" sz="3000" b="1" i="0" dirty="0" smtClean="0">
                 <a:solidFill>
                   <a:srgbClr val="FFFFFF"/>
                 </a:solidFill>
-                <a:latin typeface="+mj-lt"/>
+                <a:latin typeface="Calibri"/>
               </a:rPr>
               <a:t>Основные выводы</a:t>
             </a:r>
@@ -3059,15 +2913,13 @@
       </p:sp>
       <p:sp>
         <p:nvSpPr>
-          <p:cNvPr id="17" name="Sub"/>
-          <p:cNvSpPr txBox="1">
-            <a:spLocks noGrp="1"/>
-          </p:cNvSpPr>
-          <p:nvPr/>
-        </p:nvSpPr>
-        <p:spPr>
-          <a:xfrm>
-            <a:off x="324000" y="4608000"/>
+          <p:cNvPr id="9" name="sp9"/>
+          <p:cNvSpPr txBox="1"/>
+          <p:nvPr/>
+        </p:nvSpPr>
+        <p:spPr bwMode="auto">
+          <a:xfrm>
+            <a:off x="324000" y="4356000"/>
             <a:ext cx="7920000" cy="1980000"/>
           </a:xfrm>
           <a:prstGeom prst="rect">
@@ -3084,19 +2936,15 @@
           </a:bodyPr>
           <a:lstStyle/>
           <a:p>
-            <a:pPr algn="l">
-              <a:spcBef>
-                <a:spcPts val="0"/>
-              </a:spcBef>
-            </a:pPr>
-            <a:r>
-              <a:rPr lang="ru-RU" sz="1300" b="0" i="0" dirty="0" smtClean="0">
+            <a:pPr algn="l"/>
+            <a:r>
+              <a:rPr lang="ru-RU" altLang="en-US" sz="1300" b="0" i="0" dirty="0" smtClean="0">
                 <a:solidFill>
                   <a:srgbClr val="90E0EF"/>
                 </a:solidFill>
-                <a:latin typeface="+mj-lt"/>
-              </a:rPr>
-              <a:t>✓ H₁ подтверждена: цифровизация значимо связана с ВВП во всех трёх группах (β=0.20–0.31)</a:t>
+                <a:latin typeface="Calibri"/>
+              </a:rPr>
+              <a:t>H1 подтверждена: цифровизация значимо связана с ВВП во всех трёх группах (b=0.20-0.31)</a:t>
             </a:r>
           </a:p>
           <a:p>
@@ -3108,19 +2956,15 @@
             <a:endParaRPr lang="ru-RU" dirty="0"/>
           </a:p>
           <a:p>
-            <a:pPr algn="l">
-              <a:spcBef>
-                <a:spcPts val="0"/>
-              </a:spcBef>
-            </a:pPr>
-            <a:r>
-              <a:rPr lang="ru-RU" sz="1300" b="0" i="0" dirty="0" smtClean="0">
+            <a:pPr algn="l"/>
+            <a:r>
+              <a:rPr lang="ru-RU" altLang="en-US" sz="1300" b="0" i="0" dirty="0" smtClean="0">
                 <a:solidFill>
                   <a:srgbClr val="90E0EF"/>
                 </a:solidFill>
-                <a:latin typeface="+mj-lt"/>
-              </a:rPr>
-              <a:t>✓ Антикризисный эффект значим только при высокой цифровой зрелости</a:t>
+                <a:latin typeface="Calibri"/>
+              </a:rPr>
+              <a:t>Антикризисный эффект значим только при высокой цифровой зрелости</a:t>
             </a:r>
           </a:p>
           <a:p>
@@ -3132,35 +2976,27 @@
             <a:endParaRPr lang="ru-RU" dirty="0"/>
           </a:p>
           <a:p>
-            <a:pPr algn="l">
-              <a:spcBef>
-                <a:spcPts val="0"/>
-              </a:spcBef>
-            </a:pPr>
-            <a:r>
-              <a:rPr lang="ru-RU" sz="1300" b="0" i="0" dirty="0" smtClean="0">
+            <a:pPr algn="l"/>
+            <a:r>
+              <a:rPr lang="ru-RU" altLang="en-US" sz="1300" b="0" i="0" dirty="0" smtClean="0">
                 <a:solidFill>
                   <a:srgbClr val="90E0EF"/>
                 </a:solidFill>
-                <a:latin typeface="+mj-lt"/>
-              </a:rPr>
-              <a:t>✓ Для Узбекистана: последовательная реализация Стратегии «Цифровой Узбекистан – 2030» —</a:t>
-            </a:r>
-          </a:p>
-          <a:p>
-            <a:pPr algn="l">
-              <a:spcBef>
-                <a:spcPts val="0"/>
-              </a:spcBef>
-            </a:pPr>
-            <a:r>
-              <a:rPr lang="ru-RU" sz="1300" b="0" i="0" dirty="0" smtClean="0">
+                <a:latin typeface="Calibri"/>
+              </a:rPr>
+              <a:t>Для Узбекистана: последовательная реализация Стратегии «Цифровой Узбекистан - 2030»</a:t>
+            </a:r>
+          </a:p>
+          <a:p>
+            <a:pPr algn="l"/>
+            <a:r>
+              <a:rPr lang="ru-RU" altLang="en-US" sz="1300" b="0" i="0" dirty="0" smtClean="0">
                 <a:solidFill>
                   <a:srgbClr val="90E0EF"/>
                 </a:solidFill>
-                <a:latin typeface="+mj-lt"/>
-              </a:rPr>
-              <a:t>   необходимое условие перехода от роста к устойчивости</a:t>
+                <a:latin typeface="Calibri"/>
+              </a:rPr>
+              <a:t>является необходимым условием перехода от роста к устойчивости</a:t>
             </a:r>
           </a:p>
           <a:p>
@@ -3172,17 +3008,13 @@
             <a:endParaRPr lang="ru-RU" dirty="0"/>
           </a:p>
           <a:p>
-            <a:pPr algn="l">
-              <a:spcBef>
-                <a:spcPts val="0"/>
-              </a:spcBef>
-            </a:pPr>
-            <a:r>
-              <a:rPr lang="ru-RU" sz="1300" b="0" i="0" dirty="0" smtClean="0">
+            <a:pPr algn="l"/>
+            <a:r>
+              <a:rPr lang="ru-RU" altLang="en-US" sz="1300" b="0" i="0" dirty="0" smtClean="0">
                 <a:solidFill>
                   <a:srgbClr val="90E0EF"/>
                 </a:solidFill>
-                <a:latin typeface="+mj-lt"/>
+                <a:latin typeface="Calibri"/>
               </a:rPr>
               <a:t>Спасибо за внимание!</a:t>
             </a:r>
@@ -3191,23 +3023,21 @@
       </p:sp>
       <p:sp>
         <p:nvSpPr>
-          <p:cNvPr id="18" name="Footer"/>
-          <p:cNvSpPr txBox="1">
-            <a:spLocks noGrp="1"/>
-          </p:cNvSpPr>
-          <p:nvPr/>
-        </p:nvSpPr>
-        <p:spPr>
-          <a:xfrm>
-            <a:off x="0" y="6462000"/>
-            <a:ext cx="12193200" cy="396000"/>
+          <p:cNvPr id="10" name="sp10"/>
+          <p:cNvSpPr txBox="1"/>
+          <p:nvPr/>
+        </p:nvSpPr>
+        <p:spPr bwMode="auto">
+          <a:xfrm>
+            <a:off x="0" y="6444001"/>
+            <a:ext cx="12192000" cy="413999"/>
           </a:xfrm>
           <a:prstGeom prst="rect">
             <a:avLst/>
           </a:prstGeom>
           <a:solidFill>
             <a:srgbClr val="1565C0">
-              <a:alpha val="80000"/>
+              <a:alpha val="90000"/>
             </a:srgbClr>
           </a:solidFill>
           <a:ln>
@@ -3222,42 +3052,36 @@
       </p:sp>
       <p:sp>
         <p:nvSpPr>
-          <p:cNvPr id="19" name="SlideNum"/>
-          <p:cNvSpPr txBox="1">
-            <a:spLocks noGrp="1"/>
-          </p:cNvSpPr>
-          <p:nvPr/>
-        </p:nvSpPr>
-        <p:spPr>
-          <a:xfrm>
-            <a:off x="10933200" y="6624000"/>
-            <a:ext cx="1152000" cy="180000"/>
-          </a:xfrm>
-          <a:prstGeom prst="rect">
-            <a:avLst/>
-          </a:prstGeom>
-          <a:noFill/>
-          <a:ln>
-            <a:noFill/>
-          </a:ln>
-        </p:spPr>
-        <p:txBody>
-          <a:bodyPr wrap="square" anchor="ctr">
-            <a:normAutofit/>
-          </a:bodyPr>
-          <a:lstStyle/>
-          <a:p>
-            <a:pPr algn="r">
-              <a:spcBef>
-                <a:spcPts val="0"/>
-              </a:spcBef>
-            </a:pPr>
-            <a:r>
-              <a:rPr lang="ru-RU" sz="900" b="0" i="0" dirty="0" smtClean="0">
-                <a:solidFill>
-                  <a:srgbClr val="90E0EF"/>
-                </a:solidFill>
-                <a:latin typeface="+mj-lt"/>
+          <p:cNvPr id="11" name="sp11"/>
+          <p:cNvSpPr txBox="1"/>
+          <p:nvPr/>
+        </p:nvSpPr>
+        <p:spPr bwMode="auto">
+          <a:xfrm>
+            <a:off x="10932000" y="6606001"/>
+            <a:ext cx="1152000" cy="198000"/>
+          </a:xfrm>
+          <a:prstGeom prst="rect">
+            <a:avLst/>
+          </a:prstGeom>
+          <a:noFill/>
+          <a:ln>
+            <a:noFill/>
+          </a:ln>
+        </p:spPr>
+        <p:txBody>
+          <a:bodyPr wrap="square" anchor="t">
+            <a:normAutofit/>
+          </a:bodyPr>
+          <a:lstStyle/>
+          <a:p>
+            <a:pPr algn="r"/>
+            <a:r>
+              <a:rPr lang="ru-RU" altLang="en-US" sz="900" b="0" i="0" dirty="0" smtClean="0">
+                <a:solidFill>
+                  <a:srgbClr val="546E7A"/>
+                </a:solidFill>
+                <a:latin typeface="Calibri"/>
               </a:rPr>
               <a:t>15 / 15</a:t>
             </a:r>
@@ -3273,7 +3097,7 @@
 </file>
 
 <file path=ppt/slides/slide2.xml><?xml version="1.0" encoding="utf-8"?>
-<p:sld xmlns:a="http://schemas.openxmlformats.org/drawingml/2006/main" xmlns:p="http://schemas.openxmlformats.org/presentationml/2006/main" xmlns:r="http://schemas.openxmlformats.org/officeDocument/2006/relationships">
+<p:sld xmlns:a="http://schemas.openxmlformats.org/drawingml/2006/main" xmlns:p="http://schemas.openxmlformats.org/presentationml/2006/main" xmlns:r="http://schemas.openxmlformats.org/officeDocument/2006/relationships" show="1">
   <p:cSld>
     <p:spTree>
       <p:nvGrpSpPr>
@@ -3284,23 +3108,21 @@
       <p:grpSpPr>
         <a:xfrm>
           <a:off x="0" y="0"/>
-          <a:ext cx="0" cy="0"/>
+          <a:ext cx="12192000" cy="6858000"/>
           <a:chOff x="0" y="0"/>
-          <a:chExt cx="0" cy="0"/>
+          <a:chExt cx="12192000" cy="6858000"/>
         </a:xfrm>
       </p:grpSpPr>
       <p:sp>
         <p:nvSpPr>
-          <p:cNvPr id="10" name="Bg"/>
-          <p:cNvSpPr txBox="1">
-            <a:spLocks noGrp="1"/>
-          </p:cNvSpPr>
-          <p:nvPr/>
-        </p:nvSpPr>
-        <p:spPr>
+          <p:cNvPr id="2" name="sp2"/>
+          <p:cNvSpPr txBox="1"/>
+          <p:nvPr/>
+        </p:nvSpPr>
+        <p:spPr bwMode="auto">
           <a:xfrm>
             <a:off x="0" y="0"/>
-            <a:ext cx="12193200" cy="6858000"/>
+            <a:ext cx="12192000" cy="6858000"/>
           </a:xfrm>
           <a:prstGeom prst="rect">
             <a:avLst/>
@@ -3320,27 +3142,29 @@
       </p:sp>
       <p:sp>
         <p:nvSpPr>
-          <p:cNvPr id="11" name="Header"/>
-          <p:cNvSpPr txBox="1">
-            <a:spLocks noGrp="1"/>
-          </p:cNvSpPr>
-          <p:nvPr/>
-        </p:nvSpPr>
-        <p:spPr>
+          <p:cNvPr id="3" name="sp3"/>
+          <p:cNvSpPr txBox="1"/>
+          <p:nvPr/>
+        </p:nvSpPr>
+        <p:spPr bwMode="auto">
           <a:xfrm>
             <a:off x="0" y="0"/>
-            <a:ext cx="12193200" cy="1188000"/>
-          </a:xfrm>
-          <a:prstGeom prst="rect">
-            <a:avLst/>
-          </a:prstGeom>
-          <a:gradFill>
+            <a:ext cx="12192000" cy="1152000"/>
+          </a:xfrm>
+          <a:prstGeom prst="rect">
+            <a:avLst/>
+          </a:prstGeom>
+          <a:gradFill rotWithShape="1">
             <a:gsLst>
               <a:gs pos="0">
-                <a:srgbClr val="0D1B2A"/>
+                <a:solidFill>
+                  <a:srgbClr val="0D1B2A"/>
+                </a:solidFill>
               </a:gs>
               <a:gs pos="100000">
-                <a:srgbClr val="1565C0"/>
+                <a:solidFill>
+                  <a:srgbClr val="1565C0"/>
+                </a:solidFill>
               </a:gs>
             </a:gsLst>
             <a:lin ang="0" scaled="0"/>
@@ -3357,16 +3181,14 @@
       </p:sp>
       <p:sp>
         <p:nvSpPr>
-          <p:cNvPr id="12" name="Line12"/>
-          <p:cNvSpPr txBox="1">
-            <a:spLocks noGrp="1"/>
-          </p:cNvSpPr>
-          <p:nvPr/>
-        </p:nvSpPr>
-        <p:spPr>
-          <a:xfrm>
-            <a:off x="0" y="1170000"/>
-            <a:ext cx="12193200" cy="7200"/>
+          <p:cNvPr id="4" name="sp4"/>
+          <p:cNvSpPr txBox="1"/>
+          <p:nvPr/>
+        </p:nvSpPr>
+        <p:spPr bwMode="auto">
+          <a:xfrm>
+            <a:off x="0" y="1134000"/>
+            <a:ext cx="12192000" cy="43200"/>
           </a:xfrm>
           <a:prstGeom prst="rect">
             <a:avLst/>
@@ -3386,27 +3208,29 @@
       </p:sp>
       <p:sp>
         <p:nvSpPr>
-          <p:cNvPr id="13" name="Vbar"/>
-          <p:cNvSpPr txBox="1">
-            <a:spLocks noGrp="1"/>
-          </p:cNvSpPr>
-          <p:nvPr/>
-        </p:nvSpPr>
-        <p:spPr>
-          <a:xfrm>
-            <a:off x="0" y="1188000"/>
-            <a:ext cx="64800" cy="5670000"/>
-          </a:xfrm>
-          <a:prstGeom prst="rect">
-            <a:avLst/>
-          </a:prstGeom>
-          <a:gradFill>
+          <p:cNvPr id="5" name="sp5"/>
+          <p:cNvSpPr txBox="1"/>
+          <p:nvPr/>
+        </p:nvSpPr>
+        <p:spPr bwMode="auto">
+          <a:xfrm>
+            <a:off x="0" y="1152000"/>
+            <a:ext cx="79200" cy="5706000"/>
+          </a:xfrm>
+          <a:prstGeom prst="rect">
+            <a:avLst/>
+          </a:prstGeom>
+          <a:gradFill rotWithShape="1">
             <a:gsLst>
               <a:gs pos="0">
-                <a:srgbClr val="00B4D8"/>
+                <a:solidFill>
+                  <a:srgbClr val="00B4D8"/>
+                </a:solidFill>
               </a:gs>
               <a:gs pos="100000">
-                <a:srgbClr val="F0F4F8"/>
+                <a:solidFill>
+                  <a:srgbClr val="F0F4F8"/>
+                </a:solidFill>
               </a:gs>
             </a:gsLst>
             <a:lin ang="5400000" scaled="0"/>
@@ -3423,16 +3247,14 @@
       </p:sp>
       <p:sp>
         <p:nvSpPr>
-          <p:cNvPr id="14" name="Title"/>
-          <p:cNvSpPr txBox="1">
-            <a:spLocks noGrp="1"/>
-          </p:cNvSpPr>
-          <p:nvPr/>
-        </p:nvSpPr>
-        <p:spPr>
-          <a:xfrm>
-            <a:off x="251999" y="72000"/>
-            <a:ext cx="11761199" cy="1080000"/>
+          <p:cNvPr id="6" name="sp6"/>
+          <p:cNvSpPr txBox="1"/>
+          <p:nvPr/>
+        </p:nvSpPr>
+        <p:spPr bwMode="auto">
+          <a:xfrm>
+            <a:off x="251999" y="54000"/>
+            <a:ext cx="11760000" cy="1062000"/>
           </a:xfrm>
           <a:prstGeom prst="rect">
             <a:avLst/>
@@ -3448,17 +3270,13 @@
           </a:bodyPr>
           <a:lstStyle/>
           <a:p>
-            <a:pPr algn="l">
-              <a:spcBef>
-                <a:spcPts val="0"/>
-              </a:spcBef>
-            </a:pPr>
-            <a:r>
-              <a:rPr lang="ru-RU" sz="2100" b="1" i="0" dirty="0" smtClean="0">
+            <a:pPr algn="l"/>
+            <a:r>
+              <a:rPr lang="ru-RU" altLang="en-US" sz="2200" b="1" i="0" dirty="0" smtClean="0">
                 <a:solidFill>
                   <a:srgbClr val="FFFFFF"/>
                 </a:solidFill>
-                <a:latin typeface="+mj-lt"/>
+                <a:latin typeface="Calibri"/>
               </a:rPr>
               <a:t>Актуальность исследования</a:t>
             </a:r>
@@ -3467,16 +3285,14 @@
       </p:sp>
       <p:sp>
         <p:nvSpPr>
-          <p:cNvPr id="15" name="Bullets"/>
-          <p:cNvSpPr txBox="1">
-            <a:spLocks noGrp="1"/>
-          </p:cNvSpPr>
-          <p:nvPr/>
-        </p:nvSpPr>
-        <p:spPr>
-          <a:xfrm>
-            <a:off x="216000" y="1260000"/>
-            <a:ext cx="11833200" cy="5454000"/>
+          <p:cNvPr id="7" name="sp7"/>
+          <p:cNvSpPr txBox="1"/>
+          <p:nvPr/>
+        </p:nvSpPr>
+        <p:spPr bwMode="auto">
+          <a:xfrm>
+            <a:off x="198000" y="1242000"/>
+            <a:ext cx="11868000" cy="5454000"/>
           </a:xfrm>
           <a:prstGeom prst="rect">
             <a:avLst/>
@@ -3491,6 +3307,18 @@
             <a:normAutofit/>
           </a:bodyPr>
           <a:lstStyle/>
+          <a:p>
+            <a:pPr algn="l"/>
+            <a:r>
+              <a:rPr lang="ru-RU" altLang="en-US" sz="1500" b="0" i="0" dirty="0" smtClean="0">
+                <a:solidFill>
+                  <a:srgbClr val="1A237E"/>
+                </a:solidFill>
+                <a:latin typeface="Calibri"/>
+              </a:rPr>
+              <a:t>▶  Три волны глобальных кризисов: 2008-2009, 2020-2021, 2022</a:t>
+            </a:r>
+          </a:p>
           <a:p>
             <a:pPr algn="l">
               <a:spcBef>
@@ -3498,27 +3326,27 @@
               </a:spcBef>
             </a:pPr>
             <a:r>
-              <a:rPr lang="ru-RU" sz="1500" b="0" i="0" dirty="0" smtClean="0">
-                <a:solidFill>
-                  <a:srgbClr val="1A237E"/>
-                </a:solidFill>
-                <a:latin typeface="+mj-lt"/>
-              </a:rPr>
-              <a:t>▶  Три волны глобальных кризисов: 2008–2009, 2020–2021, 2022 — одинаковый удар, разная реакция</a:t>
+              <a:rPr lang="ru-RU" altLang="en-US" sz="1300" b="0" i="0" dirty="0" smtClean="0">
+                <a:solidFill>
+                  <a:srgbClr val="546E7A"/>
+                </a:solidFill>
+                <a:latin typeface="Calibri"/>
+              </a:rPr>
+              <a:t>      Одинаковый внешний удар — но разная глубина спада в разных странах</a:t>
             </a:r>
           </a:p>
           <a:p>
             <a:pPr algn="l">
               <a:spcBef>
-                <a:spcPts val="600"/>
+                <a:spcPts val="700"/>
               </a:spcBef>
             </a:pPr>
             <a:r>
-              <a:rPr lang="ru-RU" sz="1500" b="0" i="0" dirty="0" smtClean="0">
+              <a:rPr lang="ru-RU" altLang="en-US" sz="1500" b="0" i="0" dirty="0" smtClean="0">
                 <a:solidFill>
                   <a:srgbClr val="1A237E"/>
                 </a:solidFill>
-                <a:latin typeface="+mj-lt"/>
+                <a:latin typeface="Calibri"/>
               </a:rPr>
               <a:t>▶  Цифровизация как структурный фактор устойчивости экономики</a:t>
             </a:r>
@@ -3526,15 +3354,15 @@
           <a:p>
             <a:pPr algn="l">
               <a:spcBef>
-                <a:spcPts val="600"/>
+                <a:spcPts val="700"/>
               </a:spcBef>
             </a:pPr>
             <a:r>
-              <a:rPr lang="ru-RU" sz="1500" b="0" i="0" dirty="0" smtClean="0">
+              <a:rPr lang="ru-RU" altLang="en-US" sz="1500" b="0" i="0" dirty="0" smtClean="0">
                 <a:solidFill>
                   <a:srgbClr val="1A237E"/>
                 </a:solidFill>
-                <a:latin typeface="+mj-lt"/>
+                <a:latin typeface="Calibri"/>
               </a:rPr>
               <a:t>▶  COVID-19: цифровая инфраструктура обеспечила непрерывность государства и бизнеса</a:t>
             </a:r>
@@ -3542,91 +3370,85 @@
           <a:p>
             <a:pPr algn="l">
               <a:spcBef>
-                <a:spcPts val="600"/>
+                <a:spcPts val="700"/>
               </a:spcBef>
             </a:pPr>
             <a:r>
-              <a:rPr lang="ru-RU" sz="1500" b="0" i="0" dirty="0" smtClean="0">
+              <a:rPr lang="ru-RU" altLang="en-US" sz="1500" b="0" i="0" dirty="0" smtClean="0">
                 <a:solidFill>
                   <a:srgbClr val="1A237E"/>
                 </a:solidFill>
-                <a:latin typeface="+mj-lt"/>
-              </a:rPr>
-              <a:t>▶  Энергетический шок 2022: выявил пределы цифровой зрелости</a:t>
+                <a:latin typeface="Calibri"/>
+              </a:rPr>
+              <a:t>▶  Энергетический шок 2022: обнажил пределы цифровой зрелости</a:t>
             </a:r>
           </a:p>
           <a:p>
             <a:pPr algn="l">
               <a:spcBef>
-                <a:spcPts val="600"/>
+                <a:spcPts val="700"/>
               </a:spcBef>
             </a:pPr>
             <a:r>
-              <a:rPr lang="ru-RU" sz="1500" b="0" i="0" dirty="0" smtClean="0">
+              <a:rPr lang="ru-RU" altLang="en-US" sz="1500" b="0" i="0" dirty="0" smtClean="0">
                 <a:solidFill>
                   <a:srgbClr val="1A237E"/>
                 </a:solidFill>
-                <a:latin typeface="+mj-lt"/>
-              </a:rPr>
-              <a:t>▶  Узбекистан реализует Стратегию «Цифровой Узбекистан – 2030»</a:t>
+                <a:latin typeface="Calibri"/>
+              </a:rPr>
+              <a:t>▶  Узбекистан реализует Стратегию «Цифровой Узбекистан - 2030»</a:t>
             </a:r>
           </a:p>
           <a:p>
             <a:pPr algn="l">
               <a:spcBef>
-                <a:spcPts val="600"/>
+                <a:spcPts val="500"/>
               </a:spcBef>
             </a:pPr>
             <a:r>
-              <a:rPr lang="ru-RU" sz="1400" b="0" i="0" dirty="0" smtClean="0">
+              <a:rPr lang="ru-RU" altLang="en-US" sz="1400" b="0" i="0" dirty="0" smtClean="0">
                 <a:solidFill>
                   <a:srgbClr val="E53935"/>
                 </a:solidFill>
-                <a:latin typeface="+mj-lt"/>
-              </a:rPr>
-              <a:t>⚠  ⚠ Вопрос: влияет ли уровень цифровизации на устойчивость? Как? Через какие каналы?</a:t>
-            </a:r>
-          </a:p>
-        </p:txBody>
-      </p:sp>
-      <p:sp>
-        <p:nvSpPr>
-          <p:cNvPr id="16" name="SlideNum"/>
-          <p:cNvSpPr txBox="1">
-            <a:spLocks noGrp="1"/>
-          </p:cNvSpPr>
-          <p:nvPr/>
-        </p:nvSpPr>
-        <p:spPr>
-          <a:xfrm>
-            <a:off x="10933200" y="6624000"/>
-            <a:ext cx="1152000" cy="180000"/>
-          </a:xfrm>
-          <a:prstGeom prst="rect">
-            <a:avLst/>
-          </a:prstGeom>
-          <a:noFill/>
-          <a:ln>
-            <a:noFill/>
-          </a:ln>
-        </p:spPr>
-        <p:txBody>
-          <a:bodyPr wrap="square" anchor="ctr">
-            <a:normAutofit/>
-          </a:bodyPr>
-          <a:lstStyle/>
-          <a:p>
-            <a:pPr algn="r">
-              <a:spcBef>
-                <a:spcPts val="0"/>
-              </a:spcBef>
-            </a:pPr>
-            <a:r>
-              <a:rPr lang="ru-RU" sz="900" b="0" i="0" dirty="0" smtClean="0">
-                <a:solidFill>
-                  <a:srgbClr val="90E0EF"/>
-                </a:solidFill>
-                <a:latin typeface="+mj-lt"/>
+                <a:latin typeface="Calibri"/>
+              </a:rPr>
+              <a:t>⚠  ⚠ Центральный вопрос: через какие каналы цифровизация влияет на устойчивость?</a:t>
+            </a:r>
+          </a:p>
+        </p:txBody>
+      </p:sp>
+      <p:sp>
+        <p:nvSpPr>
+          <p:cNvPr id="8" name="sp8"/>
+          <p:cNvSpPr txBox="1"/>
+          <p:nvPr/>
+        </p:nvSpPr>
+        <p:spPr bwMode="auto">
+          <a:xfrm>
+            <a:off x="10932000" y="6606001"/>
+            <a:ext cx="1152000" cy="198000"/>
+          </a:xfrm>
+          <a:prstGeom prst="rect">
+            <a:avLst/>
+          </a:prstGeom>
+          <a:noFill/>
+          <a:ln>
+            <a:noFill/>
+          </a:ln>
+        </p:spPr>
+        <p:txBody>
+          <a:bodyPr wrap="square" anchor="t">
+            <a:normAutofit/>
+          </a:bodyPr>
+          <a:lstStyle/>
+          <a:p>
+            <a:pPr algn="r"/>
+            <a:r>
+              <a:rPr lang="ru-RU" altLang="en-US" sz="900" b="0" i="0" dirty="0" smtClean="0">
+                <a:solidFill>
+                  <a:srgbClr val="546E7A"/>
+                </a:solidFill>
+                <a:latin typeface="Calibri"/>
               </a:rPr>
               <a:t>2 / 15</a:t>
             </a:r>
@@ -3642,7 +3464,7 @@
 </file>
 
 <file path=ppt/slides/slide3.xml><?xml version="1.0" encoding="utf-8"?>
-<p:sld xmlns:a="http://schemas.openxmlformats.org/drawingml/2006/main" xmlns:p="http://schemas.openxmlformats.org/presentationml/2006/main" xmlns:r="http://schemas.openxmlformats.org/officeDocument/2006/relationships">
+<p:sld xmlns:a="http://schemas.openxmlformats.org/drawingml/2006/main" xmlns:p="http://schemas.openxmlformats.org/presentationml/2006/main" xmlns:r="http://schemas.openxmlformats.org/officeDocument/2006/relationships" show="1">
   <p:cSld>
     <p:spTree>
       <p:nvGrpSpPr>
@@ -3653,23 +3475,21 @@
       <p:grpSpPr>
         <a:xfrm>
           <a:off x="0" y="0"/>
-          <a:ext cx="0" cy="0"/>
+          <a:ext cx="12192000" cy="6858000"/>
           <a:chOff x="0" y="0"/>
-          <a:chExt cx="0" cy="0"/>
+          <a:chExt cx="12192000" cy="6858000"/>
         </a:xfrm>
       </p:grpSpPr>
       <p:sp>
         <p:nvSpPr>
-          <p:cNvPr id="10" name="Bg"/>
-          <p:cNvSpPr txBox="1">
-            <a:spLocks noGrp="1"/>
-          </p:cNvSpPr>
-          <p:nvPr/>
-        </p:nvSpPr>
-        <p:spPr>
+          <p:cNvPr id="2" name="sp2"/>
+          <p:cNvSpPr txBox="1"/>
+          <p:nvPr/>
+        </p:nvSpPr>
+        <p:spPr bwMode="auto">
           <a:xfrm>
             <a:off x="0" y="0"/>
-            <a:ext cx="12193200" cy="6858000"/>
+            <a:ext cx="12192000" cy="6858000"/>
           </a:xfrm>
           <a:prstGeom prst="rect">
             <a:avLst/>
@@ -3689,27 +3509,29 @@
       </p:sp>
       <p:sp>
         <p:nvSpPr>
-          <p:cNvPr id="11" name="Header"/>
-          <p:cNvSpPr txBox="1">
-            <a:spLocks noGrp="1"/>
-          </p:cNvSpPr>
-          <p:nvPr/>
-        </p:nvSpPr>
-        <p:spPr>
+          <p:cNvPr id="3" name="sp3"/>
+          <p:cNvSpPr txBox="1"/>
+          <p:nvPr/>
+        </p:nvSpPr>
+        <p:spPr bwMode="auto">
           <a:xfrm>
             <a:off x="0" y="0"/>
-            <a:ext cx="12193200" cy="1188000"/>
-          </a:xfrm>
-          <a:prstGeom prst="rect">
-            <a:avLst/>
-          </a:prstGeom>
-          <a:gradFill>
+            <a:ext cx="12192000" cy="1152000"/>
+          </a:xfrm>
+          <a:prstGeom prst="rect">
+            <a:avLst/>
+          </a:prstGeom>
+          <a:gradFill rotWithShape="1">
             <a:gsLst>
               <a:gs pos="0">
-                <a:srgbClr val="0D1B2A"/>
+                <a:solidFill>
+                  <a:srgbClr val="0D1B2A"/>
+                </a:solidFill>
               </a:gs>
               <a:gs pos="100000">
-                <a:srgbClr val="1565C0"/>
+                <a:solidFill>
+                  <a:srgbClr val="1565C0"/>
+                </a:solidFill>
               </a:gs>
             </a:gsLst>
             <a:lin ang="0" scaled="0"/>
@@ -3726,16 +3548,14 @@
       </p:sp>
       <p:sp>
         <p:nvSpPr>
-          <p:cNvPr id="12" name="Line12"/>
-          <p:cNvSpPr txBox="1">
-            <a:spLocks noGrp="1"/>
-          </p:cNvSpPr>
-          <p:nvPr/>
-        </p:nvSpPr>
-        <p:spPr>
-          <a:xfrm>
-            <a:off x="0" y="1170000"/>
-            <a:ext cx="12193200" cy="7200"/>
+          <p:cNvPr id="4" name="sp4"/>
+          <p:cNvSpPr txBox="1"/>
+          <p:nvPr/>
+        </p:nvSpPr>
+        <p:spPr bwMode="auto">
+          <a:xfrm>
+            <a:off x="0" y="1134000"/>
+            <a:ext cx="12192000" cy="43200"/>
           </a:xfrm>
           <a:prstGeom prst="rect">
             <a:avLst/>
@@ -3755,16 +3575,14 @@
       </p:sp>
       <p:sp>
         <p:nvSpPr>
-          <p:cNvPr id="13" name="Title"/>
-          <p:cNvSpPr txBox="1">
-            <a:spLocks noGrp="1"/>
-          </p:cNvSpPr>
-          <p:nvPr/>
-        </p:nvSpPr>
-        <p:spPr>
-          <a:xfrm>
-            <a:off x="251999" y="72000"/>
-            <a:ext cx="11761199" cy="1080000"/>
+          <p:cNvPr id="5" name="sp5"/>
+          <p:cNvSpPr txBox="1"/>
+          <p:nvPr/>
+        </p:nvSpPr>
+        <p:spPr bwMode="auto">
+          <a:xfrm>
+            <a:off x="251999" y="54000"/>
+            <a:ext cx="11760000" cy="1062000"/>
           </a:xfrm>
           <a:prstGeom prst="rect">
             <a:avLst/>
@@ -3780,17 +3598,13 @@
           </a:bodyPr>
           <a:lstStyle/>
           <a:p>
-            <a:pPr algn="l">
-              <a:spcBef>
-                <a:spcPts val="0"/>
-              </a:spcBef>
-            </a:pPr>
-            <a:r>
-              <a:rPr lang="ru-RU" sz="2100" b="1" i="0" dirty="0" smtClean="0">
+            <a:pPr algn="l"/>
+            <a:r>
+              <a:rPr lang="ru-RU" altLang="en-US" sz="2200" b="1" i="0" dirty="0" smtClean="0">
                 <a:solidFill>
                   <a:srgbClr val="FFFFFF"/>
                 </a:solidFill>
-                <a:latin typeface="+mj-lt"/>
+                <a:latin typeface="Calibri"/>
               </a:rPr>
               <a:t>Объект, предмет и цель исследования</a:t>
             </a:r>
@@ -3799,19 +3613,19 @@
       </p:sp>
       <p:sp>
         <p:nvSpPr>
-          <p:cNvPr id="20" name="Card"/>
-          <p:cNvSpPr txBox="1">
-            <a:spLocks noGrp="1"/>
-          </p:cNvSpPr>
-          <p:nvPr/>
-        </p:nvSpPr>
-        <p:spPr>
-          <a:xfrm>
-            <a:off x="144000" y="1296000"/>
-            <a:ext cx="5436000" cy="5490000"/>
-          </a:xfrm>
-          <a:prstGeom prst="rect">
-            <a:avLst/>
+          <p:cNvPr id="6" name="sp6"/>
+          <p:cNvSpPr txBox="1"/>
+          <p:nvPr/>
+        </p:nvSpPr>
+        <p:spPr bwMode="auto">
+          <a:xfrm>
+            <a:off x="144000" y="1278000"/>
+            <a:ext cx="5436000" cy="5454000"/>
+          </a:xfrm>
+          <a:prstGeom prst="roundRect">
+            <a:avLst>
+              <a:gd name="adj" fmla="val 8000"/>
+            </a:avLst>
           </a:prstGeom>
           <a:solidFill>
             <a:srgbClr val="FFFFFF"/>
@@ -3830,27 +3644,31 @@
       </p:sp>
       <p:sp>
         <p:nvSpPr>
-          <p:cNvPr id="21" name="CardHdr"/>
-          <p:cNvSpPr txBox="1">
-            <a:spLocks noGrp="1"/>
-          </p:cNvSpPr>
-          <p:nvPr/>
-        </p:nvSpPr>
-        <p:spPr>
-          <a:xfrm>
-            <a:off x="144000" y="1296000"/>
+          <p:cNvPr id="7" name="sp7"/>
+          <p:cNvSpPr txBox="1"/>
+          <p:nvPr/>
+        </p:nvSpPr>
+        <p:spPr bwMode="auto">
+          <a:xfrm>
+            <a:off x="144000" y="1278000"/>
             <a:ext cx="5436000" cy="396000"/>
           </a:xfrm>
-          <a:prstGeom prst="rect">
-            <a:avLst/>
-          </a:prstGeom>
-          <a:gradFill>
+          <a:prstGeom prst="roundRect">
+            <a:avLst>
+              <a:gd name="adj" fmla="val 8000"/>
+            </a:avLst>
+          </a:prstGeom>
+          <a:gradFill rotWithShape="1">
             <a:gsLst>
               <a:gs pos="0">
-                <a:srgbClr val="1565C0"/>
+                <a:solidFill>
+                  <a:srgbClr val="1565C0"/>
+                </a:solidFill>
               </a:gs>
               <a:gs pos="100000">
-                <a:srgbClr val="00B4D8"/>
+                <a:solidFill>
+                  <a:srgbClr val="00B4D8"/>
+                </a:solidFill>
               </a:gs>
             </a:gsLst>
             <a:lin ang="0" scaled="0"/>
@@ -3867,15 +3685,13 @@
       </p:sp>
       <p:sp>
         <p:nvSpPr>
-          <p:cNvPr id="22" name="CardTitle"/>
-          <p:cNvSpPr txBox="1">
-            <a:spLocks noGrp="1"/>
-          </p:cNvSpPr>
-          <p:nvPr/>
-        </p:nvSpPr>
-        <p:spPr>
-          <a:xfrm>
-            <a:off x="144000" y="1296000"/>
+          <p:cNvPr id="8" name="sp8"/>
+          <p:cNvSpPr txBox="1"/>
+          <p:nvPr/>
+        </p:nvSpPr>
+        <p:spPr bwMode="auto">
+          <a:xfrm>
+            <a:off x="144000" y="1278000"/>
             <a:ext cx="5436000" cy="396000"/>
           </a:xfrm>
           <a:prstGeom prst="rect">
@@ -3892,17 +3708,13 @@
           </a:bodyPr>
           <a:lstStyle/>
           <a:p>
-            <a:pPr algn="ctr">
-              <a:spcBef>
-                <a:spcPts val="0"/>
-              </a:spcBef>
-            </a:pPr>
-            <a:r>
-              <a:rPr lang="ru-RU" sz="1400" b="1" i="0" dirty="0" smtClean="0">
+            <a:pPr algn="ctr"/>
+            <a:r>
+              <a:rPr lang="ru-RU" altLang="en-US" sz="1400" b="1" i="0" dirty="0" smtClean="0">
                 <a:solidFill>
                   <a:srgbClr val="FFFFFF"/>
                 </a:solidFill>
-                <a:latin typeface="+mj-lt"/>
+                <a:latin typeface="Calibri"/>
               </a:rPr>
               <a:t>Объект и предмет</a:t>
             </a:r>
@@ -3911,16 +3723,14 @@
       </p:sp>
       <p:sp>
         <p:nvSpPr>
-          <p:cNvPr id="23" name="CardBullets"/>
-          <p:cNvSpPr txBox="1">
-            <a:spLocks noGrp="1"/>
-          </p:cNvSpPr>
-          <p:nvPr/>
-        </p:nvSpPr>
-        <p:spPr>
-          <a:xfrm>
-            <a:off x="216000" y="1764000"/>
-            <a:ext cx="5292000" cy="4950000"/>
+          <p:cNvPr id="9" name="sp9"/>
+          <p:cNvSpPr txBox="1"/>
+          <p:nvPr/>
+        </p:nvSpPr>
+        <p:spPr bwMode="auto">
+          <a:xfrm>
+            <a:off x="234000" y="1728000"/>
+            <a:ext cx="5256000" cy="4914000"/>
           </a:xfrm>
           <a:prstGeom prst="rect">
             <a:avLst/>
@@ -3942,13 +3752,13 @@
               </a:spcBef>
             </a:pPr>
             <a:r>
-              <a:rPr lang="ru-RU" sz="1300" b="0" i="0" dirty="0" smtClean="0">
+              <a:rPr lang="ru-RU" altLang="en-US" sz="1300" b="0" i="0" dirty="0" smtClean="0">
                 <a:solidFill>
                   <a:srgbClr val="1A237E"/>
                 </a:solidFill>
-                <a:latin typeface="+mj-lt"/>
-              </a:rPr>
-              <a:t>▶  Объект: цифровая трансформация национальных экономик</a:t>
+                <a:latin typeface="Calibri"/>
+              </a:rPr>
+              <a:t>▶  Объект: процесс цифровой трансформации национальных экономик</a:t>
             </a:r>
           </a:p>
           <a:p>
@@ -3958,11 +3768,11 @@
               </a:spcBef>
             </a:pPr>
             <a:r>
-              <a:rPr lang="ru-RU" sz="1300" b="0" i="0" dirty="0" smtClean="0">
+              <a:rPr lang="ru-RU" altLang="en-US" sz="1300" b="0" i="0" dirty="0" smtClean="0">
                 <a:solidFill>
                   <a:srgbClr val="1A237E"/>
                 </a:solidFill>
-                <a:latin typeface="+mj-lt"/>
+                <a:latin typeface="Calibri"/>
               </a:rPr>
               <a:t>▶  Предмет: механизмы влияния цифровых технологий на макроэкономическую устойчивость</a:t>
             </a:r>
@@ -3974,32 +3784,32 @@
               </a:spcBef>
             </a:pPr>
             <a:r>
-              <a:rPr lang="ru-RU" sz="1300" b="0" i="0" dirty="0" smtClean="0">
+              <a:rPr lang="ru-RU" altLang="en-US" sz="1300" b="0" i="0" dirty="0" smtClean="0">
                 <a:solidFill>
                   <a:srgbClr val="1A237E"/>
                 </a:solidFill>
-                <a:latin typeface="+mj-lt"/>
-              </a:rPr>
-              <a:t>▶  Период: глобальные кризисы 2020–2022 годов</a:t>
-            </a:r>
-          </a:p>
-        </p:txBody>
-      </p:sp>
-      <p:sp>
-        <p:nvSpPr>
-          <p:cNvPr id="30" name="Card"/>
-          <p:cNvSpPr txBox="1">
-            <a:spLocks noGrp="1"/>
-          </p:cNvSpPr>
-          <p:nvPr/>
-        </p:nvSpPr>
-        <p:spPr>
-          <a:xfrm>
-            <a:off x="6263999" y="1296000"/>
-            <a:ext cx="5436000" cy="5490000"/>
-          </a:xfrm>
-          <a:prstGeom prst="rect">
-            <a:avLst/>
+                <a:latin typeface="Calibri"/>
+              </a:rPr>
+              <a:t>▶  Период: глобальные кризисы 2020-2022 годов</a:t>
+            </a:r>
+          </a:p>
+        </p:txBody>
+      </p:sp>
+      <p:sp>
+        <p:nvSpPr>
+          <p:cNvPr id="10" name="sp10"/>
+          <p:cNvSpPr txBox="1"/>
+          <p:nvPr/>
+        </p:nvSpPr>
+        <p:spPr bwMode="auto">
+          <a:xfrm>
+            <a:off x="6300000" y="1278000"/>
+            <a:ext cx="5436000" cy="5454000"/>
+          </a:xfrm>
+          <a:prstGeom prst="roundRect">
+            <a:avLst>
+              <a:gd name="adj" fmla="val 8000"/>
+            </a:avLst>
           </a:prstGeom>
           <a:solidFill>
             <a:srgbClr val="FFFFFF"/>
@@ -4018,27 +3828,31 @@
       </p:sp>
       <p:sp>
         <p:nvSpPr>
-          <p:cNvPr id="31" name="CardHdr"/>
-          <p:cNvSpPr txBox="1">
-            <a:spLocks noGrp="1"/>
-          </p:cNvSpPr>
-          <p:nvPr/>
-        </p:nvSpPr>
-        <p:spPr>
-          <a:xfrm>
-            <a:off x="6263999" y="1296000"/>
+          <p:cNvPr id="11" name="sp11"/>
+          <p:cNvSpPr txBox="1"/>
+          <p:nvPr/>
+        </p:nvSpPr>
+        <p:spPr bwMode="auto">
+          <a:xfrm>
+            <a:off x="6300000" y="1278000"/>
             <a:ext cx="5436000" cy="396000"/>
           </a:xfrm>
-          <a:prstGeom prst="rect">
-            <a:avLst/>
-          </a:prstGeom>
-          <a:gradFill>
+          <a:prstGeom prst="roundRect">
+            <a:avLst>
+              <a:gd name="adj" fmla="val 8000"/>
+            </a:avLst>
+          </a:prstGeom>
+          <a:gradFill rotWithShape="1">
             <a:gsLst>
               <a:gs pos="0">
-                <a:srgbClr val="00B4D8"/>
+                <a:solidFill>
+                  <a:srgbClr val="00B4D8"/>
+                </a:solidFill>
               </a:gs>
               <a:gs pos="100000">
-                <a:srgbClr val="1565C0"/>
+                <a:solidFill>
+                  <a:srgbClr val="1565C0"/>
+                </a:solidFill>
               </a:gs>
             </a:gsLst>
             <a:lin ang="0" scaled="0"/>
@@ -4055,15 +3869,13 @@
       </p:sp>
       <p:sp>
         <p:nvSpPr>
-          <p:cNvPr id="32" name="CardTitle"/>
-          <p:cNvSpPr txBox="1">
-            <a:spLocks noGrp="1"/>
-          </p:cNvSpPr>
-          <p:nvPr/>
-        </p:nvSpPr>
-        <p:spPr>
-          <a:xfrm>
-            <a:off x="6263999" y="1296000"/>
+          <p:cNvPr id="12" name="sp12"/>
+          <p:cNvSpPr txBox="1"/>
+          <p:nvPr/>
+        </p:nvSpPr>
+        <p:spPr bwMode="auto">
+          <a:xfrm>
+            <a:off x="6300000" y="1278000"/>
             <a:ext cx="5436000" cy="396000"/>
           </a:xfrm>
           <a:prstGeom prst="rect">
@@ -4080,17 +3892,13 @@
           </a:bodyPr>
           <a:lstStyle/>
           <a:p>
-            <a:pPr algn="ctr">
-              <a:spcBef>
-                <a:spcPts val="0"/>
-              </a:spcBef>
-            </a:pPr>
-            <a:r>
-              <a:rPr lang="ru-RU" sz="1400" b="1" i="0" dirty="0" smtClean="0">
+            <a:pPr algn="ctr"/>
+            <a:r>
+              <a:rPr lang="ru-RU" altLang="en-US" sz="1400" b="1" i="0" dirty="0" smtClean="0">
                 <a:solidFill>
                   <a:srgbClr val="FFFFFF"/>
                 </a:solidFill>
-                <a:latin typeface="+mj-lt"/>
+                <a:latin typeface="Calibri"/>
               </a:rPr>
               <a:t>Цель и задачи</a:t>
             </a:r>
@@ -4099,16 +3907,14 @@
       </p:sp>
       <p:sp>
         <p:nvSpPr>
-          <p:cNvPr id="33" name="CardBullets"/>
-          <p:cNvSpPr txBox="1">
-            <a:spLocks noGrp="1"/>
-          </p:cNvSpPr>
-          <p:nvPr/>
-        </p:nvSpPr>
-        <p:spPr>
-          <a:xfrm>
-            <a:off x="6335999" y="1764000"/>
-            <a:ext cx="5292000" cy="4950000"/>
+          <p:cNvPr id="13" name="sp13"/>
+          <p:cNvSpPr txBox="1"/>
+          <p:nvPr/>
+        </p:nvSpPr>
+        <p:spPr bwMode="auto">
+          <a:xfrm>
+            <a:off x="6390000" y="1728000"/>
+            <a:ext cx="5256000" cy="4914000"/>
           </a:xfrm>
           <a:prstGeom prst="rect">
             <a:avLst/>
@@ -4130,11 +3936,11 @@
               </a:spcBef>
             </a:pPr>
             <a:r>
-              <a:rPr lang="ru-RU" sz="1300" b="0" i="0" dirty="0" smtClean="0">
+              <a:rPr lang="ru-RU" altLang="en-US" sz="1300" b="0" i="0" dirty="0" smtClean="0">
                 <a:solidFill>
                   <a:srgbClr val="1A237E"/>
                 </a:solidFill>
-                <a:latin typeface="+mj-lt"/>
+                <a:latin typeface="Calibri"/>
               </a:rPr>
               <a:t>▶  Цель: выявить и эмпирически обосновать каналы влияния цифровизации на устойчивость</a:t>
             </a:r>
@@ -4146,11 +3952,11 @@
               </a:spcBef>
             </a:pPr>
             <a:r>
-              <a:rPr lang="ru-RU" sz="1300" b="0" i="0" dirty="0" smtClean="0">
+              <a:rPr lang="ru-RU" altLang="en-US" sz="1300" b="0" i="0" dirty="0" smtClean="0">
                 <a:solidFill>
                   <a:srgbClr val="1A237E"/>
                 </a:solidFill>
-                <a:latin typeface="+mj-lt"/>
+                <a:latin typeface="Calibri"/>
               </a:rPr>
               <a:t>▶  Систематизировать теоретические подходы</a:t>
             </a:r>
@@ -4162,11 +3968,11 @@
               </a:spcBef>
             </a:pPr>
             <a:r>
-              <a:rPr lang="ru-RU" sz="1300" b="0" i="0" dirty="0" smtClean="0">
+              <a:rPr lang="ru-RU" altLang="en-US" sz="1300" b="0" i="0" dirty="0" smtClean="0">
                 <a:solidFill>
                   <a:srgbClr val="1A237E"/>
                 </a:solidFill>
-                <a:latin typeface="+mj-lt"/>
+                <a:latin typeface="Calibri"/>
               </a:rPr>
               <a:t>▶  Сравнительный анализ 4 стран-лидеров</a:t>
             </a:r>
@@ -4178,11 +3984,11 @@
               </a:spcBef>
             </a:pPr>
             <a:r>
-              <a:rPr lang="ru-RU" sz="1300" b="0" i="0" dirty="0" smtClean="0">
+              <a:rPr lang="ru-RU" altLang="en-US" sz="1300" b="0" i="0" dirty="0" smtClean="0">
                 <a:solidFill>
                   <a:srgbClr val="1A237E"/>
                 </a:solidFill>
-                <a:latin typeface="+mj-lt"/>
+                <a:latin typeface="Calibri"/>
               </a:rPr>
               <a:t>▶  Эконометрическая оценка на 49 странах</a:t>
             </a:r>
@@ -4194,55 +4000,49 @@
               </a:spcBef>
             </a:pPr>
             <a:r>
-              <a:rPr lang="ru-RU" sz="1300" b="0" i="0" dirty="0" smtClean="0">
+              <a:rPr lang="ru-RU" altLang="en-US" sz="1300" b="0" i="0" dirty="0" smtClean="0">
                 <a:solidFill>
                   <a:srgbClr val="1A237E"/>
                 </a:solidFill>
-                <a:latin typeface="+mj-lt"/>
-              </a:rPr>
-              <a:t>▶  Рекомендации для Узбекистана</a:t>
-            </a:r>
-          </a:p>
-        </p:txBody>
-      </p:sp>
-      <p:sp>
-        <p:nvSpPr>
-          <p:cNvPr id="50" name="SlideNum"/>
-          <p:cNvSpPr txBox="1">
-            <a:spLocks noGrp="1"/>
-          </p:cNvSpPr>
-          <p:nvPr/>
-        </p:nvSpPr>
-        <p:spPr>
-          <a:xfrm>
-            <a:off x="10933200" y="6624000"/>
-            <a:ext cx="1152000" cy="180000"/>
-          </a:xfrm>
-          <a:prstGeom prst="rect">
-            <a:avLst/>
-          </a:prstGeom>
-          <a:noFill/>
-          <a:ln>
-            <a:noFill/>
-          </a:ln>
-        </p:spPr>
-        <p:txBody>
-          <a:bodyPr wrap="square" anchor="ctr">
-            <a:normAutofit/>
-          </a:bodyPr>
-          <a:lstStyle/>
-          <a:p>
-            <a:pPr algn="r">
-              <a:spcBef>
-                <a:spcPts val="0"/>
-              </a:spcBef>
-            </a:pPr>
-            <a:r>
-              <a:rPr lang="ru-RU" sz="900" b="0" i="0" dirty="0" smtClean="0">
-                <a:solidFill>
-                  <a:srgbClr val="90E0EF"/>
-                </a:solidFill>
-                <a:latin typeface="+mj-lt"/>
+                <a:latin typeface="Calibri"/>
+              </a:rPr>
+              <a:t>▶  Разработать рекомендации для Узбекистана</a:t>
+            </a:r>
+          </a:p>
+        </p:txBody>
+      </p:sp>
+      <p:sp>
+        <p:nvSpPr>
+          <p:cNvPr id="14" name="sp14"/>
+          <p:cNvSpPr txBox="1"/>
+          <p:nvPr/>
+        </p:nvSpPr>
+        <p:spPr bwMode="auto">
+          <a:xfrm>
+            <a:off x="10932000" y="6606001"/>
+            <a:ext cx="1152000" cy="198000"/>
+          </a:xfrm>
+          <a:prstGeom prst="rect">
+            <a:avLst/>
+          </a:prstGeom>
+          <a:noFill/>
+          <a:ln>
+            <a:noFill/>
+          </a:ln>
+        </p:spPr>
+        <p:txBody>
+          <a:bodyPr wrap="square" anchor="t">
+            <a:normAutofit/>
+          </a:bodyPr>
+          <a:lstStyle/>
+          <a:p>
+            <a:pPr algn="r"/>
+            <a:r>
+              <a:rPr lang="ru-RU" altLang="en-US" sz="900" b="0" i="0" dirty="0" smtClean="0">
+                <a:solidFill>
+                  <a:srgbClr val="546E7A"/>
+                </a:solidFill>
+                <a:latin typeface="Calibri"/>
               </a:rPr>
               <a:t>3 / 15</a:t>
             </a:r>
@@ -4258,7 +4058,7 @@
 </file>
 
 <file path=ppt/slides/slide4.xml><?xml version="1.0" encoding="utf-8"?>
-<p:sld xmlns:a="http://schemas.openxmlformats.org/drawingml/2006/main" xmlns:p="http://schemas.openxmlformats.org/presentationml/2006/main" xmlns:r="http://schemas.openxmlformats.org/officeDocument/2006/relationships">
+<p:sld xmlns:a="http://schemas.openxmlformats.org/drawingml/2006/main" xmlns:p="http://schemas.openxmlformats.org/presentationml/2006/main" xmlns:r="http://schemas.openxmlformats.org/officeDocument/2006/relationships" show="1">
   <p:cSld>
     <p:spTree>
       <p:nvGrpSpPr>
@@ -4269,23 +4069,21 @@
       <p:grpSpPr>
         <a:xfrm>
           <a:off x="0" y="0"/>
-          <a:ext cx="0" cy="0"/>
+          <a:ext cx="12192000" cy="6858000"/>
           <a:chOff x="0" y="0"/>
-          <a:chExt cx="0" cy="0"/>
+          <a:chExt cx="12192000" cy="6858000"/>
         </a:xfrm>
       </p:grpSpPr>
       <p:sp>
         <p:nvSpPr>
-          <p:cNvPr id="10" name="Bg"/>
-          <p:cNvSpPr txBox="1">
-            <a:spLocks noGrp="1"/>
-          </p:cNvSpPr>
-          <p:nvPr/>
-        </p:nvSpPr>
-        <p:spPr>
+          <p:cNvPr id="2" name="sp2"/>
+          <p:cNvSpPr txBox="1"/>
+          <p:nvPr/>
+        </p:nvSpPr>
+        <p:spPr bwMode="auto">
           <a:xfrm>
             <a:off x="0" y="0"/>
-            <a:ext cx="12193200" cy="6858000"/>
+            <a:ext cx="12192000" cy="6858000"/>
           </a:xfrm>
           <a:prstGeom prst="rect">
             <a:avLst/>
@@ -4305,27 +4103,29 @@
       </p:sp>
       <p:sp>
         <p:nvSpPr>
-          <p:cNvPr id="11" name="Header"/>
-          <p:cNvSpPr txBox="1">
-            <a:spLocks noGrp="1"/>
-          </p:cNvSpPr>
-          <p:nvPr/>
-        </p:nvSpPr>
-        <p:spPr>
+          <p:cNvPr id="3" name="sp3"/>
+          <p:cNvSpPr txBox="1"/>
+          <p:nvPr/>
+        </p:nvSpPr>
+        <p:spPr bwMode="auto">
           <a:xfrm>
             <a:off x="0" y="0"/>
-            <a:ext cx="12193200" cy="1188000"/>
-          </a:xfrm>
-          <a:prstGeom prst="rect">
-            <a:avLst/>
-          </a:prstGeom>
-          <a:gradFill>
+            <a:ext cx="12192000" cy="1152000"/>
+          </a:xfrm>
+          <a:prstGeom prst="rect">
+            <a:avLst/>
+          </a:prstGeom>
+          <a:gradFill rotWithShape="1">
             <a:gsLst>
               <a:gs pos="0">
-                <a:srgbClr val="0D1B2A"/>
+                <a:solidFill>
+                  <a:srgbClr val="0D1B2A"/>
+                </a:solidFill>
               </a:gs>
               <a:gs pos="100000">
-                <a:srgbClr val="1565C0"/>
+                <a:solidFill>
+                  <a:srgbClr val="1565C0"/>
+                </a:solidFill>
               </a:gs>
             </a:gsLst>
             <a:lin ang="0" scaled="0"/>
@@ -4342,16 +4142,14 @@
       </p:sp>
       <p:sp>
         <p:nvSpPr>
-          <p:cNvPr id="12" name="Line12"/>
-          <p:cNvSpPr txBox="1">
-            <a:spLocks noGrp="1"/>
-          </p:cNvSpPr>
-          <p:nvPr/>
-        </p:nvSpPr>
-        <p:spPr>
-          <a:xfrm>
-            <a:off x="0" y="1170000"/>
-            <a:ext cx="12193200" cy="7200"/>
+          <p:cNvPr id="4" name="sp4"/>
+          <p:cNvSpPr txBox="1"/>
+          <p:nvPr/>
+        </p:nvSpPr>
+        <p:spPr bwMode="auto">
+          <a:xfrm>
+            <a:off x="0" y="1134000"/>
+            <a:ext cx="12192000" cy="43200"/>
           </a:xfrm>
           <a:prstGeom prst="rect">
             <a:avLst/>
@@ -4371,27 +4169,29 @@
       </p:sp>
       <p:sp>
         <p:nvSpPr>
-          <p:cNvPr id="13" name="Vbar"/>
-          <p:cNvSpPr txBox="1">
-            <a:spLocks noGrp="1"/>
-          </p:cNvSpPr>
-          <p:nvPr/>
-        </p:nvSpPr>
-        <p:spPr>
-          <a:xfrm>
-            <a:off x="0" y="1188000"/>
-            <a:ext cx="64800" cy="5670000"/>
-          </a:xfrm>
-          <a:prstGeom prst="rect">
-            <a:avLst/>
-          </a:prstGeom>
-          <a:gradFill>
+          <p:cNvPr id="5" name="sp5"/>
+          <p:cNvSpPr txBox="1"/>
+          <p:nvPr/>
+        </p:nvSpPr>
+        <p:spPr bwMode="auto">
+          <a:xfrm>
+            <a:off x="0" y="1152000"/>
+            <a:ext cx="79200" cy="5706000"/>
+          </a:xfrm>
+          <a:prstGeom prst="rect">
+            <a:avLst/>
+          </a:prstGeom>
+          <a:gradFill rotWithShape="1">
             <a:gsLst>
               <a:gs pos="0">
-                <a:srgbClr val="00B4D8"/>
+                <a:solidFill>
+                  <a:srgbClr val="00B4D8"/>
+                </a:solidFill>
               </a:gs>
               <a:gs pos="100000">
-                <a:srgbClr val="F0F4F8"/>
+                <a:solidFill>
+                  <a:srgbClr val="F0F4F8"/>
+                </a:solidFill>
               </a:gs>
             </a:gsLst>
             <a:lin ang="5400000" scaled="0"/>
@@ -4408,16 +4208,14 @@
       </p:sp>
       <p:sp>
         <p:nvSpPr>
-          <p:cNvPr id="14" name="Title"/>
-          <p:cNvSpPr txBox="1">
-            <a:spLocks noGrp="1"/>
-          </p:cNvSpPr>
-          <p:nvPr/>
-        </p:nvSpPr>
-        <p:spPr>
-          <a:xfrm>
-            <a:off x="251999" y="72000"/>
-            <a:ext cx="11761199" cy="1080000"/>
+          <p:cNvPr id="6" name="sp6"/>
+          <p:cNvSpPr txBox="1"/>
+          <p:nvPr/>
+        </p:nvSpPr>
+        <p:spPr bwMode="auto">
+          <a:xfrm>
+            <a:off x="251999" y="54000"/>
+            <a:ext cx="11760000" cy="1062000"/>
           </a:xfrm>
           <a:prstGeom prst="rect">
             <a:avLst/>
@@ -4433,17 +4231,13 @@
           </a:bodyPr>
           <a:lstStyle/>
           <a:p>
-            <a:pPr algn="l">
-              <a:spcBef>
-                <a:spcPts val="0"/>
-              </a:spcBef>
-            </a:pPr>
-            <a:r>
-              <a:rPr lang="ru-RU" sz="2100" b="1" i="0" dirty="0" smtClean="0">
+            <a:pPr algn="l"/>
+            <a:r>
+              <a:rPr lang="ru-RU" altLang="en-US" sz="2200" b="1" i="0" dirty="0" smtClean="0">
                 <a:solidFill>
                   <a:srgbClr val="FFFFFF"/>
                 </a:solidFill>
-                <a:latin typeface="+mj-lt"/>
+                <a:latin typeface="Calibri"/>
               </a:rPr>
               <a:t>Теоретическая рамка: 5 каналов влияния цифровизации на устойчивость</a:t>
             </a:r>
@@ -4452,16 +4246,14 @@
       </p:sp>
       <p:sp>
         <p:nvSpPr>
-          <p:cNvPr id="15" name="Bullets"/>
-          <p:cNvSpPr txBox="1">
-            <a:spLocks noGrp="1"/>
-          </p:cNvSpPr>
-          <p:nvPr/>
-        </p:nvSpPr>
-        <p:spPr>
-          <a:xfrm>
-            <a:off x="216000" y="1260000"/>
-            <a:ext cx="11833200" cy="5454000"/>
+          <p:cNvPr id="7" name="sp7"/>
+          <p:cNvSpPr txBox="1"/>
+          <p:nvPr/>
+        </p:nvSpPr>
+        <p:spPr bwMode="auto">
+          <a:xfrm>
+            <a:off x="198000" y="1242000"/>
+            <a:ext cx="11868000" cy="5454000"/>
           </a:xfrm>
           <a:prstGeom prst="rect">
             <a:avLst/>
@@ -4476,6 +4268,18 @@
             <a:normAutofit/>
           </a:bodyPr>
           <a:lstStyle/>
+          <a:p>
+            <a:pPr algn="l"/>
+            <a:r>
+              <a:rPr lang="ru-RU" altLang="en-US" sz="1500" b="0" i="0" dirty="0" smtClean="0">
+                <a:solidFill>
+                  <a:srgbClr val="1A237E"/>
+                </a:solidFill>
+                <a:latin typeface="Calibri"/>
+              </a:rPr>
+              <a:t>▶  Канал 1 - Непрерывность государственных функций в условиях шоков</a:t>
+            </a:r>
+          </a:p>
           <a:p>
             <a:pPr algn="l">
               <a:spcBef>
@@ -4483,13 +4287,29 @@
               </a:spcBef>
             </a:pPr>
             <a:r>
-              <a:rPr lang="ru-RU" sz="1500" b="0" i="0" dirty="0" smtClean="0">
+              <a:rPr lang="ru-RU" altLang="en-US" sz="1300" b="0" i="0" dirty="0" smtClean="0">
+                <a:solidFill>
+                  <a:srgbClr val="546E7A"/>
+                </a:solidFill>
+                <a:latin typeface="Calibri"/>
+              </a:rPr>
+              <a:t>      e-Government, электронная идентификация, межведомственный обмен данными</a:t>
+            </a:r>
+          </a:p>
+          <a:p>
+            <a:pPr algn="l">
+              <a:spcBef>
+                <a:spcPts val="700"/>
+              </a:spcBef>
+            </a:pPr>
+            <a:r>
+              <a:rPr lang="ru-RU" altLang="en-US" sz="1500" b="0" i="0" dirty="0" smtClean="0">
                 <a:solidFill>
                   <a:srgbClr val="1A237E"/>
                 </a:solidFill>
-                <a:latin typeface="+mj-lt"/>
-              </a:rPr>
-              <a:t>▶  Канал 1 — Непрерывность государственных функций в условиях шоков</a:t>
+                <a:latin typeface="Calibri"/>
+              </a:rPr>
+              <a:t>▶  Канал 2 - Эффективность фискальной трансмиссии</a:t>
             </a:r>
           </a:p>
           <a:p>
@@ -4499,29 +4319,29 @@
               </a:spcBef>
             </a:pPr>
             <a:r>
-              <a:rPr lang="ru-RU" sz="1300" b="0" i="0" dirty="0" smtClean="0">
+              <a:rPr lang="ru-RU" altLang="en-US" sz="1300" b="0" i="0" dirty="0" smtClean="0">
                 <a:solidFill>
                   <a:srgbClr val="546E7A"/>
                 </a:solidFill>
-                <a:latin typeface="+mj-lt"/>
-              </a:rPr>
-              <a:t>     e-Government, электронная идентификация, межведомственный обмен данными</a:t>
+                <a:latin typeface="Calibri"/>
+              </a:rPr>
+              <a:t>      Цифровые платежи -&gt; адресные выплаты населению в реальном времени</a:t>
             </a:r>
           </a:p>
           <a:p>
             <a:pPr algn="l">
               <a:spcBef>
-                <a:spcPts val="600"/>
+                <a:spcPts val="700"/>
               </a:spcBef>
             </a:pPr>
             <a:r>
-              <a:rPr lang="ru-RU" sz="1500" b="0" i="0" dirty="0" smtClean="0">
+              <a:rPr lang="ru-RU" altLang="en-US" sz="1500" b="0" i="0" dirty="0" smtClean="0">
                 <a:solidFill>
                   <a:srgbClr val="1A237E"/>
                 </a:solidFill>
-                <a:latin typeface="+mj-lt"/>
-              </a:rPr>
-              <a:t>▶  Канал 2 — Эффективность фискальной трансмиссии</a:t>
+                <a:latin typeface="Calibri"/>
+              </a:rPr>
+              <a:t>▶  Канал 3 - Адаптация частного сектора через цифровые технологии</a:t>
             </a:r>
           </a:p>
           <a:p>
@@ -4531,29 +4351,45 @@
               </a:spcBef>
             </a:pPr>
             <a:r>
-              <a:rPr lang="ru-RU" sz="1300" b="0" i="0" dirty="0" smtClean="0">
+              <a:rPr lang="ru-RU" altLang="en-US" sz="1300" b="0" i="0" dirty="0" smtClean="0">
                 <a:solidFill>
                   <a:srgbClr val="546E7A"/>
                 </a:solidFill>
-                <a:latin typeface="+mj-lt"/>
-              </a:rPr>
-              <a:t>     Цифровые платёжные системы → адресные выплаты в реальном времени</a:t>
+                <a:latin typeface="Calibri"/>
+              </a:rPr>
+              <a:t>      Цифровые фирмы показывают меньшее падение выручки в кризис</a:t>
             </a:r>
           </a:p>
           <a:p>
             <a:pPr algn="l">
               <a:spcBef>
-                <a:spcPts val="600"/>
+                <a:spcPts val="700"/>
               </a:spcBef>
             </a:pPr>
             <a:r>
-              <a:rPr lang="ru-RU" sz="1500" b="0" i="0" dirty="0" smtClean="0">
+              <a:rPr lang="ru-RU" altLang="en-US" sz="1500" b="0" i="0" dirty="0" smtClean="0">
                 <a:solidFill>
                   <a:srgbClr val="1A237E"/>
                 </a:solidFill>
-                <a:latin typeface="+mj-lt"/>
-              </a:rPr>
-              <a:t>▶  Канал 3 — Адаптация частного сектора</a:t>
+                <a:latin typeface="Calibri"/>
+              </a:rPr>
+              <a:t>▶  Канал 4 - Структурный сдвиг спроса к цифровым услугам и e-commerce</a:t>
+            </a:r>
+          </a:p>
+          <a:p>
+            <a:pPr algn="l">
+              <a:spcBef>
+                <a:spcPts val="700"/>
+              </a:spcBef>
+            </a:pPr>
+            <a:r>
+              <a:rPr lang="ru-RU" altLang="en-US" sz="1500" b="0" i="0" dirty="0" smtClean="0">
+                <a:solidFill>
+                  <a:srgbClr val="1A237E"/>
+                </a:solidFill>
+                <a:latin typeface="Calibri"/>
+              </a:rPr>
+              <a:t>▶  Канал 5 - Устойчивость ИКТ-сектора как отдельного компонента ВВП</a:t>
             </a:r>
           </a:p>
           <a:p>
@@ -4563,103 +4399,49 @@
               </a:spcBef>
             </a:pPr>
             <a:r>
-              <a:rPr lang="ru-RU" sz="1300" b="0" i="0" dirty="0" smtClean="0">
+              <a:rPr lang="ru-RU" altLang="en-US" sz="1300" b="0" i="0" dirty="0" smtClean="0">
                 <a:solidFill>
                   <a:srgbClr val="546E7A"/>
                 </a:solidFill>
-                <a:latin typeface="+mj-lt"/>
-              </a:rPr>
-              <a:t>     Фирмы с высоким уровнем ИКТ показывают меньшее падение выручки в кризис</a:t>
-            </a:r>
-          </a:p>
-          <a:p>
-            <a:pPr algn="l">
-              <a:spcBef>
-                <a:spcPts val="600"/>
-              </a:spcBef>
-            </a:pPr>
-            <a:r>
-              <a:rPr lang="ru-RU" sz="1500" b="0" i="0" dirty="0" smtClean="0">
-                <a:solidFill>
-                  <a:srgbClr val="1A237E"/>
-                </a:solidFill>
-                <a:latin typeface="+mj-lt"/>
-              </a:rPr>
-              <a:t>▶  Канал 4 — Структурный сдвиг спроса к цифровым услугам и e-commerce</a:t>
-            </a:r>
-          </a:p>
-          <a:p>
-            <a:pPr algn="l">
-              <a:spcBef>
-                <a:spcPts val="600"/>
-              </a:spcBef>
-            </a:pPr>
-            <a:r>
-              <a:rPr lang="ru-RU" sz="1500" b="0" i="0" dirty="0" smtClean="0">
-                <a:solidFill>
-                  <a:srgbClr val="1A237E"/>
-                </a:solidFill>
-                <a:latin typeface="+mj-lt"/>
-              </a:rPr>
-              <a:t>▶  Канал 5 — Устойчивость ИКТ-сектора как отдельного компонента ВВП</a:t>
-            </a:r>
-          </a:p>
-          <a:p>
-            <a:pPr algn="l">
-              <a:spcBef>
-                <a:spcPts val="100"/>
-              </a:spcBef>
-            </a:pPr>
-            <a:r>
-              <a:rPr lang="ru-RU" sz="1300" b="0" i="0" dirty="0" smtClean="0">
+                <a:latin typeface="Calibri"/>
+              </a:rPr>
+              <a:t>      ИКТ-сектор ОЭСР: рост даже в кризисном 2020 году</a:t>
+            </a:r>
+          </a:p>
+        </p:txBody>
+      </p:sp>
+      <p:sp>
+        <p:nvSpPr>
+          <p:cNvPr id="8" name="sp8"/>
+          <p:cNvSpPr txBox="1"/>
+          <p:nvPr/>
+        </p:nvSpPr>
+        <p:spPr bwMode="auto">
+          <a:xfrm>
+            <a:off x="10932000" y="6606001"/>
+            <a:ext cx="1152000" cy="198000"/>
+          </a:xfrm>
+          <a:prstGeom prst="rect">
+            <a:avLst/>
+          </a:prstGeom>
+          <a:noFill/>
+          <a:ln>
+            <a:noFill/>
+          </a:ln>
+        </p:spPr>
+        <p:txBody>
+          <a:bodyPr wrap="square" anchor="t">
+            <a:normAutofit/>
+          </a:bodyPr>
+          <a:lstStyle/>
+          <a:p>
+            <a:pPr algn="r"/>
+            <a:r>
+              <a:rPr lang="ru-RU" altLang="en-US" sz="900" b="0" i="0" dirty="0" smtClean="0">
                 <a:solidFill>
                   <a:srgbClr val="546E7A"/>
                 </a:solidFill>
-                <a:latin typeface="+mj-lt"/>
-              </a:rPr>
-              <a:t>     ИКТ-сектор ОЭСР: рост даже в 2020 году (+ХХ% против спада в экономике)</a:t>
-            </a:r>
-          </a:p>
-        </p:txBody>
-      </p:sp>
-      <p:sp>
-        <p:nvSpPr>
-          <p:cNvPr id="16" name="SlideNum"/>
-          <p:cNvSpPr txBox="1">
-            <a:spLocks noGrp="1"/>
-          </p:cNvSpPr>
-          <p:nvPr/>
-        </p:nvSpPr>
-        <p:spPr>
-          <a:xfrm>
-            <a:off x="10933200" y="6624000"/>
-            <a:ext cx="1152000" cy="180000"/>
-          </a:xfrm>
-          <a:prstGeom prst="rect">
-            <a:avLst/>
-          </a:prstGeom>
-          <a:noFill/>
-          <a:ln>
-            <a:noFill/>
-          </a:ln>
-        </p:spPr>
-        <p:txBody>
-          <a:bodyPr wrap="square" anchor="ctr">
-            <a:normAutofit/>
-          </a:bodyPr>
-          <a:lstStyle/>
-          <a:p>
-            <a:pPr algn="r">
-              <a:spcBef>
-                <a:spcPts val="0"/>
-              </a:spcBef>
-            </a:pPr>
-            <a:r>
-              <a:rPr lang="ru-RU" sz="900" b="0" i="0" dirty="0" smtClean="0">
-                <a:solidFill>
-                  <a:srgbClr val="90E0EF"/>
-                </a:solidFill>
-                <a:latin typeface="+mj-lt"/>
+                <a:latin typeface="Calibri"/>
               </a:rPr>
               <a:t>4 / 15</a:t>
             </a:r>
@@ -4675,7 +4457,7 @@
 </file>
 
 <file path=ppt/slides/slide5.xml><?xml version="1.0" encoding="utf-8"?>
-<p:sld xmlns:a="http://schemas.openxmlformats.org/drawingml/2006/main" xmlns:p="http://schemas.openxmlformats.org/presentationml/2006/main" xmlns:r="http://schemas.openxmlformats.org/officeDocument/2006/relationships">
+<p:sld xmlns:a="http://schemas.openxmlformats.org/drawingml/2006/main" xmlns:p="http://schemas.openxmlformats.org/presentationml/2006/main" xmlns:r="http://schemas.openxmlformats.org/officeDocument/2006/relationships" show="1">
   <p:cSld>
     <p:spTree>
       <p:nvGrpSpPr>
@@ -4686,23 +4468,21 @@
       <p:grpSpPr>
         <a:xfrm>
           <a:off x="0" y="0"/>
-          <a:ext cx="0" cy="0"/>
+          <a:ext cx="12192000" cy="6858000"/>
           <a:chOff x="0" y="0"/>
-          <a:chExt cx="0" cy="0"/>
+          <a:chExt cx="12192000" cy="6858000"/>
         </a:xfrm>
       </p:grpSpPr>
       <p:sp>
         <p:nvSpPr>
-          <p:cNvPr id="10" name="Bg"/>
-          <p:cNvSpPr txBox="1">
-            <a:spLocks noGrp="1"/>
-          </p:cNvSpPr>
-          <p:nvPr/>
-        </p:nvSpPr>
-        <p:spPr>
+          <p:cNvPr id="2" name="sp2"/>
+          <p:cNvSpPr txBox="1"/>
+          <p:nvPr/>
+        </p:nvSpPr>
+        <p:spPr bwMode="auto">
           <a:xfrm>
             <a:off x="0" y="0"/>
-            <a:ext cx="12193200" cy="6858000"/>
+            <a:ext cx="12192000" cy="6858000"/>
           </a:xfrm>
           <a:prstGeom prst="rect">
             <a:avLst/>
@@ -4722,27 +4502,29 @@
       </p:sp>
       <p:sp>
         <p:nvSpPr>
-          <p:cNvPr id="11" name="Header"/>
-          <p:cNvSpPr txBox="1">
-            <a:spLocks noGrp="1"/>
-          </p:cNvSpPr>
-          <p:nvPr/>
-        </p:nvSpPr>
-        <p:spPr>
+          <p:cNvPr id="3" name="sp3"/>
+          <p:cNvSpPr txBox="1"/>
+          <p:nvPr/>
+        </p:nvSpPr>
+        <p:spPr bwMode="auto">
           <a:xfrm>
             <a:off x="0" y="0"/>
-            <a:ext cx="12193200" cy="1188000"/>
-          </a:xfrm>
-          <a:prstGeom prst="rect">
-            <a:avLst/>
-          </a:prstGeom>
-          <a:gradFill>
+            <a:ext cx="12192000" cy="1152000"/>
+          </a:xfrm>
+          <a:prstGeom prst="rect">
+            <a:avLst/>
+          </a:prstGeom>
+          <a:gradFill rotWithShape="1">
             <a:gsLst>
               <a:gs pos="0">
-                <a:srgbClr val="0D1B2A"/>
+                <a:solidFill>
+                  <a:srgbClr val="0D1B2A"/>
+                </a:solidFill>
               </a:gs>
               <a:gs pos="100000">
-                <a:srgbClr val="1565C0"/>
+                <a:solidFill>
+                  <a:srgbClr val="1565C0"/>
+                </a:solidFill>
               </a:gs>
             </a:gsLst>
             <a:lin ang="0" scaled="0"/>
@@ -4759,16 +4541,14 @@
       </p:sp>
       <p:sp>
         <p:nvSpPr>
-          <p:cNvPr id="12" name="Line12"/>
-          <p:cNvSpPr txBox="1">
-            <a:spLocks noGrp="1"/>
-          </p:cNvSpPr>
-          <p:nvPr/>
-        </p:nvSpPr>
-        <p:spPr>
-          <a:xfrm>
-            <a:off x="0" y="1170000"/>
-            <a:ext cx="12193200" cy="7200"/>
+          <p:cNvPr id="4" name="sp4"/>
+          <p:cNvSpPr txBox="1"/>
+          <p:nvPr/>
+        </p:nvSpPr>
+        <p:spPr bwMode="auto">
+          <a:xfrm>
+            <a:off x="0" y="1134000"/>
+            <a:ext cx="12192000" cy="43200"/>
           </a:xfrm>
           <a:prstGeom prst="rect">
             <a:avLst/>
@@ -4788,16 +4568,14 @@
       </p:sp>
       <p:sp>
         <p:nvSpPr>
-          <p:cNvPr id="13" name="Title"/>
-          <p:cNvSpPr txBox="1">
-            <a:spLocks noGrp="1"/>
-          </p:cNvSpPr>
-          <p:nvPr/>
-        </p:nvSpPr>
-        <p:spPr>
-          <a:xfrm>
-            <a:off x="251999" y="72000"/>
-            <a:ext cx="11761199" cy="1080000"/>
+          <p:cNvPr id="5" name="sp5"/>
+          <p:cNvSpPr txBox="1"/>
+          <p:nvPr/>
+        </p:nvSpPr>
+        <p:spPr bwMode="auto">
+          <a:xfrm>
+            <a:off x="251999" y="54000"/>
+            <a:ext cx="11760000" cy="1062000"/>
           </a:xfrm>
           <a:prstGeom prst="rect">
             <a:avLst/>
@@ -4813,48 +4591,46 @@
           </a:bodyPr>
           <a:lstStyle/>
           <a:p>
-            <a:pPr algn="l">
-              <a:spcBef>
-                <a:spcPts val="0"/>
-              </a:spcBef>
-            </a:pPr>
-            <a:r>
-              <a:rPr lang="ru-RU" sz="2100" b="1" i="0" dirty="0" smtClean="0">
+            <a:pPr algn="l"/>
+            <a:r>
+              <a:rPr lang="ru-RU" altLang="en-US" sz="2200" b="1" i="0" dirty="0" smtClean="0">
                 <a:solidFill>
                   <a:srgbClr val="FFFFFF"/>
                 </a:solidFill>
-                <a:latin typeface="+mj-lt"/>
-              </a:rPr>
-              <a:t>Четыре модели цифровой трансформации: ключевые показатели</a:t>
-            </a:r>
-          </a:p>
-        </p:txBody>
-      </p:sp>
-      <p:sp>
-        <p:nvSpPr>
-          <p:cNvPr id="20" name="StatCard"/>
-          <p:cNvSpPr txBox="1">
-            <a:spLocks noGrp="1"/>
-          </p:cNvSpPr>
-          <p:nvPr/>
-        </p:nvSpPr>
-        <p:spPr>
-          <a:xfrm>
-            <a:off x="144000" y="1404000"/>
-            <a:ext cx="2868300" cy="2340000"/>
+                <a:latin typeface="Calibri"/>
+              </a:rPr>
+              <a:t>Четыре модели цифровой трансформации: позиции в рейтингах 2024</a:t>
+            </a:r>
+          </a:p>
+        </p:txBody>
+      </p:sp>
+      <p:sp>
+        <p:nvSpPr>
+          <p:cNvPr id="6" name="sp6"/>
+          <p:cNvSpPr txBox="1"/>
+          <p:nvPr/>
+        </p:nvSpPr>
+        <p:spPr bwMode="auto">
+          <a:xfrm>
+            <a:off x="144000" y="1314000"/>
+            <a:ext cx="2868000" cy="5346000"/>
           </a:xfrm>
           <a:prstGeom prst="roundRect">
             <a:avLst>
               <a:gd name="adj" fmla="val 8000"/>
             </a:avLst>
           </a:prstGeom>
-          <a:gradFill>
+          <a:gradFill rotWithShape="1">
             <a:gsLst>
               <a:gs pos="0">
-                <a:srgbClr val="1565C0"/>
+                <a:solidFill>
+                  <a:srgbClr val="1565C0"/>
+                </a:solidFill>
               </a:gs>
               <a:gs pos="100000">
-                <a:srgbClr val="0D1B2A"/>
+                <a:solidFill>
+                  <a:srgbClr val="0D1B2A"/>
+                </a:solidFill>
               </a:gs>
             </a:gsLst>
             <a:lin ang="5400000" scaled="0"/>
@@ -4871,16 +4647,14 @@
       </p:sp>
       <p:sp>
         <p:nvSpPr>
-          <p:cNvPr id="30" name="Val"/>
-          <p:cNvSpPr txBox="1">
-            <a:spLocks noGrp="1"/>
-          </p:cNvSpPr>
-          <p:nvPr/>
-        </p:nvSpPr>
-        <p:spPr>
-          <a:xfrm>
-            <a:off x="144000" y="1620000"/>
-            <a:ext cx="2868300" cy="1080000"/>
+          <p:cNvPr id="7" name="sp7"/>
+          <p:cNvSpPr txBox="1"/>
+          <p:nvPr/>
+        </p:nvSpPr>
+        <p:spPr bwMode="auto">
+          <a:xfrm>
+            <a:off x="144000" y="1494000"/>
+            <a:ext cx="2868000" cy="1080000"/>
           </a:xfrm>
           <a:prstGeom prst="rect">
             <a:avLst/>
@@ -4896,35 +4670,29 @@
           </a:bodyPr>
           <a:lstStyle/>
           <a:p>
-            <a:pPr algn="ctr">
-              <a:spcBef>
-                <a:spcPts val="0"/>
-              </a:spcBef>
-            </a:pPr>
-            <a:r>
-              <a:rPr lang="ru-RU" sz="3600" b="1" i="0" dirty="0" smtClean="0">
+            <a:pPr algn="ctr"/>
+            <a:r>
+              <a:rPr lang="ru-RU" altLang="en-US" sz="3200" b="1" i="0" dirty="0" smtClean="0">
                 <a:solidFill>
                   <a:srgbClr val="FFC300"/>
                 </a:solidFill>
-                <a:latin typeface="+mj-lt"/>
-              </a:rPr>
-              <a:t>🇪🇪 #3</a:t>
-            </a:r>
-          </a:p>
-        </p:txBody>
-      </p:sp>
-      <p:sp>
-        <p:nvSpPr>
-          <p:cNvPr id="40" name="Label"/>
-          <p:cNvSpPr txBox="1">
-            <a:spLocks noGrp="1"/>
-          </p:cNvSpPr>
-          <p:nvPr/>
-        </p:nvSpPr>
-        <p:spPr>
-          <a:xfrm>
-            <a:off x="198000" y="2664000"/>
-            <a:ext cx="2760300" cy="1080000"/>
+                <a:latin typeface="Calibri"/>
+              </a:rPr>
+              <a:t>#3 EGDI</a:t>
+            </a:r>
+          </a:p>
+        </p:txBody>
+      </p:sp>
+      <p:sp>
+        <p:nvSpPr>
+          <p:cNvPr id="8" name="sp8"/>
+          <p:cNvSpPr txBox="1"/>
+          <p:nvPr/>
+        </p:nvSpPr>
+        <p:spPr bwMode="auto">
+          <a:xfrm>
+            <a:off x="198000" y="2502000"/>
+            <a:ext cx="2760000" cy="4050000"/>
           </a:xfrm>
           <a:prstGeom prst="rect">
             <a:avLst/>
@@ -4940,80 +4708,70 @@
           </a:bodyPr>
           <a:lstStyle/>
           <a:p>
-            <a:pPr algn="ctr">
-              <a:spcBef>
-                <a:spcPts val="0"/>
-              </a:spcBef>
-            </a:pPr>
-            <a:r>
-              <a:rPr lang="ru-RU" sz="1100" b="0" i="0" dirty="0" smtClean="0">
+            <a:pPr algn="ctr"/>
+            <a:r>
+              <a:rPr lang="ru-RU" altLang="en-US" sz="1100" b="0" i="0" dirty="0" smtClean="0">
                 <a:solidFill>
                   <a:srgbClr val="FFFFFF"/>
                 </a:solidFill>
-                <a:latin typeface="+mj-lt"/>
+                <a:latin typeface="Calibri"/>
               </a:rPr>
               <a:t>Эстония</a:t>
             </a:r>
           </a:p>
           <a:p>
-            <a:pPr algn="ctr">
-              <a:spcBef>
-                <a:spcPts val="0"/>
-              </a:spcBef>
-            </a:pPr>
-            <a:r>
-              <a:rPr lang="ru-RU" sz="1100" b="0" i="0" dirty="0" smtClean="0">
+            <a:pPr algn="ctr"/>
+            <a:r>
+              <a:rPr lang="ru-RU" altLang="en-US" sz="1100" b="0" i="0" dirty="0" smtClean="0">
                 <a:solidFill>
                   <a:srgbClr val="FFFFFF"/>
                 </a:solidFill>
-                <a:latin typeface="+mj-lt"/>
-              </a:rPr>
-              <a:t>EGDI ООН 2024</a:t>
-            </a:r>
-          </a:p>
-          <a:p>
-            <a:pPr algn="ctr">
-              <a:spcBef>
-                <a:spcPts val="0"/>
-              </a:spcBef>
-            </a:pPr>
-            <a:r>
-              <a:rPr lang="ru-RU" sz="1100" b="0" i="0" dirty="0" smtClean="0">
+                <a:latin typeface="Calibri"/>
+              </a:rPr>
+              <a:t>X-Road</a:t>
+            </a:r>
+          </a:p>
+          <a:p>
+            <a:pPr algn="ctr"/>
+            <a:r>
+              <a:rPr lang="ru-RU" altLang="en-US" sz="1100" b="0" i="0" dirty="0" smtClean="0">
                 <a:solidFill>
                   <a:srgbClr val="FFFFFF"/>
                 </a:solidFill>
-                <a:latin typeface="+mj-lt"/>
-              </a:rPr>
-              <a:t>X-Road, e-Residency</a:t>
-            </a:r>
-          </a:p>
-        </p:txBody>
-      </p:sp>
-      <p:sp>
-        <p:nvSpPr>
-          <p:cNvPr id="21" name="StatCard"/>
-          <p:cNvSpPr txBox="1">
-            <a:spLocks noGrp="1"/>
-          </p:cNvSpPr>
-          <p:nvPr/>
-        </p:nvSpPr>
-        <p:spPr>
-          <a:xfrm>
-            <a:off x="3156300" y="1404000"/>
-            <a:ext cx="2868300" cy="2340000"/>
+                <a:latin typeface="Calibri"/>
+              </a:rPr>
+              <a:t>e-Residency</a:t>
+            </a:r>
+          </a:p>
+        </p:txBody>
+      </p:sp>
+      <p:sp>
+        <p:nvSpPr>
+          <p:cNvPr id="9" name="sp9"/>
+          <p:cNvSpPr txBox="1"/>
+          <p:nvPr/>
+        </p:nvSpPr>
+        <p:spPr bwMode="auto">
+          <a:xfrm>
+            <a:off x="3156000" y="1314000"/>
+            <a:ext cx="2868000" cy="5346000"/>
           </a:xfrm>
           <a:prstGeom prst="roundRect">
             <a:avLst>
               <a:gd name="adj" fmla="val 8000"/>
             </a:avLst>
           </a:prstGeom>
-          <a:gradFill>
+          <a:gradFill rotWithShape="1">
             <a:gsLst>
               <a:gs pos="0">
-                <a:srgbClr val="0D1B2A"/>
+                <a:solidFill>
+                  <a:srgbClr val="0D1B2A"/>
+                </a:solidFill>
               </a:gs>
               <a:gs pos="100000">
-                <a:srgbClr val="1565C0"/>
+                <a:solidFill>
+                  <a:srgbClr val="1565C0"/>
+                </a:solidFill>
               </a:gs>
             </a:gsLst>
             <a:lin ang="5400000" scaled="0"/>
@@ -5030,16 +4788,14 @@
       </p:sp>
       <p:sp>
         <p:nvSpPr>
-          <p:cNvPr id="31" name="Val"/>
-          <p:cNvSpPr txBox="1">
-            <a:spLocks noGrp="1"/>
-          </p:cNvSpPr>
-          <p:nvPr/>
-        </p:nvSpPr>
-        <p:spPr>
-          <a:xfrm>
-            <a:off x="3156300" y="1620000"/>
-            <a:ext cx="2868300" cy="1080000"/>
+          <p:cNvPr id="10" name="sp10"/>
+          <p:cNvSpPr txBox="1"/>
+          <p:nvPr/>
+        </p:nvSpPr>
+        <p:spPr bwMode="auto">
+          <a:xfrm>
+            <a:off x="3156000" y="1494000"/>
+            <a:ext cx="2868000" cy="1080000"/>
           </a:xfrm>
           <a:prstGeom prst="rect">
             <a:avLst/>
@@ -5055,35 +4811,29 @@
           </a:bodyPr>
           <a:lstStyle/>
           <a:p>
-            <a:pPr algn="ctr">
-              <a:spcBef>
-                <a:spcPts val="0"/>
-              </a:spcBef>
-            </a:pPr>
-            <a:r>
-              <a:rPr lang="ru-RU" sz="3600" b="1" i="0" dirty="0" smtClean="0">
+            <a:pPr algn="ctr"/>
+            <a:r>
+              <a:rPr lang="ru-RU" altLang="en-US" sz="3200" b="1" i="0" dirty="0" smtClean="0">
                 <a:solidFill>
                   <a:srgbClr val="FFC300"/>
                 </a:solidFill>
-                <a:latin typeface="+mj-lt"/>
-              </a:rPr>
-              <a:t>🇰🇷 #2</a:t>
-            </a:r>
-          </a:p>
-        </p:txBody>
-      </p:sp>
-      <p:sp>
-        <p:nvSpPr>
-          <p:cNvPr id="41" name="Label"/>
-          <p:cNvSpPr txBox="1">
-            <a:spLocks noGrp="1"/>
-          </p:cNvSpPr>
-          <p:nvPr/>
-        </p:nvSpPr>
-        <p:spPr>
-          <a:xfrm>
-            <a:off x="3210300" y="2664000"/>
-            <a:ext cx="2760300" cy="1080000"/>
+                <a:latin typeface="Calibri"/>
+              </a:rPr>
+              <a:t>#2 NRI</a:t>
+            </a:r>
+          </a:p>
+        </p:txBody>
+      </p:sp>
+      <p:sp>
+        <p:nvSpPr>
+          <p:cNvPr id="11" name="sp11"/>
+          <p:cNvSpPr txBox="1"/>
+          <p:nvPr/>
+        </p:nvSpPr>
+        <p:spPr bwMode="auto">
+          <a:xfrm>
+            <a:off x="3210000" y="2502000"/>
+            <a:ext cx="2760000" cy="4050000"/>
           </a:xfrm>
           <a:prstGeom prst="rect">
             <a:avLst/>
@@ -5099,49 +4849,37 @@
           </a:bodyPr>
           <a:lstStyle/>
           <a:p>
-            <a:pPr algn="ctr">
-              <a:spcBef>
-                <a:spcPts val="0"/>
-              </a:spcBef>
-            </a:pPr>
-            <a:r>
-              <a:rPr lang="ru-RU" sz="1100" b="0" i="0" dirty="0" smtClean="0">
+            <a:pPr algn="ctr"/>
+            <a:r>
+              <a:rPr lang="ru-RU" altLang="en-US" sz="1100" b="0" i="0" dirty="0" smtClean="0">
                 <a:solidFill>
                   <a:srgbClr val="FFFFFF"/>
                 </a:solidFill>
-                <a:latin typeface="+mj-lt"/>
-              </a:rPr>
-              <a:t>Республика Корея</a:t>
-            </a:r>
-          </a:p>
-          <a:p>
-            <a:pPr algn="ctr">
-              <a:spcBef>
-                <a:spcPts val="0"/>
-              </a:spcBef>
-            </a:pPr>
-            <a:r>
-              <a:rPr lang="ru-RU" sz="1100" b="0" i="0" dirty="0" smtClean="0">
+                <a:latin typeface="Calibri"/>
+              </a:rPr>
+              <a:t>Республика</a:t>
+            </a:r>
+          </a:p>
+          <a:p>
+            <a:pPr algn="ctr"/>
+            <a:r>
+              <a:rPr lang="ru-RU" altLang="en-US" sz="1100" b="0" i="0" dirty="0" smtClean="0">
                 <a:solidFill>
                   <a:srgbClr val="FFFFFF"/>
                 </a:solidFill>
-                <a:latin typeface="+mj-lt"/>
-              </a:rPr>
-              <a:t>NRI 2024</a:t>
-            </a:r>
-          </a:p>
-          <a:p>
-            <a:pPr algn="ctr">
-              <a:spcBef>
-                <a:spcPts val="0"/>
-              </a:spcBef>
-            </a:pPr>
-            <a:r>
-              <a:rPr lang="ru-RU" sz="1100" b="0" i="0" dirty="0" smtClean="0">
+                <a:latin typeface="Calibri"/>
+              </a:rPr>
+              <a:t>Корея</a:t>
+            </a:r>
+          </a:p>
+          <a:p>
+            <a:pPr algn="ctr"/>
+            <a:r>
+              <a:rPr lang="ru-RU" altLang="en-US" sz="1100" b="0" i="0" dirty="0" smtClean="0">
                 <a:solidFill>
                   <a:srgbClr val="FFFFFF"/>
                 </a:solidFill>
-                <a:latin typeface="+mj-lt"/>
+                <a:latin typeface="Calibri"/>
               </a:rPr>
               <a:t>Digital New Deal</a:t>
             </a:r>
@@ -5150,29 +4888,31 @@
       </p:sp>
       <p:sp>
         <p:nvSpPr>
-          <p:cNvPr id="22" name="StatCard"/>
-          <p:cNvSpPr txBox="1">
-            <a:spLocks noGrp="1"/>
-          </p:cNvSpPr>
-          <p:nvPr/>
-        </p:nvSpPr>
-        <p:spPr>
-          <a:xfrm>
-            <a:off x="6168599" y="1404000"/>
-            <a:ext cx="2868300" cy="2340000"/>
+          <p:cNvPr id="12" name="sp12"/>
+          <p:cNvSpPr txBox="1"/>
+          <p:nvPr/>
+        </p:nvSpPr>
+        <p:spPr bwMode="auto">
+          <a:xfrm>
+            <a:off x="6168000" y="1314000"/>
+            <a:ext cx="2868000" cy="5346000"/>
           </a:xfrm>
           <a:prstGeom prst="roundRect">
             <a:avLst>
               <a:gd name="adj" fmla="val 8000"/>
             </a:avLst>
           </a:prstGeom>
-          <a:gradFill>
+          <a:gradFill rotWithShape="1">
             <a:gsLst>
               <a:gs pos="0">
-                <a:srgbClr val="1565C0"/>
+                <a:solidFill>
+                  <a:srgbClr val="0E4D92"/>
+                </a:solidFill>
               </a:gs>
               <a:gs pos="100000">
-                <a:srgbClr val="0D1B2A"/>
+                <a:solidFill>
+                  <a:srgbClr val="1565C0"/>
+                </a:solidFill>
               </a:gs>
             </a:gsLst>
             <a:lin ang="5400000" scaled="0"/>
@@ -5189,16 +4929,14 @@
       </p:sp>
       <p:sp>
         <p:nvSpPr>
-          <p:cNvPr id="32" name="Val"/>
-          <p:cNvSpPr txBox="1">
-            <a:spLocks noGrp="1"/>
-          </p:cNvSpPr>
-          <p:nvPr/>
-        </p:nvSpPr>
-        <p:spPr>
-          <a:xfrm>
-            <a:off x="6168599" y="1620000"/>
-            <a:ext cx="2868300" cy="1080000"/>
+          <p:cNvPr id="13" name="sp13"/>
+          <p:cNvSpPr txBox="1"/>
+          <p:nvPr/>
+        </p:nvSpPr>
+        <p:spPr bwMode="auto">
+          <a:xfrm>
+            <a:off x="6168000" y="1494000"/>
+            <a:ext cx="2868000" cy="1080000"/>
           </a:xfrm>
           <a:prstGeom prst="rect">
             <a:avLst/>
@@ -5214,35 +4952,29 @@
           </a:bodyPr>
           <a:lstStyle/>
           <a:p>
-            <a:pPr algn="ctr">
-              <a:spcBef>
-                <a:spcPts val="0"/>
-              </a:spcBef>
-            </a:pPr>
-            <a:r>
-              <a:rPr lang="ru-RU" sz="3600" b="1" i="0" dirty="0" smtClean="0">
+            <a:pPr algn="ctr"/>
+            <a:r>
+              <a:rPr lang="ru-RU" altLang="en-US" sz="3200" b="1" i="0" dirty="0" smtClean="0">
                 <a:solidFill>
                   <a:srgbClr val="FFC300"/>
                 </a:solidFill>
-                <a:latin typeface="+mj-lt"/>
-              </a:rPr>
-              <a:t>🇸🇬 #1</a:t>
-            </a:r>
-          </a:p>
-        </p:txBody>
-      </p:sp>
-      <p:sp>
-        <p:nvSpPr>
-          <p:cNvPr id="42" name="Label"/>
-          <p:cNvSpPr txBox="1">
-            <a:spLocks noGrp="1"/>
-          </p:cNvSpPr>
-          <p:nvPr/>
-        </p:nvSpPr>
-        <p:spPr>
-          <a:xfrm>
-            <a:off x="6222599" y="2664000"/>
-            <a:ext cx="2760300" cy="1080000"/>
+                <a:latin typeface="Calibri"/>
+              </a:rPr>
+              <a:t>#1 IMD</a:t>
+            </a:r>
+          </a:p>
+        </p:txBody>
+      </p:sp>
+      <p:sp>
+        <p:nvSpPr>
+          <p:cNvPr id="14" name="sp14"/>
+          <p:cNvSpPr txBox="1"/>
+          <p:nvPr/>
+        </p:nvSpPr>
+        <p:spPr bwMode="auto">
+          <a:xfrm>
+            <a:off x="6222000" y="2502000"/>
+            <a:ext cx="2760000" cy="4050000"/>
           </a:xfrm>
           <a:prstGeom prst="rect">
             <a:avLst/>
@@ -5258,80 +4990,70 @@
           </a:bodyPr>
           <a:lstStyle/>
           <a:p>
-            <a:pPr algn="ctr">
-              <a:spcBef>
-                <a:spcPts val="0"/>
-              </a:spcBef>
-            </a:pPr>
-            <a:r>
-              <a:rPr lang="ru-RU" sz="1100" b="0" i="0" dirty="0" smtClean="0">
+            <a:pPr algn="ctr"/>
+            <a:r>
+              <a:rPr lang="ru-RU" altLang="en-US" sz="1100" b="0" i="0" dirty="0" smtClean="0">
                 <a:solidFill>
                   <a:srgbClr val="FFFFFF"/>
                 </a:solidFill>
-                <a:latin typeface="+mj-lt"/>
+                <a:latin typeface="Calibri"/>
               </a:rPr>
               <a:t>Сингапур</a:t>
             </a:r>
           </a:p>
           <a:p>
-            <a:pPr algn="ctr">
-              <a:spcBef>
-                <a:spcPts val="0"/>
-              </a:spcBef>
-            </a:pPr>
-            <a:r>
-              <a:rPr lang="ru-RU" sz="1100" b="0" i="0" dirty="0" smtClean="0">
+            <a:pPr algn="ctr"/>
+            <a:r>
+              <a:rPr lang="ru-RU" altLang="en-US" sz="1100" b="0" i="0" dirty="0" smtClean="0">
                 <a:solidFill>
                   <a:srgbClr val="FFFFFF"/>
                 </a:solidFill>
-                <a:latin typeface="+mj-lt"/>
-              </a:rPr>
-              <a:t>IMD WDCR 2024</a:t>
-            </a:r>
-          </a:p>
-          <a:p>
-            <a:pPr algn="ctr">
-              <a:spcBef>
-                <a:spcPts val="0"/>
-              </a:spcBef>
-            </a:pPr>
-            <a:r>
-              <a:rPr lang="ru-RU" sz="1100" b="0" i="0" dirty="0" smtClean="0">
+                <a:latin typeface="Calibri"/>
+              </a:rPr>
+              <a:t>Smart Nation 2.0</a:t>
+            </a:r>
+          </a:p>
+          <a:p>
+            <a:pPr algn="ctr"/>
+            <a:r>
+              <a:rPr lang="ru-RU" altLang="en-US" sz="1100" b="0" i="0" dirty="0" smtClean="0">
                 <a:solidFill>
                   <a:srgbClr val="FFFFFF"/>
                 </a:solidFill>
-                <a:latin typeface="+mj-lt"/>
-              </a:rPr>
-              <a:t>Smart Nation 2.0</a:t>
-            </a:r>
-          </a:p>
-        </p:txBody>
-      </p:sp>
-      <p:sp>
-        <p:nvSpPr>
-          <p:cNvPr id="23" name="StatCard"/>
-          <p:cNvSpPr txBox="1">
-            <a:spLocks noGrp="1"/>
-          </p:cNvSpPr>
-          <p:nvPr/>
-        </p:nvSpPr>
-        <p:spPr>
-          <a:xfrm>
-            <a:off x="9180900" y="1404000"/>
-            <a:ext cx="2868300" cy="2340000"/>
+                <a:latin typeface="Calibri"/>
+              </a:rPr>
+              <a:t>ЦЭ = 17.3% ВВП</a:t>
+            </a:r>
+          </a:p>
+        </p:txBody>
+      </p:sp>
+      <p:sp>
+        <p:nvSpPr>
+          <p:cNvPr id="15" name="sp15"/>
+          <p:cNvSpPr txBox="1"/>
+          <p:nvPr/>
+        </p:nvSpPr>
+        <p:spPr bwMode="auto">
+          <a:xfrm>
+            <a:off x="9180000" y="1314000"/>
+            <a:ext cx="2868000" cy="5346000"/>
           </a:xfrm>
           <a:prstGeom prst="roundRect">
             <a:avLst>
               <a:gd name="adj" fmla="val 8000"/>
             </a:avLst>
           </a:prstGeom>
-          <a:gradFill>
+          <a:gradFill rotWithShape="1">
             <a:gsLst>
               <a:gs pos="0">
-                <a:srgbClr val="0D1B2A"/>
+                <a:solidFill>
+                  <a:srgbClr val="1565C0"/>
+                </a:solidFill>
               </a:gs>
               <a:gs pos="100000">
-                <a:srgbClr val="1565C0"/>
+                <a:solidFill>
+                  <a:srgbClr val="0E4D92"/>
+                </a:solidFill>
               </a:gs>
             </a:gsLst>
             <a:lin ang="5400000" scaled="0"/>
@@ -5348,16 +5070,14 @@
       </p:sp>
       <p:sp>
         <p:nvSpPr>
-          <p:cNvPr id="33" name="Val"/>
-          <p:cNvSpPr txBox="1">
-            <a:spLocks noGrp="1"/>
-          </p:cNvSpPr>
-          <p:nvPr/>
-        </p:nvSpPr>
-        <p:spPr>
-          <a:xfrm>
-            <a:off x="9180900" y="1620000"/>
-            <a:ext cx="2868300" cy="1080000"/>
+          <p:cNvPr id="16" name="sp16"/>
+          <p:cNvSpPr txBox="1"/>
+          <p:nvPr/>
+        </p:nvSpPr>
+        <p:spPr bwMode="auto">
+          <a:xfrm>
+            <a:off x="9180000" y="1494000"/>
+            <a:ext cx="2868000" cy="1080000"/>
           </a:xfrm>
           <a:prstGeom prst="rect">
             <a:avLst/>
@@ -5373,35 +5093,29 @@
           </a:bodyPr>
           <a:lstStyle/>
           <a:p>
-            <a:pPr algn="ctr">
-              <a:spcBef>
-                <a:spcPts val="0"/>
-              </a:spcBef>
-            </a:pPr>
-            <a:r>
-              <a:rPr lang="ru-RU" sz="3600" b="1" i="0" dirty="0" smtClean="0">
+            <a:pPr algn="ctr"/>
+            <a:r>
+              <a:rPr lang="ru-RU" altLang="en-US" sz="3200" b="1" i="0" dirty="0" smtClean="0">
                 <a:solidFill>
                   <a:srgbClr val="FFC300"/>
                 </a:solidFill>
-                <a:latin typeface="+mj-lt"/>
-              </a:rPr>
-              <a:t>🇵🇱 #24</a:t>
-            </a:r>
-          </a:p>
-        </p:txBody>
-      </p:sp>
-      <p:sp>
-        <p:nvSpPr>
-          <p:cNvPr id="43" name="Label"/>
-          <p:cNvSpPr txBox="1">
-            <a:spLocks noGrp="1"/>
-          </p:cNvSpPr>
-          <p:nvPr/>
-        </p:nvSpPr>
-        <p:spPr>
-          <a:xfrm>
-            <a:off x="9234899" y="2664000"/>
-            <a:ext cx="2760300" cy="1080000"/>
+                <a:latin typeface="Calibri"/>
+              </a:rPr>
+              <a:t>#24 DESI</a:t>
+            </a:r>
+          </a:p>
+        </p:txBody>
+      </p:sp>
+      <p:sp>
+        <p:nvSpPr>
+          <p:cNvPr id="17" name="sp17"/>
+          <p:cNvSpPr txBox="1"/>
+          <p:nvPr/>
+        </p:nvSpPr>
+        <p:spPr bwMode="auto">
+          <a:xfrm>
+            <a:off x="9234000" y="2502000"/>
+            <a:ext cx="2760000" cy="4050000"/>
           </a:xfrm>
           <a:prstGeom prst="rect">
             <a:avLst/>
@@ -5417,137 +5131,113 @@
           </a:bodyPr>
           <a:lstStyle/>
           <a:p>
-            <a:pPr algn="ctr">
-              <a:spcBef>
-                <a:spcPts val="0"/>
-              </a:spcBef>
-            </a:pPr>
-            <a:r>
-              <a:rPr lang="ru-RU" sz="1100" b="0" i="0" dirty="0" smtClean="0">
+            <a:pPr algn="ctr"/>
+            <a:r>
+              <a:rPr lang="ru-RU" altLang="en-US" sz="1100" b="0" i="0" dirty="0" smtClean="0">
                 <a:solidFill>
                   <a:srgbClr val="FFFFFF"/>
                 </a:solidFill>
-                <a:latin typeface="+mj-lt"/>
+                <a:latin typeface="Calibri"/>
               </a:rPr>
               <a:t>Польша</a:t>
             </a:r>
           </a:p>
           <a:p>
-            <a:pPr algn="ctr">
-              <a:spcBef>
-                <a:spcPts val="0"/>
-              </a:spcBef>
-            </a:pPr>
-            <a:r>
-              <a:rPr lang="ru-RU" sz="1100" b="0" i="0" dirty="0" smtClean="0">
+            <a:pPr algn="ctr"/>
+            <a:r>
+              <a:rPr lang="ru-RU" altLang="en-US" sz="1100" b="0" i="0" dirty="0" smtClean="0">
                 <a:solidFill>
                   <a:srgbClr val="FFFFFF"/>
                 </a:solidFill>
-                <a:latin typeface="+mj-lt"/>
-              </a:rPr>
-              <a:t>DESI 2024</a:t>
-            </a:r>
-          </a:p>
-          <a:p>
-            <a:pPr algn="ctr">
-              <a:spcBef>
-                <a:spcPts val="0"/>
-              </a:spcBef>
-            </a:pPr>
-            <a:r>
-              <a:rPr lang="ru-RU" sz="1100" b="0" i="0" dirty="0" smtClean="0">
+                <a:latin typeface="Calibri"/>
+              </a:rPr>
+              <a:t>Догоняющая</a:t>
+            </a:r>
+          </a:p>
+          <a:p>
+            <a:pPr algn="ctr"/>
+            <a:r>
+              <a:rPr lang="ru-RU" altLang="en-US" sz="1100" b="0" i="0" dirty="0" smtClean="0">
                 <a:solidFill>
                   <a:srgbClr val="FFFFFF"/>
                 </a:solidFill>
-                <a:latin typeface="+mj-lt"/>
-              </a:rPr>
-              <a:t>Догоняющая модель</a:t>
-            </a:r>
-          </a:p>
-        </p:txBody>
-      </p:sp>
-      <p:sp>
-        <p:nvSpPr>
-          <p:cNvPr id="60" name="Src"/>
-          <p:cNvSpPr txBox="1">
-            <a:spLocks noGrp="1"/>
-          </p:cNvSpPr>
-          <p:nvPr/>
-        </p:nvSpPr>
-        <p:spPr>
-          <a:xfrm>
-            <a:off x="180000" y="6570000"/>
-            <a:ext cx="11833200" cy="216000"/>
-          </a:xfrm>
-          <a:prstGeom prst="rect">
-            <a:avLst/>
-          </a:prstGeom>
-          <a:noFill/>
-          <a:ln>
-            <a:noFill/>
-          </a:ln>
-        </p:spPr>
-        <p:txBody>
-          <a:bodyPr wrap="square" anchor="ctr">
-            <a:normAutofit/>
-          </a:bodyPr>
-          <a:lstStyle/>
-          <a:p>
-            <a:pPr algn="r">
-              <a:spcBef>
-                <a:spcPts val="0"/>
-              </a:spcBef>
-            </a:pPr>
-            <a:r>
-              <a:rPr lang="ru-RU" sz="900" b="0" i="1" dirty="0" smtClean="0">
+                <a:latin typeface="Calibri"/>
+              </a:rPr>
+              <a:t>модель</a:t>
+            </a:r>
+          </a:p>
+        </p:txBody>
+      </p:sp>
+      <p:sp>
+        <p:nvSpPr>
+          <p:cNvPr id="18" name="sp18"/>
+          <p:cNvSpPr txBox="1"/>
+          <p:nvPr/>
+        </p:nvSpPr>
+        <p:spPr bwMode="auto">
+          <a:xfrm>
+            <a:off x="180000" y="6624000"/>
+            <a:ext cx="11832000" cy="180000"/>
+          </a:xfrm>
+          <a:prstGeom prst="rect">
+            <a:avLst/>
+          </a:prstGeom>
+          <a:noFill/>
+          <a:ln>
+            <a:noFill/>
+          </a:ln>
+        </p:spPr>
+        <p:txBody>
+          <a:bodyPr wrap="square" anchor="t">
+            <a:normAutofit/>
+          </a:bodyPr>
+          <a:lstStyle/>
+          <a:p>
+            <a:pPr algn="r"/>
+            <a:r>
+              <a:rPr lang="ru-RU" altLang="en-US" sz="800" b="0" i="1" dirty="0" smtClean="0">
                 <a:solidFill>
                   <a:srgbClr val="546E7A"/>
                 </a:solidFill>
-                <a:latin typeface="+mj-lt"/>
-              </a:rPr>
-              <a:t>Источник: UN DESA EGDI 2024; NRI 2024; IMD WDCR 2024; EC Digital Decade 2024</a:t>
-            </a:r>
-          </a:p>
-        </p:txBody>
-      </p:sp>
-      <p:sp>
-        <p:nvSpPr>
-          <p:cNvPr id="61" name="SlideNum"/>
-          <p:cNvSpPr txBox="1">
-            <a:spLocks noGrp="1"/>
-          </p:cNvSpPr>
-          <p:nvPr/>
-        </p:nvSpPr>
-        <p:spPr>
-          <a:xfrm>
-            <a:off x="10933200" y="6624000"/>
-            <a:ext cx="1152000" cy="180000"/>
-          </a:xfrm>
-          <a:prstGeom prst="rect">
-            <a:avLst/>
-          </a:prstGeom>
-          <a:noFill/>
-          <a:ln>
-            <a:noFill/>
-          </a:ln>
-        </p:spPr>
-        <p:txBody>
-          <a:bodyPr wrap="square" anchor="ctr">
-            <a:normAutofit/>
-          </a:bodyPr>
-          <a:lstStyle/>
-          <a:p>
-            <a:pPr algn="r">
-              <a:spcBef>
-                <a:spcPts val="0"/>
-              </a:spcBef>
-            </a:pPr>
-            <a:r>
-              <a:rPr lang="ru-RU" sz="900" b="0" i="0" dirty="0" smtClean="0">
-                <a:solidFill>
-                  <a:srgbClr val="90E0EF"/>
-                </a:solidFill>
-                <a:latin typeface="+mj-lt"/>
+                <a:latin typeface="Calibri"/>
+              </a:rPr>
+              <a:t>Источники: UN DESA EGDI 2024; NRI 2024; IMD WDCR 2024; EC Digital Decade 2024</a:t>
+            </a:r>
+          </a:p>
+        </p:txBody>
+      </p:sp>
+      <p:sp>
+        <p:nvSpPr>
+          <p:cNvPr id="19" name="sp19"/>
+          <p:cNvSpPr txBox="1"/>
+          <p:nvPr/>
+        </p:nvSpPr>
+        <p:spPr bwMode="auto">
+          <a:xfrm>
+            <a:off x="10932000" y="6606001"/>
+            <a:ext cx="1152000" cy="198000"/>
+          </a:xfrm>
+          <a:prstGeom prst="rect">
+            <a:avLst/>
+          </a:prstGeom>
+          <a:noFill/>
+          <a:ln>
+            <a:noFill/>
+          </a:ln>
+        </p:spPr>
+        <p:txBody>
+          <a:bodyPr wrap="square" anchor="t">
+            <a:normAutofit/>
+          </a:bodyPr>
+          <a:lstStyle/>
+          <a:p>
+            <a:pPr algn="r"/>
+            <a:r>
+              <a:rPr lang="ru-RU" altLang="en-US" sz="900" b="0" i="0" dirty="0" smtClean="0">
+                <a:solidFill>
+                  <a:srgbClr val="546E7A"/>
+                </a:solidFill>
+                <a:latin typeface="Calibri"/>
               </a:rPr>
               <a:t>5 / 15</a:t>
             </a:r>
@@ -5563,7 +5253,7 @@
 </file>
 
 <file path=ppt/slides/slide6.xml><?xml version="1.0" encoding="utf-8"?>
-<p:sld xmlns:a="http://schemas.openxmlformats.org/drawingml/2006/main" xmlns:p="http://schemas.openxmlformats.org/presentationml/2006/main" xmlns:r="http://schemas.openxmlformats.org/officeDocument/2006/relationships">
+<p:sld xmlns:a="http://schemas.openxmlformats.org/drawingml/2006/main" xmlns:p="http://schemas.openxmlformats.org/presentationml/2006/main" xmlns:r="http://schemas.openxmlformats.org/officeDocument/2006/relationships" show="1">
   <p:cSld>
     <p:spTree>
       <p:nvGrpSpPr>
@@ -5574,23 +5264,21 @@
       <p:grpSpPr>
         <a:xfrm>
           <a:off x="0" y="0"/>
-          <a:ext cx="0" cy="0"/>
+          <a:ext cx="12192000" cy="6858000"/>
           <a:chOff x="0" y="0"/>
-          <a:chExt cx="0" cy="0"/>
+          <a:chExt cx="12192000" cy="6858000"/>
         </a:xfrm>
       </p:grpSpPr>
       <p:sp>
         <p:nvSpPr>
-          <p:cNvPr id="10" name="Bg"/>
-          <p:cNvSpPr txBox="1">
-            <a:spLocks noGrp="1"/>
-          </p:cNvSpPr>
-          <p:nvPr/>
-        </p:nvSpPr>
-        <p:spPr>
+          <p:cNvPr id="2" name="sp2"/>
+          <p:cNvSpPr txBox="1"/>
+          <p:nvPr/>
+        </p:nvSpPr>
+        <p:spPr bwMode="auto">
           <a:xfrm>
             <a:off x="0" y="0"/>
-            <a:ext cx="12193200" cy="6858000"/>
+            <a:ext cx="12192000" cy="6858000"/>
           </a:xfrm>
           <a:prstGeom prst="rect">
             <a:avLst/>
@@ -5610,27 +5298,29 @@
       </p:sp>
       <p:sp>
         <p:nvSpPr>
-          <p:cNvPr id="11" name="Header"/>
-          <p:cNvSpPr txBox="1">
-            <a:spLocks noGrp="1"/>
-          </p:cNvSpPr>
-          <p:nvPr/>
-        </p:nvSpPr>
-        <p:spPr>
+          <p:cNvPr id="3" name="sp3"/>
+          <p:cNvSpPr txBox="1"/>
+          <p:nvPr/>
+        </p:nvSpPr>
+        <p:spPr bwMode="auto">
           <a:xfrm>
             <a:off x="0" y="0"/>
-            <a:ext cx="12193200" cy="1188000"/>
-          </a:xfrm>
-          <a:prstGeom prst="rect">
-            <a:avLst/>
-          </a:prstGeom>
-          <a:gradFill>
+            <a:ext cx="12192000" cy="1152000"/>
+          </a:xfrm>
+          <a:prstGeom prst="rect">
+            <a:avLst/>
+          </a:prstGeom>
+          <a:gradFill rotWithShape="1">
             <a:gsLst>
               <a:gs pos="0">
-                <a:srgbClr val="0D1B2A"/>
+                <a:solidFill>
+                  <a:srgbClr val="0D1B2A"/>
+                </a:solidFill>
               </a:gs>
               <a:gs pos="100000">
-                <a:srgbClr val="1565C0"/>
+                <a:solidFill>
+                  <a:srgbClr val="1565C0"/>
+                </a:solidFill>
               </a:gs>
             </a:gsLst>
             <a:lin ang="0" scaled="0"/>
@@ -5647,16 +5337,14 @@
       </p:sp>
       <p:sp>
         <p:nvSpPr>
-          <p:cNvPr id="12" name="Line12"/>
-          <p:cNvSpPr txBox="1">
-            <a:spLocks noGrp="1"/>
-          </p:cNvSpPr>
-          <p:nvPr/>
-        </p:nvSpPr>
-        <p:spPr>
-          <a:xfrm>
-            <a:off x="0" y="1170000"/>
-            <a:ext cx="12193200" cy="7200"/>
+          <p:cNvPr id="4" name="sp4"/>
+          <p:cNvSpPr txBox="1"/>
+          <p:nvPr/>
+        </p:nvSpPr>
+        <p:spPr bwMode="auto">
+          <a:xfrm>
+            <a:off x="0" y="1134000"/>
+            <a:ext cx="12192000" cy="43200"/>
           </a:xfrm>
           <a:prstGeom prst="rect">
             <a:avLst/>
@@ -5676,16 +5364,14 @@
       </p:sp>
       <p:sp>
         <p:nvSpPr>
-          <p:cNvPr id="13" name="Title"/>
-          <p:cNvSpPr txBox="1">
-            <a:spLocks noGrp="1"/>
-          </p:cNvSpPr>
-          <p:nvPr/>
-        </p:nvSpPr>
-        <p:spPr>
-          <a:xfrm>
-            <a:off x="251999" y="72000"/>
-            <a:ext cx="11761199" cy="1080000"/>
+          <p:cNvPr id="5" name="sp5"/>
+          <p:cNvSpPr txBox="1"/>
+          <p:nvPr/>
+        </p:nvSpPr>
+        <p:spPr bwMode="auto">
+          <a:xfrm>
+            <a:off x="251999" y="54000"/>
+            <a:ext cx="11760000" cy="1062000"/>
           </a:xfrm>
           <a:prstGeom prst="rect">
             <a:avLst/>
@@ -5701,48 +5387,46 @@
           </a:bodyPr>
           <a:lstStyle/>
           <a:p>
-            <a:pPr algn="l">
-              <a:spcBef>
-                <a:spcPts val="0"/>
-              </a:spcBef>
-            </a:pPr>
-            <a:r>
-              <a:rPr lang="ru-RU" sz="2100" b="1" i="0" dirty="0" smtClean="0">
+            <a:pPr algn="l"/>
+            <a:r>
+              <a:rPr lang="ru-RU" altLang="en-US" sz="2200" b="1" i="0" dirty="0" smtClean="0">
                 <a:solidFill>
                   <a:srgbClr val="FFFFFF"/>
                 </a:solidFill>
-                <a:latin typeface="+mj-lt"/>
-              </a:rPr>
-              <a:t>Реакция экономик на пандемийный шок 2020 года (% изменения ВВП)</a:t>
-            </a:r>
-          </a:p>
-        </p:txBody>
-      </p:sp>
-      <p:sp>
-        <p:nvSpPr>
-          <p:cNvPr id="20" name="StatCard"/>
-          <p:cNvSpPr txBox="1">
-            <a:spLocks noGrp="1"/>
-          </p:cNvSpPr>
-          <p:nvPr/>
-        </p:nvSpPr>
-        <p:spPr>
-          <a:xfrm>
-            <a:off x="144000" y="1404000"/>
-            <a:ext cx="2265840" cy="2340000"/>
+                <a:latin typeface="Calibri"/>
+              </a:rPr>
+              <a:t>Реакция экономик на COVID-шок 2020 года (% изменения реального ВВП)</a:t>
+            </a:r>
+          </a:p>
+        </p:txBody>
+      </p:sp>
+      <p:sp>
+        <p:nvSpPr>
+          <p:cNvPr id="6" name="sp6"/>
+          <p:cNvSpPr txBox="1"/>
+          <p:nvPr/>
+        </p:nvSpPr>
+        <p:spPr bwMode="auto">
+          <a:xfrm>
+            <a:off x="144000" y="1314000"/>
+            <a:ext cx="2265600" cy="5346000"/>
           </a:xfrm>
           <a:prstGeom prst="roundRect">
             <a:avLst>
               <a:gd name="adj" fmla="val 8000"/>
             </a:avLst>
           </a:prstGeom>
-          <a:gradFill>
+          <a:gradFill rotWithShape="1">
             <a:gsLst>
               <a:gs pos="0">
-                <a:srgbClr val="1565C0"/>
+                <a:solidFill>
+                  <a:srgbClr val="1565C0"/>
+                </a:solidFill>
               </a:gs>
               <a:gs pos="100000">
-                <a:srgbClr val="0D1B2A"/>
+                <a:solidFill>
+                  <a:srgbClr val="0D1B2A"/>
+                </a:solidFill>
               </a:gs>
             </a:gsLst>
             <a:lin ang="5400000" scaled="0"/>
@@ -5759,16 +5443,14 @@
       </p:sp>
       <p:sp>
         <p:nvSpPr>
-          <p:cNvPr id="30" name="Val"/>
-          <p:cNvSpPr txBox="1">
-            <a:spLocks noGrp="1"/>
-          </p:cNvSpPr>
-          <p:nvPr/>
-        </p:nvSpPr>
-        <p:spPr>
-          <a:xfrm>
-            <a:off x="144000" y="1620000"/>
-            <a:ext cx="2265840" cy="1080000"/>
+          <p:cNvPr id="7" name="sp7"/>
+          <p:cNvSpPr txBox="1"/>
+          <p:nvPr/>
+        </p:nvSpPr>
+        <p:spPr bwMode="auto">
+          <a:xfrm>
+            <a:off x="144000" y="1494000"/>
+            <a:ext cx="2265600" cy="1080000"/>
           </a:xfrm>
           <a:prstGeom prst="rect">
             <a:avLst/>
@@ -5784,35 +5466,29 @@
           </a:bodyPr>
           <a:lstStyle/>
           <a:p>
-            <a:pPr algn="ctr">
-              <a:spcBef>
-                <a:spcPts val="0"/>
-              </a:spcBef>
-            </a:pPr>
-            <a:r>
-              <a:rPr lang="ru-RU" sz="3600" b="1" i="0" dirty="0" smtClean="0">
+            <a:pPr algn="ctr"/>
+            <a:r>
+              <a:rPr lang="ru-RU" altLang="en-US" sz="3200" b="1" i="0" dirty="0" smtClean="0">
                 <a:solidFill>
                   <a:srgbClr val="FFC300"/>
                 </a:solidFill>
-                <a:latin typeface="+mj-lt"/>
-              </a:rPr>
-              <a:t>−0.7%</a:t>
-            </a:r>
-          </a:p>
-        </p:txBody>
-      </p:sp>
-      <p:sp>
-        <p:nvSpPr>
-          <p:cNvPr id="40" name="Label"/>
-          <p:cNvSpPr txBox="1">
-            <a:spLocks noGrp="1"/>
-          </p:cNvSpPr>
-          <p:nvPr/>
-        </p:nvSpPr>
-        <p:spPr>
-          <a:xfrm>
-            <a:off x="198000" y="2664000"/>
-            <a:ext cx="2157840" cy="1080000"/>
+                <a:latin typeface="Calibri"/>
+              </a:rPr>
+              <a:t>-0.7%</a:t>
+            </a:r>
+          </a:p>
+        </p:txBody>
+      </p:sp>
+      <p:sp>
+        <p:nvSpPr>
+          <p:cNvPr id="8" name="sp8"/>
+          <p:cNvSpPr txBox="1"/>
+          <p:nvPr/>
+        </p:nvSpPr>
+        <p:spPr bwMode="auto">
+          <a:xfrm>
+            <a:off x="198000" y="2502000"/>
+            <a:ext cx="2157600" cy="4050000"/>
           </a:xfrm>
           <a:prstGeom prst="rect">
             <a:avLst/>
@@ -5828,64 +5504,70 @@
           </a:bodyPr>
           <a:lstStyle/>
           <a:p>
-            <a:pPr algn="ctr">
-              <a:spcBef>
-                <a:spcPts val="0"/>
-              </a:spcBef>
-            </a:pPr>
-            <a:r>
-              <a:rPr lang="ru-RU" sz="1100" b="0" i="0" dirty="0" smtClean="0">
+            <a:pPr algn="ctr"/>
+            <a:r>
+              <a:rPr lang="ru-RU" altLang="en-US" sz="1100" b="0" i="0" dirty="0" smtClean="0">
                 <a:solidFill>
                   <a:srgbClr val="FFFFFF"/>
                 </a:solidFill>
-                <a:latin typeface="+mj-lt"/>
+                <a:latin typeface="Calibri"/>
               </a:rPr>
               <a:t>Республика Корея</a:t>
             </a:r>
           </a:p>
           <a:p>
-            <a:pPr algn="ctr">
-              <a:spcBef>
-                <a:spcPts val="0"/>
-              </a:spcBef>
-            </a:pPr>
-            <a:r>
-              <a:rPr lang="ru-RU" sz="1100" b="0" i="0" dirty="0" smtClean="0">
+            <a:pPr algn="ctr"/>
+            <a:r>
+              <a:rPr lang="ru-RU" altLang="en-US" sz="1100" b="0" i="0" dirty="0" smtClean="0">
                 <a:solidFill>
                   <a:srgbClr val="FFFFFF"/>
                 </a:solidFill>
-                <a:latin typeface="+mj-lt"/>
-              </a:rPr>
-              <a:t>Лучший результат</a:t>
-            </a:r>
-          </a:p>
-        </p:txBody>
-      </p:sp>
-      <p:sp>
-        <p:nvSpPr>
-          <p:cNvPr id="21" name="StatCard"/>
-          <p:cNvSpPr txBox="1">
-            <a:spLocks noGrp="1"/>
-          </p:cNvSpPr>
-          <p:nvPr/>
-        </p:nvSpPr>
-        <p:spPr>
-          <a:xfrm>
-            <a:off x="2553840" y="1404000"/>
-            <a:ext cx="2265840" cy="2340000"/>
+                <a:latin typeface="Calibri"/>
+              </a:rPr>
+              <a:t>Лучший</a:t>
+            </a:r>
+          </a:p>
+          <a:p>
+            <a:pPr algn="ctr"/>
+            <a:r>
+              <a:rPr lang="ru-RU" altLang="en-US" sz="1100" b="0" i="0" dirty="0" smtClean="0">
+                <a:solidFill>
+                  <a:srgbClr val="FFFFFF"/>
+                </a:solidFill>
+                <a:latin typeface="Calibri"/>
+              </a:rPr>
+              <a:t>результат</a:t>
+            </a:r>
+          </a:p>
+        </p:txBody>
+      </p:sp>
+      <p:sp>
+        <p:nvSpPr>
+          <p:cNvPr id="9" name="sp9"/>
+          <p:cNvSpPr txBox="1"/>
+          <p:nvPr/>
+        </p:nvSpPr>
+        <p:spPr bwMode="auto">
+          <a:xfrm>
+            <a:off x="2553600" y="1314000"/>
+            <a:ext cx="2265600" cy="5346000"/>
           </a:xfrm>
           <a:prstGeom prst="roundRect">
             <a:avLst>
               <a:gd name="adj" fmla="val 8000"/>
             </a:avLst>
           </a:prstGeom>
-          <a:gradFill>
+          <a:gradFill rotWithShape="1">
             <a:gsLst>
               <a:gs pos="0">
-                <a:srgbClr val="0D1B2A"/>
+                <a:solidFill>
+                  <a:srgbClr val="0D1B2A"/>
+                </a:solidFill>
               </a:gs>
               <a:gs pos="100000">
-                <a:srgbClr val="1565C0"/>
+                <a:solidFill>
+                  <a:srgbClr val="1565C0"/>
+                </a:solidFill>
               </a:gs>
             </a:gsLst>
             <a:lin ang="5400000" scaled="0"/>
@@ -5902,16 +5584,14 @@
       </p:sp>
       <p:sp>
         <p:nvSpPr>
-          <p:cNvPr id="31" name="Val"/>
-          <p:cNvSpPr txBox="1">
-            <a:spLocks noGrp="1"/>
-          </p:cNvSpPr>
-          <p:nvPr/>
-        </p:nvSpPr>
-        <p:spPr>
-          <a:xfrm>
-            <a:off x="2553840" y="1620000"/>
-            <a:ext cx="2265840" cy="1080000"/>
+          <p:cNvPr id="10" name="sp10"/>
+          <p:cNvSpPr txBox="1"/>
+          <p:nvPr/>
+        </p:nvSpPr>
+        <p:spPr bwMode="auto">
+          <a:xfrm>
+            <a:off x="2553600" y="1494000"/>
+            <a:ext cx="2265600" cy="1080000"/>
           </a:xfrm>
           <a:prstGeom prst="rect">
             <a:avLst/>
@@ -5927,35 +5607,29 @@
           </a:bodyPr>
           <a:lstStyle/>
           <a:p>
-            <a:pPr algn="ctr">
-              <a:spcBef>
-                <a:spcPts val="0"/>
-              </a:spcBef>
-            </a:pPr>
-            <a:r>
-              <a:rPr lang="ru-RU" sz="3600" b="1" i="0" dirty="0" smtClean="0">
+            <a:pPr algn="ctr"/>
+            <a:r>
+              <a:rPr lang="ru-RU" altLang="en-US" sz="3200" b="1" i="0" dirty="0" smtClean="0">
                 <a:solidFill>
                   <a:srgbClr val="FFC300"/>
                 </a:solidFill>
-                <a:latin typeface="+mj-lt"/>
-              </a:rPr>
-              <a:t>−2.0%</a:t>
-            </a:r>
-          </a:p>
-        </p:txBody>
-      </p:sp>
-      <p:sp>
-        <p:nvSpPr>
-          <p:cNvPr id="41" name="Label"/>
-          <p:cNvSpPr txBox="1">
-            <a:spLocks noGrp="1"/>
-          </p:cNvSpPr>
-          <p:nvPr/>
-        </p:nvSpPr>
-        <p:spPr>
-          <a:xfrm>
-            <a:off x="2607840" y="2664000"/>
-            <a:ext cx="2157840" cy="1080000"/>
+                <a:latin typeface="Calibri"/>
+              </a:rPr>
+              <a:t>-2.0%</a:t>
+            </a:r>
+          </a:p>
+        </p:txBody>
+      </p:sp>
+      <p:sp>
+        <p:nvSpPr>
+          <p:cNvPr id="11" name="sp11"/>
+          <p:cNvSpPr txBox="1"/>
+          <p:nvPr/>
+        </p:nvSpPr>
+        <p:spPr bwMode="auto">
+          <a:xfrm>
+            <a:off x="2607600" y="2502000"/>
+            <a:ext cx="2157600" cy="4050000"/>
           </a:xfrm>
           <a:prstGeom prst="rect">
             <a:avLst/>
@@ -5971,64 +5645,70 @@
           </a:bodyPr>
           <a:lstStyle/>
           <a:p>
-            <a:pPr algn="ctr">
-              <a:spcBef>
-                <a:spcPts val="0"/>
-              </a:spcBef>
-            </a:pPr>
-            <a:r>
-              <a:rPr lang="ru-RU" sz="1100" b="0" i="0" dirty="0" smtClean="0">
+            <a:pPr algn="ctr"/>
+            <a:r>
+              <a:rPr lang="ru-RU" altLang="en-US" sz="1100" b="0" i="0" dirty="0" smtClean="0">
                 <a:solidFill>
                   <a:srgbClr val="FFFFFF"/>
                 </a:solidFill>
-                <a:latin typeface="+mj-lt"/>
+                <a:latin typeface="Calibri"/>
               </a:rPr>
               <a:t>Польша</a:t>
             </a:r>
           </a:p>
           <a:p>
-            <a:pPr algn="ctr">
-              <a:spcBef>
-                <a:spcPts val="0"/>
-              </a:spcBef>
-            </a:pPr>
-            <a:r>
-              <a:rPr lang="ru-RU" sz="1100" b="0" i="0" dirty="0" smtClean="0">
+            <a:pPr algn="ctr"/>
+            <a:r>
+              <a:rPr lang="ru-RU" altLang="en-US" sz="1100" b="0" i="0" dirty="0" smtClean="0">
                 <a:solidFill>
                   <a:srgbClr val="FFFFFF"/>
                 </a:solidFill>
-                <a:latin typeface="+mj-lt"/>
-              </a:rPr>
-              <a:t>Мягкое падение</a:t>
-            </a:r>
-          </a:p>
-        </p:txBody>
-      </p:sp>
-      <p:sp>
-        <p:nvSpPr>
-          <p:cNvPr id="22" name="StatCard"/>
-          <p:cNvSpPr txBox="1">
-            <a:spLocks noGrp="1"/>
-          </p:cNvSpPr>
-          <p:nvPr/>
-        </p:nvSpPr>
-        <p:spPr>
-          <a:xfrm>
-            <a:off x="4963680" y="1404000"/>
-            <a:ext cx="2265840" cy="2340000"/>
+                <a:latin typeface="Calibri"/>
+              </a:rPr>
+              <a:t>Мягкое</a:t>
+            </a:r>
+          </a:p>
+          <a:p>
+            <a:pPr algn="ctr"/>
+            <a:r>
+              <a:rPr lang="ru-RU" altLang="en-US" sz="1100" b="0" i="0" dirty="0" smtClean="0">
+                <a:solidFill>
+                  <a:srgbClr val="FFFFFF"/>
+                </a:solidFill>
+                <a:latin typeface="Calibri"/>
+              </a:rPr>
+              <a:t>падение</a:t>
+            </a:r>
+          </a:p>
+        </p:txBody>
+      </p:sp>
+      <p:sp>
+        <p:nvSpPr>
+          <p:cNvPr id="12" name="sp12"/>
+          <p:cNvSpPr txBox="1"/>
+          <p:nvPr/>
+        </p:nvSpPr>
+        <p:spPr bwMode="auto">
+          <a:xfrm>
+            <a:off x="4963200" y="1314000"/>
+            <a:ext cx="2265600" cy="5346000"/>
           </a:xfrm>
           <a:prstGeom prst="roundRect">
             <a:avLst>
               <a:gd name="adj" fmla="val 8000"/>
             </a:avLst>
           </a:prstGeom>
-          <a:gradFill>
+          <a:gradFill rotWithShape="1">
             <a:gsLst>
               <a:gs pos="0">
-                <a:srgbClr val="1565C0"/>
+                <a:solidFill>
+                  <a:srgbClr val="0E4D92"/>
+                </a:solidFill>
               </a:gs>
               <a:gs pos="100000">
-                <a:srgbClr val="0D1B2A"/>
+                <a:solidFill>
+                  <a:srgbClr val="1565C0"/>
+                </a:solidFill>
               </a:gs>
             </a:gsLst>
             <a:lin ang="5400000" scaled="0"/>
@@ -6045,16 +5725,14 @@
       </p:sp>
       <p:sp>
         <p:nvSpPr>
-          <p:cNvPr id="32" name="Val"/>
-          <p:cNvSpPr txBox="1">
-            <a:spLocks noGrp="1"/>
-          </p:cNvSpPr>
-          <p:nvPr/>
-        </p:nvSpPr>
-        <p:spPr>
-          <a:xfrm>
-            <a:off x="4963680" y="1620000"/>
-            <a:ext cx="2265840" cy="1080000"/>
+          <p:cNvPr id="13" name="sp13"/>
+          <p:cNvSpPr txBox="1"/>
+          <p:nvPr/>
+        </p:nvSpPr>
+        <p:spPr bwMode="auto">
+          <a:xfrm>
+            <a:off x="4963200" y="1494000"/>
+            <a:ext cx="2265600" cy="1080000"/>
           </a:xfrm>
           <a:prstGeom prst="rect">
             <a:avLst/>
@@ -6070,35 +5748,29 @@
           </a:bodyPr>
           <a:lstStyle/>
           <a:p>
-            <a:pPr algn="ctr">
-              <a:spcBef>
-                <a:spcPts val="0"/>
-              </a:spcBef>
-            </a:pPr>
-            <a:r>
-              <a:rPr lang="ru-RU" sz="3600" b="1" i="0" dirty="0" smtClean="0">
+            <a:pPr algn="ctr"/>
+            <a:r>
+              <a:rPr lang="ru-RU" altLang="en-US" sz="3200" b="1" i="0" dirty="0" smtClean="0">
                 <a:solidFill>
                   <a:srgbClr val="FFC300"/>
                 </a:solidFill>
-                <a:latin typeface="+mj-lt"/>
-              </a:rPr>
-              <a:t>−3.0%</a:t>
-            </a:r>
-          </a:p>
-        </p:txBody>
-      </p:sp>
-      <p:sp>
-        <p:nvSpPr>
-          <p:cNvPr id="42" name="Label"/>
-          <p:cNvSpPr txBox="1">
-            <a:spLocks noGrp="1"/>
-          </p:cNvSpPr>
-          <p:nvPr/>
-        </p:nvSpPr>
-        <p:spPr>
-          <a:xfrm>
-            <a:off x="5017680" y="2664000"/>
-            <a:ext cx="2157840" cy="1080000"/>
+                <a:latin typeface="Calibri"/>
+              </a:rPr>
+              <a:t>-3.0%</a:t>
+            </a:r>
+          </a:p>
+        </p:txBody>
+      </p:sp>
+      <p:sp>
+        <p:nvSpPr>
+          <p:cNvPr id="14" name="sp14"/>
+          <p:cNvSpPr txBox="1"/>
+          <p:nvPr/>
+        </p:nvSpPr>
+        <p:spPr bwMode="auto">
+          <a:xfrm>
+            <a:off x="5017200" y="2502000"/>
+            <a:ext cx="2157600" cy="4050000"/>
           </a:xfrm>
           <a:prstGeom prst="rect">
             <a:avLst/>
@@ -6114,64 +5786,70 @@
           </a:bodyPr>
           <a:lstStyle/>
           <a:p>
-            <a:pPr algn="ctr">
-              <a:spcBef>
-                <a:spcPts val="0"/>
-              </a:spcBef>
-            </a:pPr>
-            <a:r>
-              <a:rPr lang="ru-RU" sz="1100" b="0" i="0" dirty="0" smtClean="0">
+            <a:pPr algn="ctr"/>
+            <a:r>
+              <a:rPr lang="ru-RU" altLang="en-US" sz="1100" b="0" i="0" dirty="0" smtClean="0">
                 <a:solidFill>
                   <a:srgbClr val="FFFFFF"/>
                 </a:solidFill>
-                <a:latin typeface="+mj-lt"/>
+                <a:latin typeface="Calibri"/>
               </a:rPr>
               <a:t>Эстония</a:t>
             </a:r>
           </a:p>
           <a:p>
-            <a:pPr algn="ctr">
-              <a:spcBef>
-                <a:spcPts val="0"/>
-              </a:spcBef>
-            </a:pPr>
-            <a:r>
-              <a:rPr lang="ru-RU" sz="1100" b="0" i="0" dirty="0" smtClean="0">
+            <a:pPr algn="ctr"/>
+            <a:r>
+              <a:rPr lang="ru-RU" altLang="en-US" sz="1100" b="0" i="0" dirty="0" smtClean="0">
                 <a:solidFill>
                   <a:srgbClr val="FFFFFF"/>
                 </a:solidFill>
-                <a:latin typeface="+mj-lt"/>
-              </a:rPr>
-              <a:t>Ниже среднего ЕС</a:t>
-            </a:r>
-          </a:p>
-        </p:txBody>
-      </p:sp>
-      <p:sp>
-        <p:nvSpPr>
-          <p:cNvPr id="23" name="StatCard"/>
-          <p:cNvSpPr txBox="1">
-            <a:spLocks noGrp="1"/>
-          </p:cNvSpPr>
-          <p:nvPr/>
-        </p:nvSpPr>
-        <p:spPr>
-          <a:xfrm>
-            <a:off x="7373520" y="1404000"/>
-            <a:ext cx="2265840" cy="2340000"/>
+                <a:latin typeface="Calibri"/>
+              </a:rPr>
+              <a:t>Ниже среднего</a:t>
+            </a:r>
+          </a:p>
+          <a:p>
+            <a:pPr algn="ctr"/>
+            <a:r>
+              <a:rPr lang="ru-RU" altLang="en-US" sz="1100" b="0" i="0" dirty="0" smtClean="0">
+                <a:solidFill>
+                  <a:srgbClr val="FFFFFF"/>
+                </a:solidFill>
+                <a:latin typeface="Calibri"/>
+              </a:rPr>
+              <a:t>по ЕС</a:t>
+            </a:r>
+          </a:p>
+        </p:txBody>
+      </p:sp>
+      <p:sp>
+        <p:nvSpPr>
+          <p:cNvPr id="15" name="sp15"/>
+          <p:cNvSpPr txBox="1"/>
+          <p:nvPr/>
+        </p:nvSpPr>
+        <p:spPr bwMode="auto">
+          <a:xfrm>
+            <a:off x="7372800" y="1314000"/>
+            <a:ext cx="2265600" cy="5346000"/>
           </a:xfrm>
           <a:prstGeom prst="roundRect">
             <a:avLst>
               <a:gd name="adj" fmla="val 8000"/>
             </a:avLst>
           </a:prstGeom>
-          <a:gradFill>
+          <a:gradFill rotWithShape="1">
             <a:gsLst>
               <a:gs pos="0">
-                <a:srgbClr val="0D1B2A"/>
+                <a:solidFill>
+                  <a:srgbClr val="1565C0"/>
+                </a:solidFill>
               </a:gs>
               <a:gs pos="100000">
-                <a:srgbClr val="1565C0"/>
+                <a:solidFill>
+                  <a:srgbClr val="0E4D92"/>
+                </a:solidFill>
               </a:gs>
             </a:gsLst>
             <a:lin ang="5400000" scaled="0"/>
@@ -6188,16 +5866,14 @@
       </p:sp>
       <p:sp>
         <p:nvSpPr>
-          <p:cNvPr id="33" name="Val"/>
-          <p:cNvSpPr txBox="1">
-            <a:spLocks noGrp="1"/>
-          </p:cNvSpPr>
-          <p:nvPr/>
-        </p:nvSpPr>
-        <p:spPr>
-          <a:xfrm>
-            <a:off x="7373520" y="1620000"/>
-            <a:ext cx="2265840" cy="1080000"/>
+          <p:cNvPr id="16" name="sp16"/>
+          <p:cNvSpPr txBox="1"/>
+          <p:nvPr/>
+        </p:nvSpPr>
+        <p:spPr bwMode="auto">
+          <a:xfrm>
+            <a:off x="7372800" y="1494000"/>
+            <a:ext cx="2265600" cy="1080000"/>
           </a:xfrm>
           <a:prstGeom prst="rect">
             <a:avLst/>
@@ -6213,35 +5889,29 @@
           </a:bodyPr>
           <a:lstStyle/>
           <a:p>
-            <a:pPr algn="ctr">
-              <a:spcBef>
-                <a:spcPts val="0"/>
-              </a:spcBef>
-            </a:pPr>
-            <a:r>
-              <a:rPr lang="ru-RU" sz="3600" b="1" i="0" dirty="0" smtClean="0">
+            <a:pPr algn="ctr"/>
+            <a:r>
+              <a:rPr lang="ru-RU" altLang="en-US" sz="3200" b="1" i="0" dirty="0" smtClean="0">
                 <a:solidFill>
                   <a:srgbClr val="FFC300"/>
                 </a:solidFill>
-                <a:latin typeface="+mj-lt"/>
-              </a:rPr>
-              <a:t>−3.9%</a:t>
-            </a:r>
-          </a:p>
-        </p:txBody>
-      </p:sp>
-      <p:sp>
-        <p:nvSpPr>
-          <p:cNvPr id="43" name="Label"/>
-          <p:cNvSpPr txBox="1">
-            <a:spLocks noGrp="1"/>
-          </p:cNvSpPr>
-          <p:nvPr/>
-        </p:nvSpPr>
-        <p:spPr>
-          <a:xfrm>
-            <a:off x="7427519" y="2664000"/>
-            <a:ext cx="2157840" cy="1080000"/>
+                <a:latin typeface="Calibri"/>
+              </a:rPr>
+              <a:t>-3.9%</a:t>
+            </a:r>
+          </a:p>
+        </p:txBody>
+      </p:sp>
+      <p:sp>
+        <p:nvSpPr>
+          <p:cNvPr id="17" name="sp17"/>
+          <p:cNvSpPr txBox="1"/>
+          <p:nvPr/>
+        </p:nvSpPr>
+        <p:spPr bwMode="auto">
+          <a:xfrm>
+            <a:off x="7426800" y="2502000"/>
+            <a:ext cx="2157600" cy="4050000"/>
           </a:xfrm>
           <a:prstGeom prst="rect">
             <a:avLst/>
@@ -6257,64 +5927,70 @@
           </a:bodyPr>
           <a:lstStyle/>
           <a:p>
-            <a:pPr algn="ctr">
-              <a:spcBef>
-                <a:spcPts val="0"/>
-              </a:spcBef>
-            </a:pPr>
-            <a:r>
-              <a:rPr lang="ru-RU" sz="1100" b="0" i="0" dirty="0" smtClean="0">
+            <a:pPr algn="ctr"/>
+            <a:r>
+              <a:rPr lang="ru-RU" altLang="en-US" sz="1100" b="0" i="0" dirty="0" smtClean="0">
                 <a:solidFill>
                   <a:srgbClr val="FFFFFF"/>
                 </a:solidFill>
-                <a:latin typeface="+mj-lt"/>
+                <a:latin typeface="Calibri"/>
               </a:rPr>
               <a:t>Сингапур</a:t>
             </a:r>
           </a:p>
           <a:p>
-            <a:pPr algn="ctr">
-              <a:spcBef>
-                <a:spcPts val="0"/>
-              </a:spcBef>
-            </a:pPr>
-            <a:r>
-              <a:rPr lang="ru-RU" sz="1100" b="0" i="0" dirty="0" smtClean="0">
+            <a:pPr algn="ctr"/>
+            <a:r>
+              <a:rPr lang="ru-RU" altLang="en-US" sz="1100" b="0" i="0" dirty="0" smtClean="0">
                 <a:solidFill>
                   <a:srgbClr val="FFFFFF"/>
                 </a:solidFill>
-                <a:latin typeface="+mj-lt"/>
-              </a:rPr>
-              <a:t>Торгово-зависимая</a:t>
-            </a:r>
-          </a:p>
-        </p:txBody>
-      </p:sp>
-      <p:sp>
-        <p:nvSpPr>
-          <p:cNvPr id="24" name="StatCard"/>
-          <p:cNvSpPr txBox="1">
-            <a:spLocks noGrp="1"/>
-          </p:cNvSpPr>
-          <p:nvPr/>
-        </p:nvSpPr>
-        <p:spPr>
-          <a:xfrm>
-            <a:off x="9783360" y="1404000"/>
-            <a:ext cx="2265840" cy="2340000"/>
+                <a:latin typeface="Calibri"/>
+              </a:rPr>
+              <a:t>Зависимость</a:t>
+            </a:r>
+          </a:p>
+          <a:p>
+            <a:pPr algn="ctr"/>
+            <a:r>
+              <a:rPr lang="ru-RU" altLang="en-US" sz="1100" b="0" i="0" dirty="0" smtClean="0">
+                <a:solidFill>
+                  <a:srgbClr val="FFFFFF"/>
+                </a:solidFill>
+                <a:latin typeface="Calibri"/>
+              </a:rPr>
+              <a:t>от торговли</a:t>
+            </a:r>
+          </a:p>
+        </p:txBody>
+      </p:sp>
+      <p:sp>
+        <p:nvSpPr>
+          <p:cNvPr id="18" name="sp18"/>
+          <p:cNvSpPr txBox="1"/>
+          <p:nvPr/>
+        </p:nvSpPr>
+        <p:spPr bwMode="auto">
+          <a:xfrm>
+            <a:off x="9782400" y="1314000"/>
+            <a:ext cx="2265600" cy="5346000"/>
           </a:xfrm>
           <a:prstGeom prst="roundRect">
             <a:avLst>
               <a:gd name="adj" fmla="val 8000"/>
             </a:avLst>
           </a:prstGeom>
-          <a:gradFill>
+          <a:gradFill rotWithShape="1">
             <a:gsLst>
               <a:gs pos="0">
-                <a:srgbClr val="1565C0"/>
+                <a:solidFill>
+                  <a:srgbClr val="0D1B2A"/>
+                </a:solidFill>
               </a:gs>
               <a:gs pos="100000">
-                <a:srgbClr val="0D1B2A"/>
+                <a:solidFill>
+                  <a:srgbClr val="1A3A5C"/>
+                </a:solidFill>
               </a:gs>
             </a:gsLst>
             <a:lin ang="5400000" scaled="0"/>
@@ -6331,16 +6007,14 @@
       </p:sp>
       <p:sp>
         <p:nvSpPr>
-          <p:cNvPr id="34" name="Val"/>
-          <p:cNvSpPr txBox="1">
-            <a:spLocks noGrp="1"/>
-          </p:cNvSpPr>
-          <p:nvPr/>
-        </p:nvSpPr>
-        <p:spPr>
-          <a:xfrm>
-            <a:off x="9783360" y="1620000"/>
-            <a:ext cx="2265840" cy="1080000"/>
+          <p:cNvPr id="19" name="sp19"/>
+          <p:cNvSpPr txBox="1"/>
+          <p:nvPr/>
+        </p:nvSpPr>
+        <p:spPr bwMode="auto">
+          <a:xfrm>
+            <a:off x="9782400" y="1494000"/>
+            <a:ext cx="2265600" cy="1080000"/>
           </a:xfrm>
           <a:prstGeom prst="rect">
             <a:avLst/>
@@ -6356,35 +6030,29 @@
           </a:bodyPr>
           <a:lstStyle/>
           <a:p>
-            <a:pPr algn="ctr">
-              <a:spcBef>
-                <a:spcPts val="0"/>
-              </a:spcBef>
-            </a:pPr>
-            <a:r>
-              <a:rPr lang="ru-RU" sz="3600" b="1" i="0" dirty="0" smtClean="0">
+            <a:pPr algn="ctr"/>
+            <a:r>
+              <a:rPr lang="ru-RU" altLang="en-US" sz="3200" b="1" i="0" dirty="0" smtClean="0">
                 <a:solidFill>
                   <a:srgbClr val="FFC300"/>
                 </a:solidFill>
-                <a:latin typeface="+mj-lt"/>
-              </a:rPr>
-              <a:t>−6.1%</a:t>
-            </a:r>
-          </a:p>
-        </p:txBody>
-      </p:sp>
-      <p:sp>
-        <p:nvSpPr>
-          <p:cNvPr id="44" name="Label"/>
-          <p:cNvSpPr txBox="1">
-            <a:spLocks noGrp="1"/>
-          </p:cNvSpPr>
-          <p:nvPr/>
-        </p:nvSpPr>
-        <p:spPr>
-          <a:xfrm>
-            <a:off x="9837359" y="2664000"/>
-            <a:ext cx="2157840" cy="1080000"/>
+                <a:latin typeface="Calibri"/>
+              </a:rPr>
+              <a:t>-6.1%</a:t>
+            </a:r>
+          </a:p>
+        </p:txBody>
+      </p:sp>
+      <p:sp>
+        <p:nvSpPr>
+          <p:cNvPr id="20" name="sp20"/>
+          <p:cNvSpPr txBox="1"/>
+          <p:nvPr/>
+        </p:nvSpPr>
+        <p:spPr bwMode="auto">
+          <a:xfrm>
+            <a:off x="9836400" y="2502000"/>
+            <a:ext cx="2157600" cy="4050000"/>
           </a:xfrm>
           <a:prstGeom prst="rect">
             <a:avLst/>
@@ -6400,121 +6068,113 @@
           </a:bodyPr>
           <a:lstStyle/>
           <a:p>
-            <a:pPr algn="ctr">
-              <a:spcBef>
-                <a:spcPts val="0"/>
-              </a:spcBef>
-            </a:pPr>
-            <a:r>
-              <a:rPr lang="ru-RU" sz="1100" b="0" i="0" dirty="0" smtClean="0">
+            <a:pPr algn="ctr"/>
+            <a:r>
+              <a:rPr lang="ru-RU" altLang="en-US" sz="1100" b="0" i="0" dirty="0" smtClean="0">
                 <a:solidFill>
                   <a:srgbClr val="FFFFFF"/>
                 </a:solidFill>
-                <a:latin typeface="+mj-lt"/>
+                <a:latin typeface="Calibri"/>
               </a:rPr>
               <a:t>Среднее по ЕС</a:t>
             </a:r>
           </a:p>
           <a:p>
-            <a:pPr algn="ctr">
-              <a:spcBef>
-                <a:spcPts val="0"/>
-              </a:spcBef>
-            </a:pPr>
-            <a:r>
-              <a:rPr lang="ru-RU" sz="1100" b="0" i="0" dirty="0" smtClean="0">
+            <a:pPr algn="ctr"/>
+            <a:r>
+              <a:rPr lang="ru-RU" altLang="en-US" sz="1100" b="0" i="0" dirty="0" smtClean="0">
                 <a:solidFill>
                   <a:srgbClr val="FFFFFF"/>
                 </a:solidFill>
-                <a:latin typeface="+mj-lt"/>
-              </a:rPr>
-              <a:t>Эталон сравнения</a:t>
-            </a:r>
-          </a:p>
-        </p:txBody>
-      </p:sp>
-      <p:sp>
-        <p:nvSpPr>
-          <p:cNvPr id="60" name="Src"/>
-          <p:cNvSpPr txBox="1">
-            <a:spLocks noGrp="1"/>
-          </p:cNvSpPr>
-          <p:nvPr/>
-        </p:nvSpPr>
-        <p:spPr>
-          <a:xfrm>
-            <a:off x="180000" y="6570000"/>
-            <a:ext cx="11833200" cy="216000"/>
-          </a:xfrm>
-          <a:prstGeom prst="rect">
-            <a:avLst/>
-          </a:prstGeom>
-          <a:noFill/>
-          <a:ln>
-            <a:noFill/>
-          </a:ln>
-        </p:spPr>
-        <p:txBody>
-          <a:bodyPr wrap="square" anchor="ctr">
-            <a:normAutofit/>
-          </a:bodyPr>
-          <a:lstStyle/>
-          <a:p>
-            <a:pPr algn="r">
-              <a:spcBef>
-                <a:spcPts val="0"/>
-              </a:spcBef>
-            </a:pPr>
-            <a:r>
-              <a:rPr lang="ru-RU" sz="900" b="0" i="1" dirty="0" smtClean="0">
+                <a:latin typeface="Calibri"/>
+              </a:rPr>
+              <a:t>(эталон</a:t>
+            </a:r>
+          </a:p>
+          <a:p>
+            <a:pPr algn="ctr"/>
+            <a:r>
+              <a:rPr lang="ru-RU" altLang="en-US" sz="1100" b="0" i="0" dirty="0" smtClean="0">
+                <a:solidFill>
+                  <a:srgbClr val="FFFFFF"/>
+                </a:solidFill>
+                <a:latin typeface="Calibri"/>
+              </a:rPr>
+              <a:t>сравнения)</a:t>
+            </a:r>
+          </a:p>
+        </p:txBody>
+      </p:sp>
+      <p:sp>
+        <p:nvSpPr>
+          <p:cNvPr id="21" name="sp21"/>
+          <p:cNvSpPr txBox="1"/>
+          <p:nvPr/>
+        </p:nvSpPr>
+        <p:spPr bwMode="auto">
+          <a:xfrm>
+            <a:off x="180000" y="6624000"/>
+            <a:ext cx="11832000" cy="180000"/>
+          </a:xfrm>
+          <a:prstGeom prst="rect">
+            <a:avLst/>
+          </a:prstGeom>
+          <a:noFill/>
+          <a:ln>
+            <a:noFill/>
+          </a:ln>
+        </p:spPr>
+        <p:txBody>
+          <a:bodyPr wrap="square" anchor="t">
+            <a:normAutofit/>
+          </a:bodyPr>
+          <a:lstStyle/>
+          <a:p>
+            <a:pPr algn="r"/>
+            <a:r>
+              <a:rPr lang="ru-RU" altLang="en-US" sz="800" b="0" i="1" dirty="0" smtClean="0">
                 <a:solidFill>
                   <a:srgbClr val="546E7A"/>
                 </a:solidFill>
-                <a:latin typeface="+mj-lt"/>
-              </a:rPr>
-              <a:t>Источник: World Bank WDI; Eurostat; Bank of Korea, 2024</a:t>
-            </a:r>
-          </a:p>
-        </p:txBody>
-      </p:sp>
-      <p:sp>
-        <p:nvSpPr>
-          <p:cNvPr id="61" name="SlideNum"/>
-          <p:cNvSpPr txBox="1">
-            <a:spLocks noGrp="1"/>
-          </p:cNvSpPr>
-          <p:nvPr/>
-        </p:nvSpPr>
-        <p:spPr>
-          <a:xfrm>
-            <a:off x="10933200" y="6624000"/>
-            <a:ext cx="1152000" cy="180000"/>
-          </a:xfrm>
-          <a:prstGeom prst="rect">
-            <a:avLst/>
-          </a:prstGeom>
-          <a:noFill/>
-          <a:ln>
-            <a:noFill/>
-          </a:ln>
-        </p:spPr>
-        <p:txBody>
-          <a:bodyPr wrap="square" anchor="ctr">
-            <a:normAutofit/>
-          </a:bodyPr>
-          <a:lstStyle/>
-          <a:p>
-            <a:pPr algn="r">
-              <a:spcBef>
-                <a:spcPts val="0"/>
-              </a:spcBef>
-            </a:pPr>
-            <a:r>
-              <a:rPr lang="ru-RU" sz="900" b="0" i="0" dirty="0" smtClean="0">
-                <a:solidFill>
-                  <a:srgbClr val="90E0EF"/>
-                </a:solidFill>
-                <a:latin typeface="+mj-lt"/>
+                <a:latin typeface="Calibri"/>
+              </a:rPr>
+              <a:t>Источники: World Bank WDI; Eurostat; Bank of Korea, 2024</a:t>
+            </a:r>
+          </a:p>
+        </p:txBody>
+      </p:sp>
+      <p:sp>
+        <p:nvSpPr>
+          <p:cNvPr id="22" name="sp22"/>
+          <p:cNvSpPr txBox="1"/>
+          <p:nvPr/>
+        </p:nvSpPr>
+        <p:spPr bwMode="auto">
+          <a:xfrm>
+            <a:off x="10932000" y="6606001"/>
+            <a:ext cx="1152000" cy="198000"/>
+          </a:xfrm>
+          <a:prstGeom prst="rect">
+            <a:avLst/>
+          </a:prstGeom>
+          <a:noFill/>
+          <a:ln>
+            <a:noFill/>
+          </a:ln>
+        </p:spPr>
+        <p:txBody>
+          <a:bodyPr wrap="square" anchor="t">
+            <a:normAutofit/>
+          </a:bodyPr>
+          <a:lstStyle/>
+          <a:p>
+            <a:pPr algn="r"/>
+            <a:r>
+              <a:rPr lang="ru-RU" altLang="en-US" sz="900" b="0" i="0" dirty="0" smtClean="0">
+                <a:solidFill>
+                  <a:srgbClr val="546E7A"/>
+                </a:solidFill>
+                <a:latin typeface="Calibri"/>
               </a:rPr>
               <a:t>6 / 15</a:t>
             </a:r>
@@ -6530,7 +6190,7 @@
 </file>
 
 <file path=ppt/slides/slide7.xml><?xml version="1.0" encoding="utf-8"?>
-<p:sld xmlns:a="http://schemas.openxmlformats.org/drawingml/2006/main" xmlns:p="http://schemas.openxmlformats.org/presentationml/2006/main" xmlns:r="http://schemas.openxmlformats.org/officeDocument/2006/relationships">
+<p:sld xmlns:a="http://schemas.openxmlformats.org/drawingml/2006/main" xmlns:p="http://schemas.openxmlformats.org/presentationml/2006/main" xmlns:r="http://schemas.openxmlformats.org/officeDocument/2006/relationships" show="1">
   <p:cSld>
     <p:spTree>
       <p:nvGrpSpPr>
@@ -6541,34 +6201,36 @@
       <p:grpSpPr>
         <a:xfrm>
           <a:off x="0" y="0"/>
-          <a:ext cx="0" cy="0"/>
+          <a:ext cx="12192000" cy="6858000"/>
           <a:chOff x="0" y="0"/>
-          <a:chExt cx="0" cy="0"/>
+          <a:chExt cx="12192000" cy="6858000"/>
         </a:xfrm>
       </p:grpSpPr>
       <p:sp>
         <p:nvSpPr>
-          <p:cNvPr id="10" name="Bg"/>
-          <p:cNvSpPr txBox="1">
-            <a:spLocks noGrp="1"/>
-          </p:cNvSpPr>
-          <p:nvPr/>
-        </p:nvSpPr>
-        <p:spPr>
+          <p:cNvPr id="2" name="sp2"/>
+          <p:cNvSpPr txBox="1"/>
+          <p:nvPr/>
+        </p:nvSpPr>
+        <p:spPr bwMode="auto">
           <a:xfrm>
             <a:off x="0" y="0"/>
-            <a:ext cx="12193200" cy="6858000"/>
-          </a:xfrm>
-          <a:prstGeom prst="rect">
-            <a:avLst/>
-          </a:prstGeom>
-          <a:gradFill>
+            <a:ext cx="12192000" cy="6858000"/>
+          </a:xfrm>
+          <a:prstGeom prst="rect">
+            <a:avLst/>
+          </a:prstGeom>
+          <a:gradFill rotWithShape="1">
             <a:gsLst>
               <a:gs pos="0">
-                <a:srgbClr val="0D1B2A"/>
+                <a:solidFill>
+                  <a:srgbClr val="0D1B2A"/>
+                </a:solidFill>
               </a:gs>
               <a:gs pos="100000">
-                <a:srgbClr val="1A3A5C"/>
+                <a:solidFill>
+                  <a:srgbClr val="1A3A5C"/>
+                </a:solidFill>
               </a:gs>
             </a:gsLst>
             <a:lin ang="0" scaled="0"/>
@@ -6585,27 +6247,29 @@
       </p:sp>
       <p:sp>
         <p:nvSpPr>
-          <p:cNvPr id="11" name="Accent"/>
-          <p:cNvSpPr txBox="1">
-            <a:spLocks noGrp="1"/>
-          </p:cNvSpPr>
-          <p:nvPr/>
-        </p:nvSpPr>
-        <p:spPr>
+          <p:cNvPr id="3" name="sp3"/>
+          <p:cNvSpPr txBox="1"/>
+          <p:nvPr/>
+        </p:nvSpPr>
+        <p:spPr bwMode="auto">
           <a:xfrm>
             <a:off x="0" y="0"/>
-            <a:ext cx="251999" cy="6858000"/>
-          </a:xfrm>
-          <a:prstGeom prst="rect">
-            <a:avLst/>
-          </a:prstGeom>
-          <a:gradFill>
+            <a:ext cx="288000" cy="6858000"/>
+          </a:xfrm>
+          <a:prstGeom prst="rect">
+            <a:avLst/>
+          </a:prstGeom>
+          <a:gradFill rotWithShape="1">
             <a:gsLst>
               <a:gs pos="0">
-                <a:srgbClr val="00B4D8"/>
+                <a:solidFill>
+                  <a:srgbClr val="00B4D8"/>
+                </a:solidFill>
               </a:gs>
               <a:gs pos="100000">
-                <a:srgbClr val="1565C0"/>
+                <a:solidFill>
+                  <a:srgbClr val="1565C0"/>
+                </a:solidFill>
               </a:gs>
             </a:gsLst>
             <a:lin ang="5400000" scaled="0"/>
@@ -6622,16 +6286,14 @@
       </p:sp>
       <p:sp>
         <p:nvSpPr>
-          <p:cNvPr id="12" name="Chapter"/>
-          <p:cNvSpPr txBox="1">
-            <a:spLocks noGrp="1"/>
-          </p:cNvSpPr>
-          <p:nvPr/>
-        </p:nvSpPr>
-        <p:spPr>
+          <p:cNvPr id="4" name="sp4"/>
+          <p:cNvSpPr txBox="1"/>
+          <p:nvPr/>
+        </p:nvSpPr>
+        <p:spPr bwMode="auto">
           <a:xfrm>
             <a:off x="432000" y="540000"/>
-            <a:ext cx="11581199" cy="1800000"/>
+            <a:ext cx="11580000" cy="1800000"/>
           </a:xfrm>
           <a:prstGeom prst="rect">
             <a:avLst/>
@@ -6647,17 +6309,13 @@
           </a:bodyPr>
           <a:lstStyle/>
           <a:p>
-            <a:pPr algn="ctr">
-              <a:spcBef>
-                <a:spcPts val="0"/>
-              </a:spcBef>
-            </a:pPr>
-            <a:r>
-              <a:rPr lang="ru-RU" sz="5600" b="1" i="0" dirty="0" smtClean="0">
+            <a:pPr algn="ctr"/>
+            <a:r>
+              <a:rPr lang="ru-RU" altLang="en-US" sz="5200" b="1" i="0" dirty="0" smtClean="0">
                 <a:solidFill>
                   <a:srgbClr val="00B4D8"/>
                 </a:solidFill>
-                <a:latin typeface="+mj-lt"/>
+                <a:latin typeface="Calibri"/>
               </a:rPr>
               <a:t>Глава II</a:t>
             </a:r>
@@ -6666,16 +6324,14 @@
       </p:sp>
       <p:sp>
         <p:nvSpPr>
-          <p:cNvPr id="13" name="Line13"/>
-          <p:cNvSpPr txBox="1">
-            <a:spLocks noGrp="1"/>
-          </p:cNvSpPr>
-          <p:nvPr/>
-        </p:nvSpPr>
-        <p:spPr>
-          <a:xfrm>
-            <a:off x="1080000" y="2592000"/>
-            <a:ext cx="10033200" cy="7200"/>
+          <p:cNvPr id="5" name="sp5"/>
+          <p:cNvSpPr txBox="1"/>
+          <p:nvPr/>
+        </p:nvSpPr>
+        <p:spPr bwMode="auto">
+          <a:xfrm>
+            <a:off x="1080000" y="2520000"/>
+            <a:ext cx="10032000" cy="36000"/>
           </a:xfrm>
           <a:prstGeom prst="rect">
             <a:avLst/>
@@ -6695,16 +6351,14 @@
       </p:sp>
       <p:sp>
         <p:nvSpPr>
-          <p:cNvPr id="14" name="Sub"/>
-          <p:cNvSpPr txBox="1">
-            <a:spLocks noGrp="1"/>
-          </p:cNvSpPr>
-          <p:nvPr/>
-        </p:nvSpPr>
-        <p:spPr>
-          <a:xfrm>
-            <a:off x="432000" y="2736000"/>
-            <a:ext cx="11581199" cy="3060000"/>
+          <p:cNvPr id="6" name="sp6"/>
+          <p:cNvSpPr txBox="1"/>
+          <p:nvPr/>
+        </p:nvSpPr>
+        <p:spPr bwMode="auto">
+          <a:xfrm>
+            <a:off x="432000" y="2664000"/>
+            <a:ext cx="11580000" cy="3978000"/>
           </a:xfrm>
           <a:prstGeom prst="rect">
             <a:avLst/>
@@ -6720,77 +6374,63 @@
           </a:bodyPr>
           <a:lstStyle/>
           <a:p>
-            <a:pPr algn="ctr">
-              <a:spcBef>
-                <a:spcPts val="0"/>
-              </a:spcBef>
-            </a:pPr>
-            <a:r>
-              <a:rPr lang="ru-RU" sz="2000" b="0" i="0" dirty="0" smtClean="0">
+            <a:pPr algn="ctr"/>
+            <a:r>
+              <a:rPr lang="ru-RU" altLang="en-US" sz="2000" b="0" i="0" dirty="0" smtClean="0">
                 <a:solidFill>
                   <a:srgbClr val="FFFFFF"/>
                 </a:solidFill>
-                <a:latin typeface="+mj-lt"/>
+                <a:latin typeface="Calibri"/>
               </a:rPr>
               <a:t>Эконометрический анализ</a:t>
             </a:r>
           </a:p>
           <a:p>
-            <a:pPr algn="ctr">
-              <a:spcBef>
-                <a:spcPts val="0"/>
-              </a:spcBef>
-            </a:pPr>
-            <a:r>
-              <a:rPr lang="ru-RU" sz="2000" b="0" i="0" dirty="0" smtClean="0">
+            <a:pPr algn="ctr"/>
+            <a:r>
+              <a:rPr lang="ru-RU" altLang="en-US" sz="2000" b="0" i="0" dirty="0" smtClean="0">
                 <a:solidFill>
                   <a:srgbClr val="FFFFFF"/>
                 </a:solidFill>
-                <a:latin typeface="+mj-lt"/>
-              </a:rPr>
-              <a:t>49 стран · 707 наблюдений · 2010–2024</a:t>
-            </a:r>
-          </a:p>
-        </p:txBody>
-      </p:sp>
-      <p:sp>
-        <p:nvSpPr>
-          <p:cNvPr id="15" name="SlideNum"/>
-          <p:cNvSpPr txBox="1">
-            <a:spLocks noGrp="1"/>
-          </p:cNvSpPr>
-          <p:nvPr/>
-        </p:nvSpPr>
-        <p:spPr>
-          <a:xfrm>
-            <a:off x="10933200" y="6624000"/>
-            <a:ext cx="1152000" cy="180000"/>
-          </a:xfrm>
-          <a:prstGeom prst="rect">
-            <a:avLst/>
-          </a:prstGeom>
-          <a:noFill/>
-          <a:ln>
-            <a:noFill/>
-          </a:ln>
-        </p:spPr>
-        <p:txBody>
-          <a:bodyPr wrap="square" anchor="ctr">
-            <a:normAutofit/>
-          </a:bodyPr>
-          <a:lstStyle/>
-          <a:p>
-            <a:pPr algn="r">
-              <a:spcBef>
-                <a:spcPts val="0"/>
-              </a:spcBef>
-            </a:pPr>
-            <a:r>
-              <a:rPr lang="ru-RU" sz="900" b="0" i="0" dirty="0" smtClean="0">
-                <a:solidFill>
-                  <a:srgbClr val="90E0EF"/>
-                </a:solidFill>
-                <a:latin typeface="+mj-lt"/>
+                <a:latin typeface="Calibri"/>
+              </a:rPr>
+              <a:t>49 стран  |  707 наблюдений  |  2010-2024</a:t>
+            </a:r>
+          </a:p>
+        </p:txBody>
+      </p:sp>
+      <p:sp>
+        <p:nvSpPr>
+          <p:cNvPr id="7" name="sp7"/>
+          <p:cNvSpPr txBox="1"/>
+          <p:nvPr/>
+        </p:nvSpPr>
+        <p:spPr bwMode="auto">
+          <a:xfrm>
+            <a:off x="10932000" y="6606001"/>
+            <a:ext cx="1152000" cy="198000"/>
+          </a:xfrm>
+          <a:prstGeom prst="rect">
+            <a:avLst/>
+          </a:prstGeom>
+          <a:noFill/>
+          <a:ln>
+            <a:noFill/>
+          </a:ln>
+        </p:spPr>
+        <p:txBody>
+          <a:bodyPr wrap="square" anchor="t">
+            <a:normAutofit/>
+          </a:bodyPr>
+          <a:lstStyle/>
+          <a:p>
+            <a:pPr algn="r"/>
+            <a:r>
+              <a:rPr lang="ru-RU" altLang="en-US" sz="900" b="0" i="0" dirty="0" smtClean="0">
+                <a:solidFill>
+                  <a:srgbClr val="546E7A"/>
+                </a:solidFill>
+                <a:latin typeface="Calibri"/>
               </a:rPr>
               <a:t>7 / 15</a:t>
             </a:r>
@@ -6806,7 +6446,7 @@
 </file>
 
 <file path=ppt/slides/slide8.xml><?xml version="1.0" encoding="utf-8"?>
-<p:sld xmlns:a="http://schemas.openxmlformats.org/drawingml/2006/main" xmlns:p="http://schemas.openxmlformats.org/presentationml/2006/main" xmlns:r="http://schemas.openxmlformats.org/officeDocument/2006/relationships">
+<p:sld xmlns:a="http://schemas.openxmlformats.org/drawingml/2006/main" xmlns:p="http://schemas.openxmlformats.org/presentationml/2006/main" xmlns:r="http://schemas.openxmlformats.org/officeDocument/2006/relationships" show="1">
   <p:cSld>
     <p:spTree>
       <p:nvGrpSpPr>
@@ -6817,23 +6457,21 @@
       <p:grpSpPr>
         <a:xfrm>
           <a:off x="0" y="0"/>
-          <a:ext cx="0" cy="0"/>
+          <a:ext cx="12192000" cy="6858000"/>
           <a:chOff x="0" y="0"/>
-          <a:chExt cx="0" cy="0"/>
+          <a:chExt cx="12192000" cy="6858000"/>
         </a:xfrm>
       </p:grpSpPr>
       <p:sp>
         <p:nvSpPr>
-          <p:cNvPr id="10" name="Bg"/>
-          <p:cNvSpPr txBox="1">
-            <a:spLocks noGrp="1"/>
-          </p:cNvSpPr>
-          <p:nvPr/>
-        </p:nvSpPr>
-        <p:spPr>
+          <p:cNvPr id="2" name="sp2"/>
+          <p:cNvSpPr txBox="1"/>
+          <p:nvPr/>
+        </p:nvSpPr>
+        <p:spPr bwMode="auto">
           <a:xfrm>
             <a:off x="0" y="0"/>
-            <a:ext cx="12193200" cy="6858000"/>
+            <a:ext cx="12192000" cy="6858000"/>
           </a:xfrm>
           <a:prstGeom prst="rect">
             <a:avLst/>
@@ -6853,27 +6491,29 @@
       </p:sp>
       <p:sp>
         <p:nvSpPr>
-          <p:cNvPr id="11" name="Header"/>
-          <p:cNvSpPr txBox="1">
-            <a:spLocks noGrp="1"/>
-          </p:cNvSpPr>
-          <p:nvPr/>
-        </p:nvSpPr>
-        <p:spPr>
+          <p:cNvPr id="3" name="sp3"/>
+          <p:cNvSpPr txBox="1"/>
+          <p:nvPr/>
+        </p:nvSpPr>
+        <p:spPr bwMode="auto">
           <a:xfrm>
             <a:off x="0" y="0"/>
-            <a:ext cx="12193200" cy="1188000"/>
-          </a:xfrm>
-          <a:prstGeom prst="rect">
-            <a:avLst/>
-          </a:prstGeom>
-          <a:gradFill>
+            <a:ext cx="12192000" cy="1152000"/>
+          </a:xfrm>
+          <a:prstGeom prst="rect">
+            <a:avLst/>
+          </a:prstGeom>
+          <a:gradFill rotWithShape="1">
             <a:gsLst>
               <a:gs pos="0">
-                <a:srgbClr val="0D1B2A"/>
+                <a:solidFill>
+                  <a:srgbClr val="0D1B2A"/>
+                </a:solidFill>
               </a:gs>
               <a:gs pos="100000">
-                <a:srgbClr val="1565C0"/>
+                <a:solidFill>
+                  <a:srgbClr val="1565C0"/>
+                </a:solidFill>
               </a:gs>
             </a:gsLst>
             <a:lin ang="0" scaled="0"/>
@@ -6890,16 +6530,14 @@
       </p:sp>
       <p:sp>
         <p:nvSpPr>
-          <p:cNvPr id="12" name="Line12"/>
-          <p:cNvSpPr txBox="1">
-            <a:spLocks noGrp="1"/>
-          </p:cNvSpPr>
-          <p:nvPr/>
-        </p:nvSpPr>
-        <p:spPr>
-          <a:xfrm>
-            <a:off x="0" y="1170000"/>
-            <a:ext cx="12193200" cy="7200"/>
+          <p:cNvPr id="4" name="sp4"/>
+          <p:cNvSpPr txBox="1"/>
+          <p:nvPr/>
+        </p:nvSpPr>
+        <p:spPr bwMode="auto">
+          <a:xfrm>
+            <a:off x="0" y="1134000"/>
+            <a:ext cx="12192000" cy="43200"/>
           </a:xfrm>
           <a:prstGeom prst="rect">
             <a:avLst/>
@@ -6919,27 +6557,29 @@
       </p:sp>
       <p:sp>
         <p:nvSpPr>
-          <p:cNvPr id="13" name="Vbar"/>
-          <p:cNvSpPr txBox="1">
-            <a:spLocks noGrp="1"/>
-          </p:cNvSpPr>
-          <p:nvPr/>
-        </p:nvSpPr>
-        <p:spPr>
-          <a:xfrm>
-            <a:off x="0" y="1188000"/>
-            <a:ext cx="64800" cy="5670000"/>
-          </a:xfrm>
-          <a:prstGeom prst="rect">
-            <a:avLst/>
-          </a:prstGeom>
-          <a:gradFill>
+          <p:cNvPr id="5" name="sp5"/>
+          <p:cNvSpPr txBox="1"/>
+          <p:nvPr/>
+        </p:nvSpPr>
+        <p:spPr bwMode="auto">
+          <a:xfrm>
+            <a:off x="0" y="1152000"/>
+            <a:ext cx="79200" cy="5706000"/>
+          </a:xfrm>
+          <a:prstGeom prst="rect">
+            <a:avLst/>
+          </a:prstGeom>
+          <a:gradFill rotWithShape="1">
             <a:gsLst>
               <a:gs pos="0">
-                <a:srgbClr val="00B4D8"/>
+                <a:solidFill>
+                  <a:srgbClr val="00B4D8"/>
+                </a:solidFill>
               </a:gs>
               <a:gs pos="100000">
-                <a:srgbClr val="F0F4F8"/>
+                <a:solidFill>
+                  <a:srgbClr val="F0F4F8"/>
+                </a:solidFill>
               </a:gs>
             </a:gsLst>
             <a:lin ang="5400000" scaled="0"/>
@@ -6956,16 +6596,14 @@
       </p:sp>
       <p:sp>
         <p:nvSpPr>
-          <p:cNvPr id="14" name="Title"/>
-          <p:cNvSpPr txBox="1">
-            <a:spLocks noGrp="1"/>
-          </p:cNvSpPr>
-          <p:nvPr/>
-        </p:nvSpPr>
-        <p:spPr>
-          <a:xfrm>
-            <a:off x="251999" y="72000"/>
-            <a:ext cx="11761199" cy="1080000"/>
+          <p:cNvPr id="6" name="sp6"/>
+          <p:cNvSpPr txBox="1"/>
+          <p:nvPr/>
+        </p:nvSpPr>
+        <p:spPr bwMode="auto">
+          <a:xfrm>
+            <a:off x="251999" y="54000"/>
+            <a:ext cx="11760000" cy="1062000"/>
           </a:xfrm>
           <a:prstGeom prst="rect">
             <a:avLst/>
@@ -6981,17 +6619,13 @@
           </a:bodyPr>
           <a:lstStyle/>
           <a:p>
-            <a:pPr algn="l">
-              <a:spcBef>
-                <a:spcPts val="0"/>
-              </a:spcBef>
-            </a:pPr>
-            <a:r>
-              <a:rPr lang="ru-RU" sz="2100" b="1" i="0" dirty="0" smtClean="0">
+            <a:pPr algn="l"/>
+            <a:r>
+              <a:rPr lang="ru-RU" altLang="en-US" sz="2200" b="1" i="0" dirty="0" smtClean="0">
                 <a:solidFill>
                   <a:srgbClr val="FFFFFF"/>
                 </a:solidFill>
-                <a:latin typeface="+mj-lt"/>
+                <a:latin typeface="Calibri"/>
               </a:rPr>
               <a:t>Эконометрическая модель: методология</a:t>
             </a:r>
@@ -7000,16 +6634,14 @@
       </p:sp>
       <p:sp>
         <p:nvSpPr>
-          <p:cNvPr id="15" name="Bullets"/>
-          <p:cNvSpPr txBox="1">
-            <a:spLocks noGrp="1"/>
-          </p:cNvSpPr>
-          <p:nvPr/>
-        </p:nvSpPr>
-        <p:spPr>
-          <a:xfrm>
-            <a:off x="216000" y="1260000"/>
-            <a:ext cx="11833200" cy="5454000"/>
+          <p:cNvPr id="7" name="sp7"/>
+          <p:cNvSpPr txBox="1"/>
+          <p:nvPr/>
+        </p:nvSpPr>
+        <p:spPr bwMode="auto">
+          <a:xfrm>
+            <a:off x="198000" y="1242000"/>
+            <a:ext cx="11868000" cy="5454000"/>
           </a:xfrm>
           <a:prstGeom prst="rect">
             <a:avLst/>
@@ -7024,6 +6656,18 @@
             <a:normAutofit/>
           </a:bodyPr>
           <a:lstStyle/>
+          <a:p>
+            <a:pPr algn="l"/>
+            <a:r>
+              <a:rPr lang="ru-RU" altLang="en-US" sz="1500" b="0" i="0" dirty="0" smtClean="0">
+                <a:solidFill>
+                  <a:srgbClr val="1A237E"/>
+                </a:solidFill>
+                <a:latin typeface="Calibri"/>
+              </a:rPr>
+              <a:t>▶  Выборка: 49 стран, несбалансированная панель 2010-2024 гг., 707 наблюдений</a:t>
+            </a:r>
+          </a:p>
           <a:p>
             <a:pPr algn="l">
               <a:spcBef>
@@ -7031,151 +6675,129 @@
               </a:spcBef>
             </a:pPr>
             <a:r>
-              <a:rPr lang="ru-RU" sz="1500" b="0" i="0" dirty="0" smtClean="0">
-                <a:solidFill>
-                  <a:srgbClr val="1A237E"/>
-                </a:solidFill>
-                <a:latin typeface="+mj-lt"/>
-              </a:rPr>
-              <a:t>▶  Выборка: 49 стран, несбалансированная панель 2010–2024 гг., 707 наблюдений</a:t>
+              <a:rPr lang="ru-RU" altLang="en-US" sz="1300" b="0" i="0" dirty="0" smtClean="0">
+                <a:solidFill>
+                  <a:srgbClr val="546E7A"/>
+                </a:solidFill>
+                <a:latin typeface="Calibri"/>
+              </a:rPr>
+              <a:t>      Развитые ОЭСР (22 страны)  |  Переходные (16)  |  Развивающиеся (11, вкл. Узбекистан)</a:t>
             </a:r>
           </a:p>
           <a:p>
             <a:pPr algn="l">
               <a:spcBef>
-                <a:spcPts val="100"/>
+                <a:spcPts val="700"/>
               </a:spcBef>
             </a:pPr>
             <a:r>
-              <a:rPr lang="ru-RU" sz="1300" b="0" i="0" dirty="0" smtClean="0">
-                <a:solidFill>
-                  <a:srgbClr val="546E7A"/>
-                </a:solidFill>
-                <a:latin typeface="+mj-lt"/>
-              </a:rPr>
-              <a:t>     Развитые ОЭСР (22) · Переходные (16) · Развивающиеся вкл. Узбекистан (11)</a:t>
+              <a:rPr lang="ru-RU" altLang="en-US" sz="1500" b="0" i="0" dirty="0" smtClean="0">
+                <a:solidFill>
+                  <a:srgbClr val="1A237E"/>
+                </a:solidFill>
+                <a:latin typeface="Calibri"/>
+              </a:rPr>
+              <a:t>▶  Зависимая переменная: ln(ВВП на душу населения, постоянные цены 2015 г.)</a:t>
             </a:r>
           </a:p>
           <a:p>
             <a:pPr algn="l">
               <a:spcBef>
-                <a:spcPts val="600"/>
+                <a:spcPts val="700"/>
               </a:spcBef>
             </a:pPr>
             <a:r>
-              <a:rPr lang="ru-RU" sz="1500" b="0" i="0" dirty="0" smtClean="0">
+              <a:rPr lang="ru-RU" altLang="en-US" sz="1500" b="0" i="0" dirty="0" smtClean="0">
                 <a:solidFill>
                   <a:srgbClr val="1A237E"/>
                 </a:solidFill>
-                <a:latin typeface="+mj-lt"/>
-              </a:rPr>
-              <a:t>▶  Зависимая переменная: ln(ВВП на душу населения, постоянные цены 2015)</a:t>
+                <a:latin typeface="Calibri"/>
+              </a:rPr>
+              <a:t>▶  Основной регрессор: ln(доля интернет-пользователей, %)</a:t>
             </a:r>
           </a:p>
           <a:p>
             <a:pPr algn="l">
               <a:spcBef>
-                <a:spcPts val="600"/>
+                <a:spcPts val="700"/>
               </a:spcBef>
             </a:pPr>
             <a:r>
-              <a:rPr lang="ru-RU" sz="1500" b="0" i="0" dirty="0" smtClean="0">
+              <a:rPr lang="ru-RU" altLang="en-US" sz="1500" b="0" i="0" dirty="0" smtClean="0">
                 <a:solidFill>
                   <a:srgbClr val="1A237E"/>
                 </a:solidFill>
-                <a:latin typeface="+mj-lt"/>
-              </a:rPr>
-              <a:t>▶  Основной регрессор: ln(доля интернет-пользователей, %)</a:t>
+                <a:latin typeface="Calibri"/>
+              </a:rPr>
+              <a:t>▶  Контрольные: торговая открытость, качество институтов (WGI), норма накопления капитала</a:t>
             </a:r>
           </a:p>
           <a:p>
             <a:pPr algn="l">
               <a:spcBef>
-                <a:spcPts val="600"/>
+                <a:spcPts val="700"/>
               </a:spcBef>
             </a:pPr>
             <a:r>
-              <a:rPr lang="ru-RU" sz="1500" b="0" i="0" dirty="0" smtClean="0">
+              <a:rPr lang="ru-RU" altLang="en-US" sz="1500" b="0" i="0" dirty="0" smtClean="0">
                 <a:solidFill>
                   <a:srgbClr val="1A237E"/>
                 </a:solidFill>
-                <a:latin typeface="+mj-lt"/>
-              </a:rPr>
-              <a:t>▶  Контрольные переменные: торговая открытость, качество институтов (WGI), норма накопления капитала</a:t>
+                <a:latin typeface="Calibri"/>
+              </a:rPr>
+              <a:t>▶  Метод: модели с фиксированными эффектами (FE) + робастные S.E. по кластерам</a:t>
             </a:r>
           </a:p>
           <a:p>
             <a:pPr algn="l">
               <a:spcBef>
-                <a:spcPts val="600"/>
+                <a:spcPts val="700"/>
               </a:spcBef>
             </a:pPr>
             <a:r>
-              <a:rPr lang="ru-RU" sz="1500" b="0" i="0" dirty="0" smtClean="0">
+              <a:rPr lang="ru-RU" altLang="en-US" sz="1500" b="0" i="0" dirty="0" smtClean="0">
                 <a:solidFill>
                   <a:srgbClr val="1A237E"/>
                 </a:solidFill>
-                <a:latin typeface="+mj-lt"/>
-              </a:rPr>
-              <a:t>▶  Метод: FE-модели + робастные стандартные ошибки (кластеризация по стране)</a:t>
-            </a:r>
-          </a:p>
-          <a:p>
-            <a:pPr algn="l">
-              <a:spcBef>
-                <a:spcPts val="600"/>
-              </a:spcBef>
-            </a:pPr>
-            <a:r>
-              <a:rPr lang="ru-RU" sz="1500" b="0" i="0" dirty="0" smtClean="0">
-                <a:solidFill>
-                  <a:srgbClr val="1A237E"/>
-                </a:solidFill>
-                <a:latin typeface="+mj-lt"/>
-              </a:rPr>
-              <a:t>▶  Тест Чоу: F = 5,34; p = 1,15×10⁻¹¹ → структурная неоднородность подтверждена</a:t>
-            </a:r>
-          </a:p>
-        </p:txBody>
-      </p:sp>
-      <p:sp>
-        <p:nvSpPr>
-          <p:cNvPr id="16" name="SlideNum"/>
-          <p:cNvSpPr txBox="1">
-            <a:spLocks noGrp="1"/>
-          </p:cNvSpPr>
-          <p:nvPr/>
-        </p:nvSpPr>
-        <p:spPr>
-          <a:xfrm>
-            <a:off x="10933200" y="6624000"/>
-            <a:ext cx="1152000" cy="180000"/>
-          </a:xfrm>
-          <a:prstGeom prst="rect">
-            <a:avLst/>
-          </a:prstGeom>
-          <a:noFill/>
-          <a:ln>
-            <a:noFill/>
-          </a:ln>
-        </p:spPr>
-        <p:txBody>
-          <a:bodyPr wrap="square" anchor="ctr">
-            <a:normAutofit/>
-          </a:bodyPr>
-          <a:lstStyle/>
-          <a:p>
-            <a:pPr algn="r">
-              <a:spcBef>
-                <a:spcPts val="0"/>
-              </a:spcBef>
-            </a:pPr>
-            <a:r>
-              <a:rPr lang="ru-RU" sz="900" b="0" i="0" dirty="0" smtClean="0">
-                <a:solidFill>
-                  <a:srgbClr val="90E0EF"/>
-                </a:solidFill>
-                <a:latin typeface="+mj-lt"/>
+                <a:latin typeface="Calibri"/>
+              </a:rPr>
+              <a:t>▶  Тест Чоу: F=5.34, p=1.15e-11 - структурная неоднородность групп подтверждена</a:t>
+            </a:r>
+          </a:p>
+        </p:txBody>
+      </p:sp>
+      <p:sp>
+        <p:nvSpPr>
+          <p:cNvPr id="8" name="sp8"/>
+          <p:cNvSpPr txBox="1"/>
+          <p:nvPr/>
+        </p:nvSpPr>
+        <p:spPr bwMode="auto">
+          <a:xfrm>
+            <a:off x="10932000" y="6606001"/>
+            <a:ext cx="1152000" cy="198000"/>
+          </a:xfrm>
+          <a:prstGeom prst="rect">
+            <a:avLst/>
+          </a:prstGeom>
+          <a:noFill/>
+          <a:ln>
+            <a:noFill/>
+          </a:ln>
+        </p:spPr>
+        <p:txBody>
+          <a:bodyPr wrap="square" anchor="t">
+            <a:normAutofit/>
+          </a:bodyPr>
+          <a:lstStyle/>
+          <a:p>
+            <a:pPr algn="r"/>
+            <a:r>
+              <a:rPr lang="ru-RU" altLang="en-US" sz="900" b="0" i="0" dirty="0" smtClean="0">
+                <a:solidFill>
+                  <a:srgbClr val="546E7A"/>
+                </a:solidFill>
+                <a:latin typeface="Calibri"/>
               </a:rPr>
               <a:t>8 / 15</a:t>
             </a:r>
@@ -7191,7 +6813,7 @@
 </file>
 
 <file path=ppt/slides/slide9.xml><?xml version="1.0" encoding="utf-8"?>
-<p:sld xmlns:a="http://schemas.openxmlformats.org/drawingml/2006/main" xmlns:p="http://schemas.openxmlformats.org/presentationml/2006/main" xmlns:r="http://schemas.openxmlformats.org/officeDocument/2006/relationships">
+<p:sld xmlns:a="http://schemas.openxmlformats.org/drawingml/2006/main" xmlns:p="http://schemas.openxmlformats.org/presentationml/2006/main" xmlns:r="http://schemas.openxmlformats.org/officeDocument/2006/relationships" show="1">
   <p:cSld>
     <p:spTree>
       <p:nvGrpSpPr>
@@ -7202,23 +6824,21 @@
       <p:grpSpPr>
         <a:xfrm>
           <a:off x="0" y="0"/>
-          <a:ext cx="0" cy="0"/>
+          <a:ext cx="12192000" cy="6858000"/>
           <a:chOff x="0" y="0"/>
-          <a:chExt cx="0" cy="0"/>
+          <a:chExt cx="12192000" cy="6858000"/>
         </a:xfrm>
       </p:grpSpPr>
       <p:sp>
         <p:nvSpPr>
-          <p:cNvPr id="10" name="Bg"/>
-          <p:cNvSpPr txBox="1">
-            <a:spLocks noGrp="1"/>
-          </p:cNvSpPr>
-          <p:nvPr/>
-        </p:nvSpPr>
-        <p:spPr>
+          <p:cNvPr id="2" name="sp2"/>
+          <p:cNvSpPr txBox="1"/>
+          <p:nvPr/>
+        </p:nvSpPr>
+        <p:spPr bwMode="auto">
           <a:xfrm>
             <a:off x="0" y="0"/>
-            <a:ext cx="12193200" cy="6858000"/>
+            <a:ext cx="12192000" cy="6858000"/>
           </a:xfrm>
           <a:prstGeom prst="rect">
             <a:avLst/>
@@ -7238,27 +6858,29 @@
       </p:sp>
       <p:sp>
         <p:nvSpPr>
-          <p:cNvPr id="11" name="Header"/>
-          <p:cNvSpPr txBox="1">
-            <a:spLocks noGrp="1"/>
-          </p:cNvSpPr>
-          <p:nvPr/>
-        </p:nvSpPr>
-        <p:spPr>
+          <p:cNvPr id="3" name="sp3"/>
+          <p:cNvSpPr txBox="1"/>
+          <p:nvPr/>
+        </p:nvSpPr>
+        <p:spPr bwMode="auto">
           <a:xfrm>
             <a:off x="0" y="0"/>
-            <a:ext cx="12193200" cy="1188000"/>
-          </a:xfrm>
-          <a:prstGeom prst="rect">
-            <a:avLst/>
-          </a:prstGeom>
-          <a:gradFill>
+            <a:ext cx="12192000" cy="1152000"/>
+          </a:xfrm>
+          <a:prstGeom prst="rect">
+            <a:avLst/>
+          </a:prstGeom>
+          <a:gradFill rotWithShape="1">
             <a:gsLst>
               <a:gs pos="0">
-                <a:srgbClr val="0D1B2A"/>
+                <a:solidFill>
+                  <a:srgbClr val="0D1B2A"/>
+                </a:solidFill>
               </a:gs>
               <a:gs pos="100000">
-                <a:srgbClr val="1565C0"/>
+                <a:solidFill>
+                  <a:srgbClr val="1565C0"/>
+                </a:solidFill>
               </a:gs>
             </a:gsLst>
             <a:lin ang="0" scaled="0"/>
@@ -7275,16 +6897,14 @@
       </p:sp>
       <p:sp>
         <p:nvSpPr>
-          <p:cNvPr id="12" name="Line12"/>
-          <p:cNvSpPr txBox="1">
-            <a:spLocks noGrp="1"/>
-          </p:cNvSpPr>
-          <p:nvPr/>
-        </p:nvSpPr>
-        <p:spPr>
-          <a:xfrm>
-            <a:off x="0" y="1170000"/>
-            <a:ext cx="12193200" cy="7200"/>
+          <p:cNvPr id="4" name="sp4"/>
+          <p:cNvSpPr txBox="1"/>
+          <p:nvPr/>
+        </p:nvSpPr>
+        <p:spPr bwMode="auto">
+          <a:xfrm>
+            <a:off x="0" y="1134000"/>
+            <a:ext cx="12192000" cy="43200"/>
           </a:xfrm>
           <a:prstGeom prst="rect">
             <a:avLst/>
@@ -7304,16 +6924,14 @@
       </p:sp>
       <p:sp>
         <p:nvSpPr>
-          <p:cNvPr id="13" name="Title"/>
-          <p:cNvSpPr txBox="1">
-            <a:spLocks noGrp="1"/>
-          </p:cNvSpPr>
-          <p:nvPr/>
-        </p:nvSpPr>
-        <p:spPr>
-          <a:xfrm>
-            <a:off x="251999" y="72000"/>
-            <a:ext cx="11761199" cy="1080000"/>
+          <p:cNvPr id="5" name="sp5"/>
+          <p:cNvSpPr txBox="1"/>
+          <p:nvPr/>
+        </p:nvSpPr>
+        <p:spPr bwMode="auto">
+          <a:xfrm>
+            <a:off x="251999" y="54000"/>
+            <a:ext cx="11760000" cy="1062000"/>
           </a:xfrm>
           <a:prstGeom prst="rect">
             <a:avLst/>
@@ -7329,48 +6947,46 @@
           </a:bodyPr>
           <a:lstStyle/>
           <a:p>
-            <a:pPr algn="l">
-              <a:spcBef>
-                <a:spcPts val="0"/>
-              </a:spcBef>
-            </a:pPr>
-            <a:r>
-              <a:rPr lang="ru-RU" sz="2100" b="1" i="0" dirty="0" smtClean="0">
+            <a:pPr algn="l"/>
+            <a:r>
+              <a:rPr lang="ru-RU" altLang="en-US" sz="2200" b="1" i="0" dirty="0" smtClean="0">
                 <a:solidFill>
                   <a:srgbClr val="FFFFFF"/>
                 </a:solidFill>
-                <a:latin typeface="+mj-lt"/>
-              </a:rPr>
-              <a:t>Ключевые результаты: коэффициенты FE-моделей по группам стран</a:t>
-            </a:r>
-          </a:p>
-        </p:txBody>
-      </p:sp>
-      <p:sp>
-        <p:nvSpPr>
-          <p:cNvPr id="20" name="StatCard"/>
-          <p:cNvSpPr txBox="1">
-            <a:spLocks noGrp="1"/>
-          </p:cNvSpPr>
-          <p:nvPr/>
-        </p:nvSpPr>
-        <p:spPr>
-          <a:xfrm>
-            <a:off x="144000" y="1404000"/>
-            <a:ext cx="3872400" cy="2340000"/>
+                <a:latin typeface="Calibri"/>
+              </a:rPr>
+              <a:t>Результаты FE-моделей: коэффициент при ln(интернет-проникновение)</a:t>
+            </a:r>
+          </a:p>
+        </p:txBody>
+      </p:sp>
+      <p:sp>
+        <p:nvSpPr>
+          <p:cNvPr id="6" name="sp6"/>
+          <p:cNvSpPr txBox="1"/>
+          <p:nvPr/>
+        </p:nvSpPr>
+        <p:spPr bwMode="auto">
+          <a:xfrm>
+            <a:off x="144000" y="1314000"/>
+            <a:ext cx="3872000" cy="5346000"/>
           </a:xfrm>
           <a:prstGeom prst="roundRect">
             <a:avLst>
               <a:gd name="adj" fmla="val 8000"/>
             </a:avLst>
           </a:prstGeom>
-          <a:gradFill>
+          <a:gradFill rotWithShape="1">
             <a:gsLst>
               <a:gs pos="0">
-                <a:srgbClr val="1565C0"/>
+                <a:solidFill>
+                  <a:srgbClr val="1565C0"/>
+                </a:solidFill>
               </a:gs>
               <a:gs pos="100000">
-                <a:srgbClr val="0D1B2A"/>
+                <a:solidFill>
+                  <a:srgbClr val="0D1B2A"/>
+                </a:solidFill>
               </a:gs>
             </a:gsLst>
             <a:lin ang="5400000" scaled="0"/>
@@ -7387,16 +7003,14 @@
       </p:sp>
       <p:sp>
         <p:nvSpPr>
-          <p:cNvPr id="30" name="Val"/>
-          <p:cNvSpPr txBox="1">
-            <a:spLocks noGrp="1"/>
-          </p:cNvSpPr>
-          <p:nvPr/>
-        </p:nvSpPr>
-        <p:spPr>
-          <a:xfrm>
-            <a:off x="144000" y="1620000"/>
-            <a:ext cx="3872400" cy="1080000"/>
+          <p:cNvPr id="7" name="sp7"/>
+          <p:cNvSpPr txBox="1"/>
+          <p:nvPr/>
+        </p:nvSpPr>
+        <p:spPr bwMode="auto">
+          <a:xfrm>
+            <a:off x="144000" y="1494000"/>
+            <a:ext cx="3872000" cy="1080000"/>
           </a:xfrm>
           <a:prstGeom prst="rect">
             <a:avLst/>
@@ -7412,35 +7026,29 @@
           </a:bodyPr>
           <a:lstStyle/>
           <a:p>
-            <a:pPr algn="ctr">
-              <a:spcBef>
-                <a:spcPts val="0"/>
-              </a:spcBef>
-            </a:pPr>
-            <a:r>
-              <a:rPr lang="ru-RU" sz="3600" b="1" i="0" dirty="0" smtClean="0">
+            <a:pPr algn="ctr"/>
+            <a:r>
+              <a:rPr lang="ru-RU" altLang="en-US" sz="3200" b="1" i="0" dirty="0" smtClean="0">
                 <a:solidFill>
                   <a:srgbClr val="FFC300"/>
                 </a:solidFill>
-                <a:latin typeface="+mj-lt"/>
-              </a:rPr>
-              <a:t>β=0.197</a:t>
-            </a:r>
-          </a:p>
-        </p:txBody>
-      </p:sp>
-      <p:sp>
-        <p:nvSpPr>
-          <p:cNvPr id="40" name="Label"/>
-          <p:cNvSpPr txBox="1">
-            <a:spLocks noGrp="1"/>
-          </p:cNvSpPr>
-          <p:nvPr/>
-        </p:nvSpPr>
-        <p:spPr>
-          <a:xfrm>
-            <a:off x="198000" y="2664000"/>
-            <a:ext cx="3764400" cy="1080000"/>
+                <a:latin typeface="Calibri"/>
+              </a:rPr>
+              <a:t>b=0.197</a:t>
+            </a:r>
+          </a:p>
+        </p:txBody>
+      </p:sp>
+      <p:sp>
+        <p:nvSpPr>
+          <p:cNvPr id="8" name="sp8"/>
+          <p:cNvSpPr txBox="1"/>
+          <p:nvPr/>
+        </p:nvSpPr>
+        <p:spPr bwMode="auto">
+          <a:xfrm>
+            <a:off x="198000" y="2502000"/>
+            <a:ext cx="3764000" cy="4050000"/>
           </a:xfrm>
           <a:prstGeom prst="rect">
             <a:avLst/>
@@ -7456,96 +7064,94 @@
           </a:bodyPr>
           <a:lstStyle/>
           <a:p>
-            <a:pPr algn="ctr">
-              <a:spcBef>
-                <a:spcPts val="0"/>
-              </a:spcBef>
-            </a:pPr>
-            <a:r>
-              <a:rPr lang="ru-RU" sz="1100" b="0" i="0" dirty="0" smtClean="0">
+            <a:pPr algn="ctr"/>
+            <a:r>
+              <a:rPr lang="ru-RU" altLang="en-US" sz="1100" b="0" i="0" dirty="0" smtClean="0">
                 <a:solidFill>
                   <a:srgbClr val="FFFFFF"/>
                 </a:solidFill>
-                <a:latin typeface="+mj-lt"/>
-              </a:rPr>
-              <a:t>Развитые экономики</a:t>
-            </a:r>
-          </a:p>
-          <a:p>
-            <a:pPr algn="ctr">
-              <a:spcBef>
-                <a:spcPts val="0"/>
-              </a:spcBef>
-            </a:pPr>
-            <a:r>
-              <a:rPr lang="ru-RU" sz="1100" b="0" i="0" dirty="0" smtClean="0">
+                <a:latin typeface="Calibri"/>
+              </a:rPr>
+              <a:t>Развитые</a:t>
+            </a:r>
+          </a:p>
+          <a:p>
+            <a:pPr algn="ctr"/>
+            <a:r>
+              <a:rPr lang="ru-RU" altLang="en-US" sz="1100" b="0" i="0" dirty="0" smtClean="0">
                 <a:solidFill>
                   <a:srgbClr val="FFFFFF"/>
                 </a:solidFill>
-                <a:latin typeface="+mj-lt"/>
+                <a:latin typeface="Calibri"/>
+              </a:rPr>
+              <a:t>экономики</a:t>
+            </a:r>
+          </a:p>
+          <a:p>
+            <a:pPr algn="ctr"/>
+            <a:r>
+              <a:rPr lang="ru-RU" altLang="en-US" sz="1100" b="0" i="0" dirty="0" smtClean="0">
+                <a:solidFill>
+                  <a:srgbClr val="FFFFFF"/>
+                </a:solidFill>
+                <a:latin typeface="Calibri"/>
               </a:rPr>
               <a:t>(p&lt;0.001)</a:t>
             </a:r>
           </a:p>
           <a:p>
-            <a:pPr algn="ctr">
-              <a:spcBef>
-                <a:spcPts val="0"/>
-              </a:spcBef>
-            </a:pPr>
-            <a:r>
-              <a:rPr lang="ru-RU" sz="1100" b="0" i="0" dirty="0" smtClean="0">
+            <a:pPr algn="ctr"/>
+            <a:r>
+              <a:rPr lang="ru-RU" altLang="en-US" sz="1100" b="0" i="0" dirty="0" smtClean="0">
                 <a:solidFill>
                   <a:srgbClr val="FFFFFF"/>
                 </a:solidFill>
-                <a:latin typeface="+mj-lt"/>
-              </a:rPr>
-              <a:t>+COVID: β=0.394***</a:t>
-            </a:r>
-          </a:p>
-          <a:p>
-            <a:pPr algn="ctr">
-              <a:spcBef>
-                <a:spcPts val="0"/>
-              </a:spcBef>
-            </a:pPr>
-            <a:r>
-              <a:rPr lang="ru-RU" sz="1100" b="0" i="0" dirty="0" smtClean="0">
+                <a:latin typeface="Calibri"/>
+              </a:rPr>
+              <a:t>+COVID: b=0.394***</a:t>
+            </a:r>
+          </a:p>
+          <a:p>
+            <a:pPr algn="ctr"/>
+            <a:r>
+              <a:rPr lang="ru-RU" altLang="en-US" sz="1100" b="0" i="0" dirty="0" smtClean="0">
                 <a:solidFill>
                   <a:srgbClr val="FFFFFF"/>
                 </a:solidFill>
-                <a:latin typeface="+mj-lt"/>
-              </a:rPr>
-              <a:t>+Геополит.: β=0.289**</a:t>
-            </a:r>
-          </a:p>
-        </p:txBody>
-      </p:sp>
-      <p:sp>
-        <p:nvSpPr>
-          <p:cNvPr id="21" name="StatCard"/>
-          <p:cNvSpPr txBox="1">
-            <a:spLocks noGrp="1"/>
-          </p:cNvSpPr>
-          <p:nvPr/>
-        </p:nvSpPr>
-        <p:spPr>
-          <a:xfrm>
-            <a:off x="4160400" y="1404000"/>
-            <a:ext cx="3872400" cy="2340000"/>
+                <a:latin typeface="Calibri"/>
+              </a:rPr>
+              <a:t>+Геополит.: b=0.289**</a:t>
+            </a:r>
+          </a:p>
+        </p:txBody>
+      </p:sp>
+      <p:sp>
+        <p:nvSpPr>
+          <p:cNvPr id="9" name="sp9"/>
+          <p:cNvSpPr txBox="1"/>
+          <p:nvPr/>
+        </p:nvSpPr>
+        <p:spPr bwMode="auto">
+          <a:xfrm>
+            <a:off x="4160000" y="1314000"/>
+            <a:ext cx="3872000" cy="5346000"/>
           </a:xfrm>
           <a:prstGeom prst="roundRect">
             <a:avLst>
               <a:gd name="adj" fmla="val 8000"/>
             </a:avLst>
           </a:prstGeom>
-          <a:gradFill>
+          <a:gradFill rotWithShape="1">
             <a:gsLst>
               <a:gs pos="0">
-                <a:srgbClr val="0D1B2A"/>
+                <a:solidFill>
+                  <a:srgbClr val="0D1B2A"/>
+                </a:solidFill>
               </a:gs>
               <a:gs pos="100000">
-                <a:srgbClr val="1565C0"/>
+                <a:solidFill>
+                  <a:srgbClr val="1565C0"/>
+                </a:solidFill>
               </a:gs>
             </a:gsLst>
             <a:lin ang="5400000" scaled="0"/>
@@ -7562,16 +7168,14 @@
       </p:sp>
       <p:sp>
         <p:nvSpPr>
-          <p:cNvPr id="31" name="Val"/>
-          <p:cNvSpPr txBox="1">
-            <a:spLocks noGrp="1"/>
-          </p:cNvSpPr>
-          <p:nvPr/>
-        </p:nvSpPr>
-        <p:spPr>
-          <a:xfrm>
-            <a:off x="4160400" y="1620000"/>
-            <a:ext cx="3872400" cy="1080000"/>
+          <p:cNvPr id="10" name="sp10"/>
+          <p:cNvSpPr txBox="1"/>
+          <p:nvPr/>
+        </p:nvSpPr>
+        <p:spPr bwMode="auto">
+          <a:xfrm>
+            <a:off x="4160000" y="1494000"/>
+            <a:ext cx="3872000" cy="1080000"/>
           </a:xfrm>
           <a:prstGeom prst="rect">
             <a:avLst/>
@@ -7587,35 +7191,29 @@
           </a:bodyPr>
           <a:lstStyle/>
           <a:p>
-            <a:pPr algn="ctr">
-              <a:spcBef>
-                <a:spcPts val="0"/>
-              </a:spcBef>
-            </a:pPr>
-            <a:r>
-              <a:rPr lang="ru-RU" sz="3600" b="1" i="0" dirty="0" smtClean="0">
+            <a:pPr algn="ctr"/>
+            <a:r>
+              <a:rPr lang="ru-RU" altLang="en-US" sz="3200" b="1" i="0" dirty="0" smtClean="0">
                 <a:solidFill>
                   <a:srgbClr val="FFC300"/>
                 </a:solidFill>
-                <a:latin typeface="+mj-lt"/>
-              </a:rPr>
-              <a:t>β=0.309</a:t>
-            </a:r>
-          </a:p>
-        </p:txBody>
-      </p:sp>
-      <p:sp>
-        <p:nvSpPr>
-          <p:cNvPr id="41" name="Label"/>
-          <p:cNvSpPr txBox="1">
-            <a:spLocks noGrp="1"/>
-          </p:cNvSpPr>
-          <p:nvPr/>
-        </p:nvSpPr>
-        <p:spPr>
-          <a:xfrm>
-            <a:off x="4214400" y="2664000"/>
-            <a:ext cx="3764400" cy="1080000"/>
+                <a:latin typeface="Calibri"/>
+              </a:rPr>
+              <a:t>b=0.309</a:t>
+            </a:r>
+          </a:p>
+        </p:txBody>
+      </p:sp>
+      <p:sp>
+        <p:nvSpPr>
+          <p:cNvPr id="11" name="sp11"/>
+          <p:cNvSpPr txBox="1"/>
+          <p:nvPr/>
+        </p:nvSpPr>
+        <p:spPr bwMode="auto">
+          <a:xfrm>
+            <a:off x="4214000" y="2502000"/>
+            <a:ext cx="3764000" cy="4050000"/>
           </a:xfrm>
           <a:prstGeom prst="rect">
             <a:avLst/>
@@ -7631,96 +7229,94 @@
           </a:bodyPr>
           <a:lstStyle/>
           <a:p>
-            <a:pPr algn="ctr">
-              <a:spcBef>
-                <a:spcPts val="0"/>
-              </a:spcBef>
-            </a:pPr>
-            <a:r>
-              <a:rPr lang="ru-RU" sz="1100" b="0" i="0" dirty="0" smtClean="0">
+            <a:pPr algn="ctr"/>
+            <a:r>
+              <a:rPr lang="ru-RU" altLang="en-US" sz="1100" b="0" i="0" dirty="0" smtClean="0">
                 <a:solidFill>
                   <a:srgbClr val="FFFFFF"/>
                 </a:solidFill>
-                <a:latin typeface="+mj-lt"/>
-              </a:rPr>
-              <a:t>Переходные экономики</a:t>
-            </a:r>
-          </a:p>
-          <a:p>
-            <a:pPr algn="ctr">
-              <a:spcBef>
-                <a:spcPts val="0"/>
-              </a:spcBef>
-            </a:pPr>
-            <a:r>
-              <a:rPr lang="ru-RU" sz="1100" b="0" i="0" dirty="0" smtClean="0">
+                <a:latin typeface="Calibri"/>
+              </a:rPr>
+              <a:t>Переходные</a:t>
+            </a:r>
+          </a:p>
+          <a:p>
+            <a:pPr algn="ctr"/>
+            <a:r>
+              <a:rPr lang="ru-RU" altLang="en-US" sz="1100" b="0" i="0" dirty="0" smtClean="0">
                 <a:solidFill>
                   <a:srgbClr val="FFFFFF"/>
                 </a:solidFill>
-                <a:latin typeface="+mj-lt"/>
+                <a:latin typeface="Calibri"/>
+              </a:rPr>
+              <a:t>экономики</a:t>
+            </a:r>
+          </a:p>
+          <a:p>
+            <a:pPr algn="ctr"/>
+            <a:r>
+              <a:rPr lang="ru-RU" altLang="en-US" sz="1100" b="0" i="0" dirty="0" smtClean="0">
+                <a:solidFill>
+                  <a:srgbClr val="FFFFFF"/>
+                </a:solidFill>
+                <a:latin typeface="Calibri"/>
               </a:rPr>
               <a:t>(p&lt;0.001)</a:t>
             </a:r>
           </a:p>
           <a:p>
-            <a:pPr algn="ctr">
-              <a:spcBef>
-                <a:spcPts val="0"/>
-              </a:spcBef>
-            </a:pPr>
-            <a:r>
-              <a:rPr lang="ru-RU" sz="1100" b="0" i="0" dirty="0" smtClean="0">
+            <a:pPr algn="ctr"/>
+            <a:r>
+              <a:rPr lang="ru-RU" altLang="en-US" sz="1100" b="0" i="0" dirty="0" smtClean="0">
                 <a:solidFill>
                   <a:srgbClr val="FFFFFF"/>
                 </a:solidFill>
-                <a:latin typeface="+mj-lt"/>
+                <a:latin typeface="Calibri"/>
               </a:rPr>
               <a:t>Наибольший</a:t>
             </a:r>
           </a:p>
           <a:p>
-            <a:pPr algn="ctr">
-              <a:spcBef>
-                <a:spcPts val="0"/>
-              </a:spcBef>
-            </a:pPr>
-            <a:r>
-              <a:rPr lang="ru-RU" sz="1100" b="0" i="0" dirty="0" smtClean="0">
+            <a:pPr algn="ctr"/>
+            <a:r>
+              <a:rPr lang="ru-RU" altLang="en-US" sz="1100" b="0" i="0" dirty="0" smtClean="0">
                 <a:solidFill>
                   <a:srgbClr val="FFFFFF"/>
                 </a:solidFill>
-                <a:latin typeface="+mj-lt"/>
-              </a:rPr>
-              <a:t>базовый эффект</a:t>
-            </a:r>
-          </a:p>
-        </p:txBody>
-      </p:sp>
-      <p:sp>
-        <p:nvSpPr>
-          <p:cNvPr id="22" name="StatCard"/>
-          <p:cNvSpPr txBox="1">
-            <a:spLocks noGrp="1"/>
-          </p:cNvSpPr>
-          <p:nvPr/>
-        </p:nvSpPr>
-        <p:spPr>
-          <a:xfrm>
-            <a:off x="8176800" y="1404000"/>
-            <a:ext cx="3872400" cy="2340000"/>
+                <a:latin typeface="Calibri"/>
+              </a:rPr>
+              <a:t>эффект</a:t>
+            </a:r>
+          </a:p>
+        </p:txBody>
+      </p:sp>
+      <p:sp>
+        <p:nvSpPr>
+          <p:cNvPr id="12" name="sp12"/>
+          <p:cNvSpPr txBox="1"/>
+          <p:nvPr/>
+        </p:nvSpPr>
+        <p:spPr bwMode="auto">
+          <a:xfrm>
+            <a:off x="8176000" y="1314000"/>
+            <a:ext cx="3872000" cy="5346000"/>
           </a:xfrm>
           <a:prstGeom prst="roundRect">
             <a:avLst>
               <a:gd name="adj" fmla="val 8000"/>
             </a:avLst>
           </a:prstGeom>
-          <a:gradFill>
+          <a:gradFill rotWithShape="1">
             <a:gsLst>
               <a:gs pos="0">
-                <a:srgbClr val="1565C0"/>
+                <a:solidFill>
+                  <a:srgbClr val="0E4D92"/>
+                </a:solidFill>
               </a:gs>
               <a:gs pos="100000">
-                <a:srgbClr val="0D1B2A"/>
+                <a:solidFill>
+                  <a:srgbClr val="1565C0"/>
+                </a:solidFill>
               </a:gs>
             </a:gsLst>
             <a:lin ang="5400000" scaled="0"/>
@@ -7737,16 +7333,14 @@
       </p:sp>
       <p:sp>
         <p:nvSpPr>
-          <p:cNvPr id="32" name="Val"/>
-          <p:cNvSpPr txBox="1">
-            <a:spLocks noGrp="1"/>
-          </p:cNvSpPr>
-          <p:nvPr/>
-        </p:nvSpPr>
-        <p:spPr>
-          <a:xfrm>
-            <a:off x="8176800" y="1620000"/>
-            <a:ext cx="3872400" cy="1080000"/>
+          <p:cNvPr id="13" name="sp13"/>
+          <p:cNvSpPr txBox="1"/>
+          <p:nvPr/>
+        </p:nvSpPr>
+        <p:spPr bwMode="auto">
+          <a:xfrm>
+            <a:off x="8176000" y="1494000"/>
+            <a:ext cx="3872000" cy="1080000"/>
           </a:xfrm>
           <a:prstGeom prst="rect">
             <a:avLst/>
@@ -7762,35 +7356,29 @@
           </a:bodyPr>
           <a:lstStyle/>
           <a:p>
-            <a:pPr algn="ctr">
-              <a:spcBef>
-                <a:spcPts val="0"/>
-              </a:spcBef>
-            </a:pPr>
-            <a:r>
-              <a:rPr lang="ru-RU" sz="3600" b="1" i="0" dirty="0" smtClean="0">
+            <a:pPr algn="ctr"/>
+            <a:r>
+              <a:rPr lang="ru-RU" altLang="en-US" sz="3200" b="1" i="0" dirty="0" smtClean="0">
                 <a:solidFill>
                   <a:srgbClr val="FFC300"/>
                 </a:solidFill>
-                <a:latin typeface="+mj-lt"/>
-              </a:rPr>
-              <a:t>β=0.198</a:t>
-            </a:r>
-          </a:p>
-        </p:txBody>
-      </p:sp>
-      <p:sp>
-        <p:nvSpPr>
-          <p:cNvPr id="42" name="Label"/>
-          <p:cNvSpPr txBox="1">
-            <a:spLocks noGrp="1"/>
-          </p:cNvSpPr>
-          <p:nvPr/>
-        </p:nvSpPr>
-        <p:spPr>
-          <a:xfrm>
-            <a:off x="8230800" y="2664000"/>
-            <a:ext cx="3764400" cy="1080000"/>
+                <a:latin typeface="Calibri"/>
+              </a:rPr>
+              <a:t>b=0.198</a:t>
+            </a:r>
+          </a:p>
+        </p:txBody>
+      </p:sp>
+      <p:sp>
+        <p:nvSpPr>
+          <p:cNvPr id="14" name="sp14"/>
+          <p:cNvSpPr txBox="1"/>
+          <p:nvPr/>
+        </p:nvSpPr>
+        <p:spPr bwMode="auto">
+          <a:xfrm>
+            <a:off x="8230000" y="2502000"/>
+            <a:ext cx="3764000" cy="4050000"/>
           </a:xfrm>
           <a:prstGeom prst="rect">
             <a:avLst/>
@@ -7806,81 +7394,61 @@
           </a:bodyPr>
           <a:lstStyle/>
           <a:p>
-            <a:pPr algn="ctr">
-              <a:spcBef>
-                <a:spcPts val="0"/>
-              </a:spcBef>
-            </a:pPr>
-            <a:r>
-              <a:rPr lang="ru-RU" sz="1100" b="0" i="0" dirty="0" smtClean="0">
+            <a:pPr algn="ctr"/>
+            <a:r>
+              <a:rPr lang="ru-RU" altLang="en-US" sz="1100" b="0" i="0" dirty="0" smtClean="0">
                 <a:solidFill>
                   <a:srgbClr val="FFFFFF"/>
                 </a:solidFill>
-                <a:latin typeface="+mj-lt"/>
+                <a:latin typeface="Calibri"/>
               </a:rPr>
               <a:t>Развивающиеся</a:t>
             </a:r>
           </a:p>
           <a:p>
-            <a:pPr algn="ctr">
-              <a:spcBef>
-                <a:spcPts val="0"/>
-              </a:spcBef>
-            </a:pPr>
-            <a:r>
-              <a:rPr lang="ru-RU" sz="1100" b="0" i="0" dirty="0" smtClean="0">
+            <a:pPr algn="ctr"/>
+            <a:r>
+              <a:rPr lang="ru-RU" altLang="en-US" sz="1100" b="0" i="0" dirty="0" smtClean="0">
                 <a:solidFill>
                   <a:srgbClr val="FFFFFF"/>
                 </a:solidFill>
-                <a:latin typeface="+mj-lt"/>
-              </a:rPr>
-              <a:t>вкл. Узбекистан</a:t>
-            </a:r>
-          </a:p>
-          <a:p>
-            <a:pPr algn="ctr">
-              <a:spcBef>
-                <a:spcPts val="0"/>
-              </a:spcBef>
-            </a:pPr>
-            <a:r>
-              <a:rPr lang="ru-RU" sz="1100" b="0" i="0" dirty="0" smtClean="0">
+                <a:latin typeface="Calibri"/>
+              </a:rPr>
+              <a:t>(вкл. Узбекистан)</a:t>
+            </a:r>
+          </a:p>
+          <a:p>
+            <a:pPr algn="ctr"/>
+            <a:r>
+              <a:rPr lang="ru-RU" altLang="en-US" sz="1100" b="0" i="0" dirty="0" smtClean="0">
                 <a:solidFill>
                   <a:srgbClr val="FFFFFF"/>
                 </a:solidFill>
-                <a:latin typeface="+mj-lt"/>
+                <a:latin typeface="Calibri"/>
               </a:rPr>
               <a:t>(p&lt;0.001)</a:t>
             </a:r>
           </a:p>
           <a:p>
-            <a:pPr algn="ctr">
-              <a:spcBef>
-                <a:spcPts val="0"/>
-              </a:spcBef>
-            </a:pPr>
-            <a:r>
-              <a:rPr lang="ru-RU" sz="1100" b="0" i="0" dirty="0" smtClean="0">
+            <a:pPr algn="ctr"/>
+            <a:r>
+              <a:rPr lang="ru-RU" altLang="en-US" sz="1100" b="0" i="0" dirty="0" smtClean="0">
                 <a:solidFill>
                   <a:srgbClr val="FFFFFF"/>
                 </a:solidFill>
-                <a:latin typeface="+mj-lt"/>
+                <a:latin typeface="Calibri"/>
               </a:rPr>
               <a:t>Кризисные члены</a:t>
             </a:r>
           </a:p>
           <a:p>
-            <a:pPr algn="ctr">
-              <a:spcBef>
-                <a:spcPts val="0"/>
-              </a:spcBef>
-            </a:pPr>
-            <a:r>
-              <a:rPr lang="ru-RU" sz="1100" b="0" i="0" dirty="0" smtClean="0">
+            <a:pPr algn="ctr"/>
+            <a:r>
+              <a:rPr lang="ru-RU" altLang="en-US" sz="1100" b="0" i="0" dirty="0" smtClean="0">
                 <a:solidFill>
                   <a:srgbClr val="FFFFFF"/>
                 </a:solidFill>
-                <a:latin typeface="+mj-lt"/>
+                <a:latin typeface="Calibri"/>
               </a:rPr>
               <a:t>незначимы</a:t>
             </a:r>
@@ -7889,86 +7457,74 @@
       </p:sp>
       <p:sp>
         <p:nvSpPr>
-          <p:cNvPr id="60" name="Src"/>
-          <p:cNvSpPr txBox="1">
-            <a:spLocks noGrp="1"/>
-          </p:cNvSpPr>
-          <p:nvPr/>
-        </p:nvSpPr>
-        <p:spPr>
-          <a:xfrm>
-            <a:off x="180000" y="6570000"/>
-            <a:ext cx="11833200" cy="216000"/>
-          </a:xfrm>
-          <a:prstGeom prst="rect">
-            <a:avLst/>
-          </a:prstGeom>
-          <a:noFill/>
-          <a:ln>
-            <a:noFill/>
-          </a:ln>
-        </p:spPr>
-        <p:txBody>
-          <a:bodyPr wrap="square" anchor="ctr">
-            <a:normAutofit/>
-          </a:bodyPr>
-          <a:lstStyle/>
-          <a:p>
-            <a:pPr algn="r">
-              <a:spcBef>
-                <a:spcPts val="0"/>
-              </a:spcBef>
-            </a:pPr>
-            <a:r>
-              <a:rPr lang="ru-RU" sz="900" b="0" i="1" dirty="0" smtClean="0">
+          <p:cNvPr id="15" name="sp15"/>
+          <p:cNvSpPr txBox="1"/>
+          <p:nvPr/>
+        </p:nvSpPr>
+        <p:spPr bwMode="auto">
+          <a:xfrm>
+            <a:off x="180000" y="6624000"/>
+            <a:ext cx="11832000" cy="180000"/>
+          </a:xfrm>
+          <a:prstGeom prst="rect">
+            <a:avLst/>
+          </a:prstGeom>
+          <a:noFill/>
+          <a:ln>
+            <a:noFill/>
+          </a:ln>
+        </p:spPr>
+        <p:txBody>
+          <a:bodyPr wrap="square" anchor="t">
+            <a:normAutofit/>
+          </a:bodyPr>
+          <a:lstStyle/>
+          <a:p>
+            <a:pPr algn="r"/>
+            <a:r>
+              <a:rPr lang="ru-RU" altLang="en-US" sz="800" b="0" i="1" dirty="0" smtClean="0">
                 <a:solidFill>
                   <a:srgbClr val="546E7A"/>
                 </a:solidFill>
-                <a:latin typeface="+mj-lt"/>
-              </a:rPr>
-              <a:t>Гипотеза H₁ подтверждена во всех трёх группах стран. Источник: расчёты автора, R Studio.</a:t>
-            </a:r>
-          </a:p>
-        </p:txBody>
-      </p:sp>
-      <p:sp>
-        <p:nvSpPr>
-          <p:cNvPr id="61" name="SlideNum"/>
-          <p:cNvSpPr txBox="1">
-            <a:spLocks noGrp="1"/>
-          </p:cNvSpPr>
-          <p:nvPr/>
-        </p:nvSpPr>
-        <p:spPr>
-          <a:xfrm>
-            <a:off x="10933200" y="6624000"/>
-            <a:ext cx="1152000" cy="180000"/>
-          </a:xfrm>
-          <a:prstGeom prst="rect">
-            <a:avLst/>
-          </a:prstGeom>
-          <a:noFill/>
-          <a:ln>
-            <a:noFill/>
-          </a:ln>
-        </p:spPr>
-        <p:txBody>
-          <a:bodyPr wrap="square" anchor="ctr">
-            <a:normAutofit/>
-          </a:bodyPr>
-          <a:lstStyle/>
-          <a:p>
-            <a:pPr algn="r">
-              <a:spcBef>
-                <a:spcPts val="0"/>
-              </a:spcBef>
-            </a:pPr>
-            <a:r>
-              <a:rPr lang="ru-RU" sz="900" b="0" i="0" dirty="0" smtClean="0">
-                <a:solidFill>
-                  <a:srgbClr val="90E0EF"/>
-                </a:solidFill>
-                <a:latin typeface="+mj-lt"/>
+                <a:latin typeface="Calibri"/>
+              </a:rPr>
+              <a:t>Гипотеза H1 подтверждена во всех трёх группах. Источник: расчёты автора, R Studio.</a:t>
+            </a:r>
+          </a:p>
+        </p:txBody>
+      </p:sp>
+      <p:sp>
+        <p:nvSpPr>
+          <p:cNvPr id="16" name="sp16"/>
+          <p:cNvSpPr txBox="1"/>
+          <p:nvPr/>
+        </p:nvSpPr>
+        <p:spPr bwMode="auto">
+          <a:xfrm>
+            <a:off x="10932000" y="6606001"/>
+            <a:ext cx="1152000" cy="198000"/>
+          </a:xfrm>
+          <a:prstGeom prst="rect">
+            <a:avLst/>
+          </a:prstGeom>
+          <a:noFill/>
+          <a:ln>
+            <a:noFill/>
+          </a:ln>
+        </p:spPr>
+        <p:txBody>
+          <a:bodyPr wrap="square" anchor="t">
+            <a:normAutofit/>
+          </a:bodyPr>
+          <a:lstStyle/>
+          <a:p>
+            <a:pPr algn="r"/>
+            <a:r>
+              <a:rPr lang="ru-RU" altLang="en-US" sz="900" b="0" i="0" dirty="0" smtClean="0">
+                <a:solidFill>
+                  <a:srgbClr val="546E7A"/>
+                </a:solidFill>
+                <a:latin typeface="Calibri"/>
               </a:rPr>
               <a:t>9 / 15</a:t>
             </a:r>
